--- a/Sankareswari_Integrate LangFuse _Assignment1.pptx
+++ b/Sankareswari_Integrate LangFuse _Assignment1.pptx
@@ -3,10 +3,16 @@
 <p:presentation xmlns:a="http://schemas.openxmlformats.org/drawingml/2006/main" xmlns:r="http://schemas.openxmlformats.org/officeDocument/2006/relationships" xmlns:p="http://schemas.openxmlformats.org/presentationml/2006/main" saveSubsetFonts="1" autoCompressPictures="0">
   <p:sldMasterIdLst>
     <p:sldMasterId id="2147483648" r:id="rId1"/>
+    <p:sldMasterId id="2147483660" r:id="rId2"/>
   </p:sldMasterIdLst>
+  <p:notesMasterIdLst>
+    <p:notesMasterId r:id="rId7"/>
+  </p:notesMasterIdLst>
   <p:sldIdLst>
-    <p:sldId id="256" r:id="rId2"/>
-    <p:sldId id="257" r:id="rId3"/>
+    <p:sldId id="2147476792" r:id="rId3"/>
+    <p:sldId id="256" r:id="rId4"/>
+    <p:sldId id="257" r:id="rId5"/>
+    <p:sldId id="258" r:id="rId6"/>
   </p:sldIdLst>
   <p:sldSz cx="12192000" cy="6858000"/>
   <p:notesSz cx="6858000" cy="9144000"/>
@@ -105,7 +111,538 @@
       </a:defRPr>
     </a:lvl9pPr>
   </p:defaultTextStyle>
+  <p:extLst>
+    <p:ext uri="{EFAFB233-063F-42B5-8137-9DF3F51BA10A}">
+      <p15:sldGuideLst xmlns:p15="http://schemas.microsoft.com/office/powerpoint/2012/main"/>
+    </p:ext>
+  </p:extLst>
 </p:presentation>
+</file>
+
+<file path=ppt/notesMasters/notesMaster1.xml><?xml version="1.0" encoding="utf-8"?>
+<p:notesMaster xmlns:a="http://schemas.openxmlformats.org/drawingml/2006/main" xmlns:r="http://schemas.openxmlformats.org/officeDocument/2006/relationships" xmlns:p="http://schemas.openxmlformats.org/presentationml/2006/main">
+  <p:cSld>
+    <p:bg>
+      <p:bgRef idx="1001">
+        <a:schemeClr val="bg1"/>
+      </p:bgRef>
+    </p:bg>
+    <p:spTree>
+      <p:nvGrpSpPr>
+        <p:cNvPr id="1" name=""/>
+        <p:cNvGrpSpPr/>
+        <p:nvPr/>
+      </p:nvGrpSpPr>
+      <p:grpSpPr>
+        <a:xfrm>
+          <a:off x="0" y="0"/>
+          <a:ext cx="0" cy="0"/>
+          <a:chOff x="0" y="0"/>
+          <a:chExt cx="0" cy="0"/>
+        </a:xfrm>
+      </p:grpSpPr>
+      <p:sp>
+        <p:nvSpPr>
+          <p:cNvPr id="2" name="Header Placeholder 1"/>
+          <p:cNvSpPr>
+            <a:spLocks noGrp="1"/>
+          </p:cNvSpPr>
+          <p:nvPr>
+            <p:ph type="hdr" sz="quarter"/>
+          </p:nvPr>
+        </p:nvSpPr>
+        <p:spPr>
+          <a:xfrm>
+            <a:off x="0" y="0"/>
+            <a:ext cx="2971800" cy="458788"/>
+          </a:xfrm>
+          <a:prstGeom prst="rect">
+            <a:avLst/>
+          </a:prstGeom>
+        </p:spPr>
+        <p:txBody>
+          <a:bodyPr vert="horz" lIns="91440" tIns="45720" rIns="91440" bIns="45720" rtlCol="0"/>
+          <a:lstStyle>
+            <a:lvl1pPr algn="l">
+              <a:defRPr sz="1200"/>
+            </a:lvl1pPr>
+          </a:lstStyle>
+          <a:p>
+            <a:endParaRPr lang="en-US"/>
+          </a:p>
+        </p:txBody>
+      </p:sp>
+      <p:sp>
+        <p:nvSpPr>
+          <p:cNvPr id="3" name="Date Placeholder 2"/>
+          <p:cNvSpPr>
+            <a:spLocks noGrp="1"/>
+          </p:cNvSpPr>
+          <p:nvPr>
+            <p:ph type="dt" idx="1"/>
+          </p:nvPr>
+        </p:nvSpPr>
+        <p:spPr>
+          <a:xfrm>
+            <a:off x="3884613" y="0"/>
+            <a:ext cx="2971800" cy="458788"/>
+          </a:xfrm>
+          <a:prstGeom prst="rect">
+            <a:avLst/>
+          </a:prstGeom>
+        </p:spPr>
+        <p:txBody>
+          <a:bodyPr vert="horz" lIns="91440" tIns="45720" rIns="91440" bIns="45720" rtlCol="0"/>
+          <a:lstStyle>
+            <a:lvl1pPr algn="r">
+              <a:defRPr sz="1200"/>
+            </a:lvl1pPr>
+          </a:lstStyle>
+          <a:p>
+            <a:fld id="{9788202B-F48E-274A-8004-9324FE3823B9}" type="datetimeFigureOut">
+              <a:rPr lang="en-US" smtClean="0"/>
+              <a:t>7/8/25</a:t>
+            </a:fld>
+            <a:endParaRPr lang="en-US"/>
+          </a:p>
+        </p:txBody>
+      </p:sp>
+      <p:sp>
+        <p:nvSpPr>
+          <p:cNvPr id="4" name="Slide Image Placeholder 3"/>
+          <p:cNvSpPr>
+            <a:spLocks noGrp="1" noRot="1" noChangeAspect="1"/>
+          </p:cNvSpPr>
+          <p:nvPr>
+            <p:ph type="sldImg" idx="2"/>
+          </p:nvPr>
+        </p:nvSpPr>
+        <p:spPr>
+          <a:xfrm>
+            <a:off x="685800" y="1143000"/>
+            <a:ext cx="5486400" cy="3086100"/>
+          </a:xfrm>
+          <a:prstGeom prst="rect">
+            <a:avLst/>
+          </a:prstGeom>
+          <a:noFill/>
+          <a:ln w="12700">
+            <a:solidFill>
+              <a:prstClr val="black"/>
+            </a:solidFill>
+          </a:ln>
+        </p:spPr>
+        <p:txBody>
+          <a:bodyPr vert="horz" lIns="91440" tIns="45720" rIns="91440" bIns="45720" rtlCol="0" anchor="ctr"/>
+          <a:lstStyle/>
+          <a:p>
+            <a:endParaRPr lang="en-US"/>
+          </a:p>
+        </p:txBody>
+      </p:sp>
+      <p:sp>
+        <p:nvSpPr>
+          <p:cNvPr id="5" name="Notes Placeholder 4"/>
+          <p:cNvSpPr>
+            <a:spLocks noGrp="1"/>
+          </p:cNvSpPr>
+          <p:nvPr>
+            <p:ph type="body" sz="quarter" idx="3"/>
+          </p:nvPr>
+        </p:nvSpPr>
+        <p:spPr>
+          <a:xfrm>
+            <a:off x="685800" y="4400550"/>
+            <a:ext cx="5486400" cy="3600450"/>
+          </a:xfrm>
+          <a:prstGeom prst="rect">
+            <a:avLst/>
+          </a:prstGeom>
+        </p:spPr>
+        <p:txBody>
+          <a:bodyPr vert="horz" lIns="91440" tIns="45720" rIns="91440" bIns="45720" rtlCol="0"/>
+          <a:lstStyle/>
+          <a:p>
+            <a:pPr lvl="0"/>
+            <a:r>
+              <a:rPr lang="en-GB"/>
+              <a:t>Click to edit Master text styles</a:t>
+            </a:r>
+          </a:p>
+          <a:p>
+            <a:pPr lvl="1"/>
+            <a:r>
+              <a:rPr lang="en-GB"/>
+              <a:t>Second level</a:t>
+            </a:r>
+          </a:p>
+          <a:p>
+            <a:pPr lvl="2"/>
+            <a:r>
+              <a:rPr lang="en-GB"/>
+              <a:t>Third level</a:t>
+            </a:r>
+          </a:p>
+          <a:p>
+            <a:pPr lvl="3"/>
+            <a:r>
+              <a:rPr lang="en-GB"/>
+              <a:t>Fourth level</a:t>
+            </a:r>
+          </a:p>
+          <a:p>
+            <a:pPr lvl="4"/>
+            <a:r>
+              <a:rPr lang="en-GB"/>
+              <a:t>Fifth level</a:t>
+            </a:r>
+            <a:endParaRPr lang="en-US"/>
+          </a:p>
+        </p:txBody>
+      </p:sp>
+      <p:sp>
+        <p:nvSpPr>
+          <p:cNvPr id="6" name="Footer Placeholder 5"/>
+          <p:cNvSpPr>
+            <a:spLocks noGrp="1"/>
+          </p:cNvSpPr>
+          <p:nvPr>
+            <p:ph type="ftr" sz="quarter" idx="4"/>
+          </p:nvPr>
+        </p:nvSpPr>
+        <p:spPr>
+          <a:xfrm>
+            <a:off x="0" y="8685213"/>
+            <a:ext cx="2971800" cy="458787"/>
+          </a:xfrm>
+          <a:prstGeom prst="rect">
+            <a:avLst/>
+          </a:prstGeom>
+        </p:spPr>
+        <p:txBody>
+          <a:bodyPr vert="horz" lIns="91440" tIns="45720" rIns="91440" bIns="45720" rtlCol="0" anchor="b"/>
+          <a:lstStyle>
+            <a:lvl1pPr algn="l">
+              <a:defRPr sz="1200"/>
+            </a:lvl1pPr>
+          </a:lstStyle>
+          <a:p>
+            <a:endParaRPr lang="en-US"/>
+          </a:p>
+        </p:txBody>
+      </p:sp>
+      <p:sp>
+        <p:nvSpPr>
+          <p:cNvPr id="7" name="Slide Number Placeholder 6"/>
+          <p:cNvSpPr>
+            <a:spLocks noGrp="1"/>
+          </p:cNvSpPr>
+          <p:nvPr>
+            <p:ph type="sldNum" sz="quarter" idx="5"/>
+          </p:nvPr>
+        </p:nvSpPr>
+        <p:spPr>
+          <a:xfrm>
+            <a:off x="3884613" y="8685213"/>
+            <a:ext cx="2971800" cy="458787"/>
+          </a:xfrm>
+          <a:prstGeom prst="rect">
+            <a:avLst/>
+          </a:prstGeom>
+        </p:spPr>
+        <p:txBody>
+          <a:bodyPr vert="horz" lIns="91440" tIns="45720" rIns="91440" bIns="45720" rtlCol="0" anchor="b"/>
+          <a:lstStyle>
+            <a:lvl1pPr algn="r">
+              <a:defRPr sz="1200"/>
+            </a:lvl1pPr>
+          </a:lstStyle>
+          <a:p>
+            <a:fld id="{2E556BF5-C7BF-AF4B-8B25-D78DB5B95681}" type="slidenum">
+              <a:rPr lang="en-US" smtClean="0"/>
+              <a:t>‹#›</a:t>
+            </a:fld>
+            <a:endParaRPr lang="en-US"/>
+          </a:p>
+        </p:txBody>
+      </p:sp>
+    </p:spTree>
+    <p:extLst>
+      <p:ext uri="{BB962C8B-B14F-4D97-AF65-F5344CB8AC3E}">
+        <p14:creationId xmlns:p14="http://schemas.microsoft.com/office/powerpoint/2010/main" val="3992285195"/>
+      </p:ext>
+    </p:extLst>
+  </p:cSld>
+  <p:clrMap bg1="lt1" tx1="dk1" bg2="lt2" tx2="dk2" accent1="accent1" accent2="accent2" accent3="accent3" accent4="accent4" accent5="accent5" accent6="accent6" hlink="hlink" folHlink="folHlink"/>
+  <p:notesStyle>
+    <a:lvl1pPr marL="0" algn="l" defTabSz="914400" rtl="0" eaLnBrk="1" latinLnBrk="0" hangingPunct="1">
+      <a:defRPr sz="1200" kern="1200">
+        <a:solidFill>
+          <a:schemeClr val="tx1"/>
+        </a:solidFill>
+        <a:latin typeface="+mn-lt"/>
+        <a:ea typeface="+mn-ea"/>
+        <a:cs typeface="+mn-cs"/>
+      </a:defRPr>
+    </a:lvl1pPr>
+    <a:lvl2pPr marL="457200" algn="l" defTabSz="914400" rtl="0" eaLnBrk="1" latinLnBrk="0" hangingPunct="1">
+      <a:defRPr sz="1200" kern="1200">
+        <a:solidFill>
+          <a:schemeClr val="tx1"/>
+        </a:solidFill>
+        <a:latin typeface="+mn-lt"/>
+        <a:ea typeface="+mn-ea"/>
+        <a:cs typeface="+mn-cs"/>
+      </a:defRPr>
+    </a:lvl2pPr>
+    <a:lvl3pPr marL="914400" algn="l" defTabSz="914400" rtl="0" eaLnBrk="1" latinLnBrk="0" hangingPunct="1">
+      <a:defRPr sz="1200" kern="1200">
+        <a:solidFill>
+          <a:schemeClr val="tx1"/>
+        </a:solidFill>
+        <a:latin typeface="+mn-lt"/>
+        <a:ea typeface="+mn-ea"/>
+        <a:cs typeface="+mn-cs"/>
+      </a:defRPr>
+    </a:lvl3pPr>
+    <a:lvl4pPr marL="1371600" algn="l" defTabSz="914400" rtl="0" eaLnBrk="1" latinLnBrk="0" hangingPunct="1">
+      <a:defRPr sz="1200" kern="1200">
+        <a:solidFill>
+          <a:schemeClr val="tx1"/>
+        </a:solidFill>
+        <a:latin typeface="+mn-lt"/>
+        <a:ea typeface="+mn-ea"/>
+        <a:cs typeface="+mn-cs"/>
+      </a:defRPr>
+    </a:lvl4pPr>
+    <a:lvl5pPr marL="1828800" algn="l" defTabSz="914400" rtl="0" eaLnBrk="1" latinLnBrk="0" hangingPunct="1">
+      <a:defRPr sz="1200" kern="1200">
+        <a:solidFill>
+          <a:schemeClr val="tx1"/>
+        </a:solidFill>
+        <a:latin typeface="+mn-lt"/>
+        <a:ea typeface="+mn-ea"/>
+        <a:cs typeface="+mn-cs"/>
+      </a:defRPr>
+    </a:lvl5pPr>
+    <a:lvl6pPr marL="2286000" algn="l" defTabSz="914400" rtl="0" eaLnBrk="1" latinLnBrk="0" hangingPunct="1">
+      <a:defRPr sz="1200" kern="1200">
+        <a:solidFill>
+          <a:schemeClr val="tx1"/>
+        </a:solidFill>
+        <a:latin typeface="+mn-lt"/>
+        <a:ea typeface="+mn-ea"/>
+        <a:cs typeface="+mn-cs"/>
+      </a:defRPr>
+    </a:lvl6pPr>
+    <a:lvl7pPr marL="2743200" algn="l" defTabSz="914400" rtl="0" eaLnBrk="1" latinLnBrk="0" hangingPunct="1">
+      <a:defRPr sz="1200" kern="1200">
+        <a:solidFill>
+          <a:schemeClr val="tx1"/>
+        </a:solidFill>
+        <a:latin typeface="+mn-lt"/>
+        <a:ea typeface="+mn-ea"/>
+        <a:cs typeface="+mn-cs"/>
+      </a:defRPr>
+    </a:lvl7pPr>
+    <a:lvl8pPr marL="3200400" algn="l" defTabSz="914400" rtl="0" eaLnBrk="1" latinLnBrk="0" hangingPunct="1">
+      <a:defRPr sz="1200" kern="1200">
+        <a:solidFill>
+          <a:schemeClr val="tx1"/>
+        </a:solidFill>
+        <a:latin typeface="+mn-lt"/>
+        <a:ea typeface="+mn-ea"/>
+        <a:cs typeface="+mn-cs"/>
+      </a:defRPr>
+    </a:lvl8pPr>
+    <a:lvl9pPr marL="3657600" algn="l" defTabSz="914400" rtl="0" eaLnBrk="1" latinLnBrk="0" hangingPunct="1">
+      <a:defRPr sz="1200" kern="1200">
+        <a:solidFill>
+          <a:schemeClr val="tx1"/>
+        </a:solidFill>
+        <a:latin typeface="+mn-lt"/>
+        <a:ea typeface="+mn-ea"/>
+        <a:cs typeface="+mn-cs"/>
+      </a:defRPr>
+    </a:lvl9pPr>
+  </p:notesStyle>
+</p:notesMaster>
+</file>
+
+<file path=ppt/notesSlides/notesSlide1.xml><?xml version="1.0" encoding="utf-8"?>
+<p:notes xmlns:a="http://schemas.openxmlformats.org/drawingml/2006/main" xmlns:r="http://schemas.openxmlformats.org/officeDocument/2006/relationships" xmlns:p="http://schemas.openxmlformats.org/presentationml/2006/main">
+  <p:cSld>
+    <p:spTree>
+      <p:nvGrpSpPr>
+        <p:cNvPr id="1" name="">
+          <a:extLst>
+            <a:ext uri="{FF2B5EF4-FFF2-40B4-BE49-F238E27FC236}">
+              <a16:creationId xmlns:a16="http://schemas.microsoft.com/office/drawing/2014/main" id="{BF48E6CB-20B0-A6F7-2A60-CB5804B2C627}"/>
+            </a:ext>
+          </a:extLst>
+        </p:cNvPr>
+        <p:cNvGrpSpPr/>
+        <p:nvPr/>
+      </p:nvGrpSpPr>
+      <p:grpSpPr>
+        <a:xfrm>
+          <a:off x="0" y="0"/>
+          <a:ext cx="0" cy="0"/>
+          <a:chOff x="0" y="0"/>
+          <a:chExt cx="0" cy="0"/>
+        </a:xfrm>
+      </p:grpSpPr>
+      <p:sp>
+        <p:nvSpPr>
+          <p:cNvPr id="2" name="Slide Image Placeholder 1">
+            <a:extLst>
+              <a:ext uri="{FF2B5EF4-FFF2-40B4-BE49-F238E27FC236}">
+                <a16:creationId xmlns:a16="http://schemas.microsoft.com/office/drawing/2014/main" id="{503435DB-0E21-955E-9EC5-1ED22BEF6D67}"/>
+              </a:ext>
+            </a:extLst>
+          </p:cNvPr>
+          <p:cNvSpPr>
+            <a:spLocks noGrp="1" noRot="1" noChangeAspect="1"/>
+          </p:cNvSpPr>
+          <p:nvPr>
+            <p:ph type="sldImg"/>
+          </p:nvPr>
+        </p:nvSpPr>
+        <p:spPr>
+          <a:xfrm>
+            <a:off x="685800" y="1143000"/>
+            <a:ext cx="5486400" cy="3086100"/>
+          </a:xfrm>
+        </p:spPr>
+      </p:sp>
+      <p:sp>
+        <p:nvSpPr>
+          <p:cNvPr id="3" name="Notes Placeholder 2">
+            <a:extLst>
+              <a:ext uri="{FF2B5EF4-FFF2-40B4-BE49-F238E27FC236}">
+                <a16:creationId xmlns:a16="http://schemas.microsoft.com/office/drawing/2014/main" id="{C4490BD7-B07E-56BA-16C3-6DF5DC447C89}"/>
+              </a:ext>
+            </a:extLst>
+          </p:cNvPr>
+          <p:cNvSpPr>
+            <a:spLocks noGrp="1"/>
+          </p:cNvSpPr>
+          <p:nvPr>
+            <p:ph type="body" idx="1"/>
+          </p:nvPr>
+        </p:nvSpPr>
+        <p:spPr/>
+        <p:txBody>
+          <a:bodyPr/>
+          <a:lstStyle/>
+          <a:p>
+            <a:r>
+              <a:rPr lang="en-US"/>
+              <a:t>28</a:t>
+            </a:r>
+          </a:p>
+        </p:txBody>
+      </p:sp>
+      <p:sp>
+        <p:nvSpPr>
+          <p:cNvPr id="4" name="Slide Number Placeholder 3">
+            <a:extLst>
+              <a:ext uri="{FF2B5EF4-FFF2-40B4-BE49-F238E27FC236}">
+                <a16:creationId xmlns:a16="http://schemas.microsoft.com/office/drawing/2014/main" id="{2B9A505D-7582-AF55-9C45-A732EC34CD1C}"/>
+              </a:ext>
+            </a:extLst>
+          </p:cNvPr>
+          <p:cNvSpPr>
+            <a:spLocks noGrp="1"/>
+          </p:cNvSpPr>
+          <p:nvPr>
+            <p:ph type="sldNum" sz="quarter" idx="5"/>
+          </p:nvPr>
+        </p:nvSpPr>
+        <p:spPr/>
+        <p:txBody>
+          <a:bodyPr/>
+          <a:lstStyle/>
+          <a:p>
+            <a:pPr marL="0" marR="0" lvl="0" indent="0" algn="r" defTabSz="914400" rtl="0" eaLnBrk="1" fontAlgn="auto" latinLnBrk="0" hangingPunct="1">
+              <a:lnSpc>
+                <a:spcPct val="100000"/>
+              </a:lnSpc>
+              <a:spcBef>
+                <a:spcPts val="0"/>
+              </a:spcBef>
+              <a:spcAft>
+                <a:spcPts val="0"/>
+              </a:spcAft>
+              <a:buClrTx/>
+              <a:buSzTx/>
+              <a:buFontTx/>
+              <a:buNone/>
+              <a:tabLst/>
+              <a:defRPr/>
+            </a:pPr>
+            <a:fld id="{E100F4DD-433F-9D42-8752-618973F74080}" type="slidenum">
+              <a:rPr kumimoji="0" lang="en-US" sz="1200" b="0" i="0" u="none" strike="noStrike" kern="1200" cap="none" spc="0" normalizeH="0" baseline="0" noProof="0" smtClean="0">
+                <a:ln>
+                  <a:noFill/>
+                </a:ln>
+                <a:solidFill>
+                  <a:prstClr val="black"/>
+                </a:solidFill>
+                <a:effectLst/>
+                <a:uLnTx/>
+                <a:uFillTx/>
+                <a:latin typeface="Arial" panose="020B0604020202020204" pitchFamily="34" charset="0"/>
+                <a:ea typeface="+mn-ea"/>
+                <a:cs typeface="+mn-cs"/>
+              </a:rPr>
+              <a:pPr marL="0" marR="0" lvl="0" indent="0" algn="r" defTabSz="914400" rtl="0" eaLnBrk="1" fontAlgn="auto" latinLnBrk="0" hangingPunct="1">
+                <a:lnSpc>
+                  <a:spcPct val="100000"/>
+                </a:lnSpc>
+                <a:spcBef>
+                  <a:spcPts val="0"/>
+                </a:spcBef>
+                <a:spcAft>
+                  <a:spcPts val="0"/>
+                </a:spcAft>
+                <a:buClrTx/>
+                <a:buSzTx/>
+                <a:buFontTx/>
+                <a:buNone/>
+                <a:tabLst/>
+                <a:defRPr/>
+              </a:pPr>
+              <a:t>1</a:t>
+            </a:fld>
+            <a:endParaRPr kumimoji="0" lang="en-US" sz="1200" b="0" i="0" u="none" strike="noStrike" kern="1200" cap="none" spc="0" normalizeH="0" baseline="0" noProof="0">
+              <a:ln>
+                <a:noFill/>
+              </a:ln>
+              <a:solidFill>
+                <a:prstClr val="black"/>
+              </a:solidFill>
+              <a:effectLst/>
+              <a:uLnTx/>
+              <a:uFillTx/>
+              <a:latin typeface="Arial" panose="020B0604020202020204" pitchFamily="34" charset="0"/>
+              <a:ea typeface="+mn-ea"/>
+              <a:cs typeface="+mn-cs"/>
+            </a:endParaRPr>
+          </a:p>
+        </p:txBody>
+      </p:sp>
+    </p:spTree>
+    <p:extLst>
+      <p:ext uri="{BB962C8B-B14F-4D97-AF65-F5344CB8AC3E}">
+        <p14:creationId xmlns:p14="http://schemas.microsoft.com/office/powerpoint/2010/main" val="404890566"/>
+      </p:ext>
+    </p:extLst>
+  </p:cSld>
+  <p:clrMapOvr>
+    <a:masterClrMapping/>
+  </p:clrMapOvr>
+</p:notes>
 </file>
 
 <file path=ppt/slideLayouts/slideLayout1.xml><?xml version="1.0" encoding="utf-8"?>
@@ -740,6 +1277,2523 @@
 </p:sldLayout>
 </file>
 
+<file path=ppt/slideLayouts/slideLayout12.xml><?xml version="1.0" encoding="utf-8"?>
+<p:sldLayout xmlns:a="http://schemas.openxmlformats.org/drawingml/2006/main" xmlns:r="http://schemas.openxmlformats.org/officeDocument/2006/relationships" xmlns:p="http://schemas.openxmlformats.org/presentationml/2006/main" preserve="1" userDrawn="1">
+  <p:cSld name="Title Slide">
+    <p:bg>
+      <p:bgPr>
+        <a:blipFill dpi="0" rotWithShape="0">
+          <a:blip r:embed="rId2" cstate="screen">
+            <a:extLst>
+              <a:ext uri="{28A0092B-C50C-407E-A947-70E740481C1C}">
+                <a14:useLocalDpi xmlns:a14="http://schemas.microsoft.com/office/drawing/2010/main"/>
+              </a:ext>
+            </a:extLst>
+          </a:blip>
+          <a:srcRect/>
+          <a:stretch>
+            <a:fillRect/>
+          </a:stretch>
+        </a:blipFill>
+        <a:effectLst/>
+      </p:bgPr>
+    </p:bg>
+    <p:spTree>
+      <p:nvGrpSpPr>
+        <p:cNvPr id="1" name=""/>
+        <p:cNvGrpSpPr/>
+        <p:nvPr/>
+      </p:nvGrpSpPr>
+      <p:grpSpPr>
+        <a:xfrm>
+          <a:off x="0" y="0"/>
+          <a:ext cx="0" cy="0"/>
+          <a:chOff x="0" y="0"/>
+          <a:chExt cx="0" cy="0"/>
+        </a:xfrm>
+      </p:grpSpPr>
+      <p:cxnSp>
+        <p:nvCxnSpPr>
+          <p:cNvPr id="5" name="Straight Connector 4">
+            <a:extLst>
+              <a:ext uri="{FF2B5EF4-FFF2-40B4-BE49-F238E27FC236}">
+                <a16:creationId xmlns:a16="http://schemas.microsoft.com/office/drawing/2014/main" id="{95BC1842-1AA2-E248-8D74-DA9CC1F8097B}"/>
+              </a:ext>
+            </a:extLst>
+          </p:cNvPr>
+          <p:cNvCxnSpPr>
+            <a:cxnSpLocks/>
+          </p:cNvCxnSpPr>
+          <p:nvPr/>
+        </p:nvCxnSpPr>
+        <p:spPr>
+          <a:xfrm>
+            <a:off x="666750" y="5038725"/>
+            <a:ext cx="476250" cy="0"/>
+          </a:xfrm>
+          <a:prstGeom prst="line">
+            <a:avLst/>
+          </a:prstGeom>
+          <a:ln w="57150">
+            <a:solidFill>
+              <a:schemeClr val="accent2"/>
+            </a:solidFill>
+          </a:ln>
+        </p:spPr>
+        <p:style>
+          <a:lnRef idx="1">
+            <a:schemeClr val="accent1"/>
+          </a:lnRef>
+          <a:fillRef idx="0">
+            <a:schemeClr val="accent1"/>
+          </a:fillRef>
+          <a:effectRef idx="0">
+            <a:schemeClr val="accent1"/>
+          </a:effectRef>
+          <a:fontRef idx="minor">
+            <a:schemeClr val="tx1"/>
+          </a:fontRef>
+        </p:style>
+      </p:cxnSp>
+      <p:sp>
+        <p:nvSpPr>
+          <p:cNvPr id="2" name="Title 1"/>
+          <p:cNvSpPr>
+            <a:spLocks noGrp="1"/>
+          </p:cNvSpPr>
+          <p:nvPr>
+            <p:ph type="ctrTitle"/>
+          </p:nvPr>
+        </p:nvSpPr>
+        <p:spPr>
+          <a:xfrm>
+            <a:off x="525250" y="1990726"/>
+            <a:ext cx="6475625" cy="2833982"/>
+          </a:xfrm>
+        </p:spPr>
+        <p:txBody>
+          <a:bodyPr anchor="b"/>
+          <a:lstStyle>
+            <a:lvl1pPr algn="l">
+              <a:defRPr sz="6000" b="1">
+                <a:solidFill>
+                  <a:schemeClr val="bg1"/>
+                </a:solidFill>
+              </a:defRPr>
+            </a:lvl1pPr>
+          </a:lstStyle>
+          <a:p>
+            <a:r>
+              <a:rPr lang="en-US"/>
+              <a:t>Click to edit Master title style</a:t>
+            </a:r>
+          </a:p>
+        </p:txBody>
+      </p:sp>
+      <p:sp>
+        <p:nvSpPr>
+          <p:cNvPr id="3" name="Subtitle 2"/>
+          <p:cNvSpPr>
+            <a:spLocks noGrp="1"/>
+          </p:cNvSpPr>
+          <p:nvPr>
+            <p:ph type="subTitle" idx="1"/>
+          </p:nvPr>
+        </p:nvSpPr>
+        <p:spPr>
+          <a:xfrm>
+            <a:off x="525251" y="5278732"/>
+            <a:ext cx="7647200" cy="1160168"/>
+          </a:xfrm>
+        </p:spPr>
+        <p:txBody>
+          <a:bodyPr/>
+          <a:lstStyle>
+            <a:lvl1pPr marL="0" indent="0" algn="l">
+              <a:buNone/>
+              <a:defRPr sz="2400">
+                <a:solidFill>
+                  <a:schemeClr val="bg1"/>
+                </a:solidFill>
+              </a:defRPr>
+            </a:lvl1pPr>
+            <a:lvl2pPr marL="457195" indent="0" algn="ctr">
+              <a:buNone/>
+              <a:defRPr sz="2000"/>
+            </a:lvl2pPr>
+            <a:lvl3pPr marL="914390" indent="0" algn="ctr">
+              <a:buNone/>
+              <a:defRPr sz="1800"/>
+            </a:lvl3pPr>
+            <a:lvl4pPr marL="1371586" indent="0" algn="ctr">
+              <a:buNone/>
+              <a:defRPr sz="1600"/>
+            </a:lvl4pPr>
+            <a:lvl5pPr marL="1828781" indent="0" algn="ctr">
+              <a:buNone/>
+              <a:defRPr sz="1600"/>
+            </a:lvl5pPr>
+            <a:lvl6pPr marL="2285975" indent="0" algn="ctr">
+              <a:buNone/>
+              <a:defRPr sz="1600"/>
+            </a:lvl6pPr>
+            <a:lvl7pPr marL="2743170" indent="0" algn="ctr">
+              <a:buNone/>
+              <a:defRPr sz="1600"/>
+            </a:lvl7pPr>
+            <a:lvl8pPr marL="3200366" indent="0" algn="ctr">
+              <a:buNone/>
+              <a:defRPr sz="1600"/>
+            </a:lvl8pPr>
+            <a:lvl9pPr marL="3657561" indent="0" algn="ctr">
+              <a:buNone/>
+              <a:defRPr sz="1600"/>
+            </a:lvl9pPr>
+          </a:lstStyle>
+          <a:p>
+            <a:r>
+              <a:rPr lang="en-US"/>
+              <a:t>Click to edit Master subtitle style</a:t>
+            </a:r>
+          </a:p>
+        </p:txBody>
+      </p:sp>
+      <p:pic>
+        <p:nvPicPr>
+          <p:cNvPr id="6" name="Graphic 5">
+            <a:extLst>
+              <a:ext uri="{FF2B5EF4-FFF2-40B4-BE49-F238E27FC236}">
+                <a16:creationId xmlns:a16="http://schemas.microsoft.com/office/drawing/2014/main" id="{F75DD5DF-B308-0D49-8B63-8E5315E2914C}"/>
+              </a:ext>
+            </a:extLst>
+          </p:cNvPr>
+          <p:cNvPicPr>
+            <a:picLocks noChangeAspect="1"/>
+          </p:cNvPicPr>
+          <p:nvPr userDrawn="1"/>
+        </p:nvPicPr>
+        <p:blipFill>
+          <a:blip r:embed="rId3" cstate="screen">
+            <a:extLst>
+              <a:ext uri="{28A0092B-C50C-407E-A947-70E740481C1C}">
+                <a14:useLocalDpi xmlns:a14="http://schemas.microsoft.com/office/drawing/2010/main"/>
+              </a:ext>
+              <a:ext uri="{96DAC541-7B7A-43D3-8B79-37D633B846F1}">
+                <asvg:svgBlip xmlns:asvg="http://schemas.microsoft.com/office/drawing/2016/SVG/main" r:embed="rId4"/>
+              </a:ext>
+            </a:extLst>
+          </a:blip>
+          <a:stretch>
+            <a:fillRect/>
+          </a:stretch>
+        </p:blipFill>
+        <p:spPr>
+          <a:xfrm>
+            <a:off x="634744" y="582344"/>
+            <a:ext cx="2149348" cy="413336"/>
+          </a:xfrm>
+          <a:prstGeom prst="rect">
+            <a:avLst/>
+          </a:prstGeom>
+        </p:spPr>
+      </p:pic>
+    </p:spTree>
+    <p:extLst>
+      <p:ext uri="{BB962C8B-B14F-4D97-AF65-F5344CB8AC3E}">
+        <p14:creationId xmlns:p14="http://schemas.microsoft.com/office/powerpoint/2010/main" val="2729167946"/>
+      </p:ext>
+    </p:extLst>
+  </p:cSld>
+  <p:clrMapOvr>
+    <a:masterClrMapping/>
+  </p:clrMapOvr>
+</p:sldLayout>
+</file>
+
+<file path=ppt/slideLayouts/slideLayout13.xml><?xml version="1.0" encoding="utf-8"?>
+<p:sldLayout xmlns:a="http://schemas.openxmlformats.org/drawingml/2006/main" xmlns:r="http://schemas.openxmlformats.org/officeDocument/2006/relationships" xmlns:p="http://schemas.openxmlformats.org/presentationml/2006/main" preserve="1" userDrawn="1">
+  <p:cSld name="Title Slide light">
+    <p:bg>
+      <p:bgPr>
+        <a:blipFill dpi="0" rotWithShape="0">
+          <a:blip r:embed="rId2" cstate="screen">
+            <a:extLst>
+              <a:ext uri="{28A0092B-C50C-407E-A947-70E740481C1C}">
+                <a14:useLocalDpi xmlns:a14="http://schemas.microsoft.com/office/drawing/2010/main"/>
+              </a:ext>
+            </a:extLst>
+          </a:blip>
+          <a:srcRect/>
+          <a:stretch>
+            <a:fillRect/>
+          </a:stretch>
+        </a:blipFill>
+        <a:effectLst/>
+      </p:bgPr>
+    </p:bg>
+    <p:spTree>
+      <p:nvGrpSpPr>
+        <p:cNvPr id="1" name=""/>
+        <p:cNvGrpSpPr/>
+        <p:nvPr/>
+      </p:nvGrpSpPr>
+      <p:grpSpPr>
+        <a:xfrm>
+          <a:off x="0" y="0"/>
+          <a:ext cx="0" cy="0"/>
+          <a:chOff x="0" y="0"/>
+          <a:chExt cx="0" cy="0"/>
+        </a:xfrm>
+      </p:grpSpPr>
+      <p:pic>
+        <p:nvPicPr>
+          <p:cNvPr id="4" name="Graphic 4">
+            <a:extLst>
+              <a:ext uri="{FF2B5EF4-FFF2-40B4-BE49-F238E27FC236}">
+                <a16:creationId xmlns:a16="http://schemas.microsoft.com/office/drawing/2014/main" id="{B8D1FC50-96A6-6343-9FEA-790DCE21B134}"/>
+              </a:ext>
+            </a:extLst>
+          </p:cNvPr>
+          <p:cNvPicPr>
+            <a:picLocks noChangeAspect="1"/>
+          </p:cNvPicPr>
+          <p:nvPr/>
+        </p:nvPicPr>
+        <p:blipFill>
+          <a:blip r:embed="rId3"/>
+          <a:stretch>
+            <a:fillRect/>
+          </a:stretch>
+        </p:blipFill>
+        <p:spPr>
+          <a:xfrm>
+            <a:off x="688976" y="652463"/>
+            <a:ext cx="2030413" cy="290512"/>
+          </a:xfrm>
+          <a:prstGeom prst="rect">
+            <a:avLst/>
+          </a:prstGeom>
+        </p:spPr>
+      </p:pic>
+      <p:cxnSp>
+        <p:nvCxnSpPr>
+          <p:cNvPr id="5" name="Straight Connector 4">
+            <a:extLst>
+              <a:ext uri="{FF2B5EF4-FFF2-40B4-BE49-F238E27FC236}">
+                <a16:creationId xmlns:a16="http://schemas.microsoft.com/office/drawing/2014/main" id="{D8F8DC7E-DD12-EB49-8B8E-8E789EA03F87}"/>
+              </a:ext>
+            </a:extLst>
+          </p:cNvPr>
+          <p:cNvCxnSpPr>
+            <a:cxnSpLocks/>
+          </p:cNvCxnSpPr>
+          <p:nvPr/>
+        </p:nvCxnSpPr>
+        <p:spPr>
+          <a:xfrm>
+            <a:off x="666750" y="1227138"/>
+            <a:ext cx="476250" cy="0"/>
+          </a:xfrm>
+          <a:prstGeom prst="line">
+            <a:avLst/>
+          </a:prstGeom>
+          <a:ln w="50800">
+            <a:solidFill>
+              <a:schemeClr val="accent2"/>
+            </a:solidFill>
+          </a:ln>
+        </p:spPr>
+        <p:style>
+          <a:lnRef idx="1">
+            <a:schemeClr val="accent1"/>
+          </a:lnRef>
+          <a:fillRef idx="0">
+            <a:schemeClr val="accent1"/>
+          </a:fillRef>
+          <a:effectRef idx="0">
+            <a:schemeClr val="accent1"/>
+          </a:effectRef>
+          <a:fontRef idx="minor">
+            <a:schemeClr val="tx1"/>
+          </a:fontRef>
+        </p:style>
+      </p:cxnSp>
+      <p:sp>
+        <p:nvSpPr>
+          <p:cNvPr id="2" name="Title 1"/>
+          <p:cNvSpPr>
+            <a:spLocks noGrp="1"/>
+          </p:cNvSpPr>
+          <p:nvPr>
+            <p:ph type="ctrTitle"/>
+          </p:nvPr>
+        </p:nvSpPr>
+        <p:spPr>
+          <a:xfrm>
+            <a:off x="525250" y="1990726"/>
+            <a:ext cx="6475625" cy="2833982"/>
+          </a:xfrm>
+        </p:spPr>
+        <p:txBody>
+          <a:bodyPr anchor="b"/>
+          <a:lstStyle>
+            <a:lvl1pPr algn="l">
+              <a:defRPr sz="6000" b="1">
+                <a:solidFill>
+                  <a:srgbClr val="333333"/>
+                </a:solidFill>
+              </a:defRPr>
+            </a:lvl1pPr>
+          </a:lstStyle>
+          <a:p>
+            <a:r>
+              <a:rPr lang="en-US"/>
+              <a:t>Click to edit Master title style</a:t>
+            </a:r>
+          </a:p>
+        </p:txBody>
+      </p:sp>
+      <p:sp>
+        <p:nvSpPr>
+          <p:cNvPr id="3" name="Subtitle 2"/>
+          <p:cNvSpPr>
+            <a:spLocks noGrp="1"/>
+          </p:cNvSpPr>
+          <p:nvPr>
+            <p:ph type="subTitle" idx="1"/>
+          </p:nvPr>
+        </p:nvSpPr>
+        <p:spPr>
+          <a:xfrm>
+            <a:off x="525251" y="5278732"/>
+            <a:ext cx="7647200" cy="1160168"/>
+          </a:xfrm>
+        </p:spPr>
+        <p:txBody>
+          <a:bodyPr/>
+          <a:lstStyle>
+            <a:lvl1pPr marL="0" indent="0" algn="l">
+              <a:buNone/>
+              <a:defRPr sz="2400">
+                <a:solidFill>
+                  <a:schemeClr val="accent3"/>
+                </a:solidFill>
+              </a:defRPr>
+            </a:lvl1pPr>
+            <a:lvl2pPr marL="457195" indent="0" algn="ctr">
+              <a:buNone/>
+              <a:defRPr sz="2000"/>
+            </a:lvl2pPr>
+            <a:lvl3pPr marL="914390" indent="0" algn="ctr">
+              <a:buNone/>
+              <a:defRPr sz="1800"/>
+            </a:lvl3pPr>
+            <a:lvl4pPr marL="1371586" indent="0" algn="ctr">
+              <a:buNone/>
+              <a:defRPr sz="1600"/>
+            </a:lvl4pPr>
+            <a:lvl5pPr marL="1828781" indent="0" algn="ctr">
+              <a:buNone/>
+              <a:defRPr sz="1600"/>
+            </a:lvl5pPr>
+            <a:lvl6pPr marL="2285975" indent="0" algn="ctr">
+              <a:buNone/>
+              <a:defRPr sz="1600"/>
+            </a:lvl6pPr>
+            <a:lvl7pPr marL="2743170" indent="0" algn="ctr">
+              <a:buNone/>
+              <a:defRPr sz="1600"/>
+            </a:lvl7pPr>
+            <a:lvl8pPr marL="3200366" indent="0" algn="ctr">
+              <a:buNone/>
+              <a:defRPr sz="1600"/>
+            </a:lvl8pPr>
+            <a:lvl9pPr marL="3657561" indent="0" algn="ctr">
+              <a:buNone/>
+              <a:defRPr sz="1600"/>
+            </a:lvl9pPr>
+          </a:lstStyle>
+          <a:p>
+            <a:r>
+              <a:rPr lang="en-US"/>
+              <a:t>Click to edit Master subtitle style</a:t>
+            </a:r>
+          </a:p>
+        </p:txBody>
+      </p:sp>
+    </p:spTree>
+    <p:extLst>
+      <p:ext uri="{BB962C8B-B14F-4D97-AF65-F5344CB8AC3E}">
+        <p14:creationId xmlns:p14="http://schemas.microsoft.com/office/powerpoint/2010/main" val="2549268508"/>
+      </p:ext>
+    </p:extLst>
+  </p:cSld>
+  <p:clrMapOvr>
+    <a:masterClrMapping/>
+  </p:clrMapOvr>
+</p:sldLayout>
+</file>
+
+<file path=ppt/slideLayouts/slideLayout14.xml><?xml version="1.0" encoding="utf-8"?>
+<p:sldLayout xmlns:a="http://schemas.openxmlformats.org/drawingml/2006/main" xmlns:r="http://schemas.openxmlformats.org/officeDocument/2006/relationships" xmlns:p="http://schemas.openxmlformats.org/presentationml/2006/main" preserve="1" userDrawn="1">
+  <p:cSld name="Title Slide 2 Blue">
+    <p:bg>
+      <p:bgPr>
+        <a:blipFill dpi="0" rotWithShape="0">
+          <a:blip r:embed="rId2" cstate="screen">
+            <a:extLst>
+              <a:ext uri="{28A0092B-C50C-407E-A947-70E740481C1C}">
+                <a14:useLocalDpi xmlns:a14="http://schemas.microsoft.com/office/drawing/2010/main"/>
+              </a:ext>
+            </a:extLst>
+          </a:blip>
+          <a:srcRect/>
+          <a:stretch>
+            <a:fillRect/>
+          </a:stretch>
+        </a:blipFill>
+        <a:effectLst/>
+      </p:bgPr>
+    </p:bg>
+    <p:spTree>
+      <p:nvGrpSpPr>
+        <p:cNvPr id="1" name=""/>
+        <p:cNvGrpSpPr/>
+        <p:nvPr/>
+      </p:nvGrpSpPr>
+      <p:grpSpPr>
+        <a:xfrm>
+          <a:off x="0" y="0"/>
+          <a:ext cx="0" cy="0"/>
+          <a:chOff x="0" y="0"/>
+          <a:chExt cx="0" cy="0"/>
+        </a:xfrm>
+      </p:grpSpPr>
+      <p:cxnSp>
+        <p:nvCxnSpPr>
+          <p:cNvPr id="5" name="Straight Connector 4">
+            <a:extLst>
+              <a:ext uri="{FF2B5EF4-FFF2-40B4-BE49-F238E27FC236}">
+                <a16:creationId xmlns:a16="http://schemas.microsoft.com/office/drawing/2014/main" id="{D0FBA752-FC68-E647-81EB-746DDC1EE942}"/>
+              </a:ext>
+            </a:extLst>
+          </p:cNvPr>
+          <p:cNvCxnSpPr>
+            <a:cxnSpLocks/>
+          </p:cNvCxnSpPr>
+          <p:nvPr/>
+        </p:nvCxnSpPr>
+        <p:spPr>
+          <a:xfrm>
+            <a:off x="666750" y="4333875"/>
+            <a:ext cx="476250" cy="0"/>
+          </a:xfrm>
+          <a:prstGeom prst="line">
+            <a:avLst/>
+          </a:prstGeom>
+          <a:ln w="57150">
+            <a:solidFill>
+              <a:schemeClr val="accent2"/>
+            </a:solidFill>
+          </a:ln>
+        </p:spPr>
+        <p:style>
+          <a:lnRef idx="1">
+            <a:schemeClr val="accent1"/>
+          </a:lnRef>
+          <a:fillRef idx="0">
+            <a:schemeClr val="accent1"/>
+          </a:fillRef>
+          <a:effectRef idx="0">
+            <a:schemeClr val="accent1"/>
+          </a:effectRef>
+          <a:fontRef idx="minor">
+            <a:schemeClr val="tx1"/>
+          </a:fontRef>
+        </p:style>
+      </p:cxnSp>
+      <p:sp>
+        <p:nvSpPr>
+          <p:cNvPr id="2" name="Title 1"/>
+          <p:cNvSpPr>
+            <a:spLocks noGrp="1"/>
+          </p:cNvSpPr>
+          <p:nvPr>
+            <p:ph type="ctrTitle"/>
+          </p:nvPr>
+        </p:nvSpPr>
+        <p:spPr>
+          <a:xfrm>
+            <a:off x="525250" y="2076451"/>
+            <a:ext cx="10533275" cy="2071983"/>
+          </a:xfrm>
+        </p:spPr>
+        <p:txBody>
+          <a:bodyPr anchor="b"/>
+          <a:lstStyle>
+            <a:lvl1pPr algn="l">
+              <a:defRPr sz="6000" b="1">
+                <a:solidFill>
+                  <a:schemeClr val="bg1"/>
+                </a:solidFill>
+              </a:defRPr>
+            </a:lvl1pPr>
+          </a:lstStyle>
+          <a:p>
+            <a:r>
+              <a:rPr lang="en-US"/>
+              <a:t>Click to edit Master title style</a:t>
+            </a:r>
+          </a:p>
+        </p:txBody>
+      </p:sp>
+      <p:sp>
+        <p:nvSpPr>
+          <p:cNvPr id="3" name="Subtitle 2"/>
+          <p:cNvSpPr>
+            <a:spLocks noGrp="1"/>
+          </p:cNvSpPr>
+          <p:nvPr>
+            <p:ph type="subTitle" idx="1"/>
+          </p:nvPr>
+        </p:nvSpPr>
+        <p:spPr>
+          <a:xfrm>
+            <a:off x="525251" y="4573882"/>
+            <a:ext cx="7647200" cy="1160168"/>
+          </a:xfrm>
+        </p:spPr>
+        <p:txBody>
+          <a:bodyPr/>
+          <a:lstStyle>
+            <a:lvl1pPr marL="0" indent="0" algn="l">
+              <a:buNone/>
+              <a:defRPr sz="2400">
+                <a:solidFill>
+                  <a:schemeClr val="bg1"/>
+                </a:solidFill>
+              </a:defRPr>
+            </a:lvl1pPr>
+            <a:lvl2pPr marL="457195" indent="0" algn="ctr">
+              <a:buNone/>
+              <a:defRPr sz="2000"/>
+            </a:lvl2pPr>
+            <a:lvl3pPr marL="914390" indent="0" algn="ctr">
+              <a:buNone/>
+              <a:defRPr sz="1800"/>
+            </a:lvl3pPr>
+            <a:lvl4pPr marL="1371586" indent="0" algn="ctr">
+              <a:buNone/>
+              <a:defRPr sz="1600"/>
+            </a:lvl4pPr>
+            <a:lvl5pPr marL="1828781" indent="0" algn="ctr">
+              <a:buNone/>
+              <a:defRPr sz="1600"/>
+            </a:lvl5pPr>
+            <a:lvl6pPr marL="2285975" indent="0" algn="ctr">
+              <a:buNone/>
+              <a:defRPr sz="1600"/>
+            </a:lvl6pPr>
+            <a:lvl7pPr marL="2743170" indent="0" algn="ctr">
+              <a:buNone/>
+              <a:defRPr sz="1600"/>
+            </a:lvl7pPr>
+            <a:lvl8pPr marL="3200366" indent="0" algn="ctr">
+              <a:buNone/>
+              <a:defRPr sz="1600"/>
+            </a:lvl8pPr>
+            <a:lvl9pPr marL="3657561" indent="0" algn="ctr">
+              <a:buNone/>
+              <a:defRPr sz="1600"/>
+            </a:lvl9pPr>
+          </a:lstStyle>
+          <a:p>
+            <a:r>
+              <a:rPr lang="en-US"/>
+              <a:t>Click to edit Master subtitle style</a:t>
+            </a:r>
+          </a:p>
+        </p:txBody>
+      </p:sp>
+      <p:pic>
+        <p:nvPicPr>
+          <p:cNvPr id="6" name="Graphic 5">
+            <a:extLst>
+              <a:ext uri="{FF2B5EF4-FFF2-40B4-BE49-F238E27FC236}">
+                <a16:creationId xmlns:a16="http://schemas.microsoft.com/office/drawing/2014/main" id="{22A2503A-D13F-2E4F-8941-684A2AD9BF44}"/>
+              </a:ext>
+            </a:extLst>
+          </p:cNvPr>
+          <p:cNvPicPr>
+            <a:picLocks noChangeAspect="1"/>
+          </p:cNvPicPr>
+          <p:nvPr userDrawn="1"/>
+        </p:nvPicPr>
+        <p:blipFill>
+          <a:blip r:embed="rId3" cstate="screen">
+            <a:extLst>
+              <a:ext uri="{28A0092B-C50C-407E-A947-70E740481C1C}">
+                <a14:useLocalDpi xmlns:a14="http://schemas.microsoft.com/office/drawing/2010/main"/>
+              </a:ext>
+              <a:ext uri="{96DAC541-7B7A-43D3-8B79-37D633B846F1}">
+                <asvg:svgBlip xmlns:asvg="http://schemas.microsoft.com/office/drawing/2016/SVG/main" r:embed="rId4"/>
+              </a:ext>
+            </a:extLst>
+          </a:blip>
+          <a:stretch>
+            <a:fillRect/>
+          </a:stretch>
+        </p:blipFill>
+        <p:spPr>
+          <a:xfrm>
+            <a:off x="634744" y="582344"/>
+            <a:ext cx="2149348" cy="413336"/>
+          </a:xfrm>
+          <a:prstGeom prst="rect">
+            <a:avLst/>
+          </a:prstGeom>
+        </p:spPr>
+      </p:pic>
+    </p:spTree>
+    <p:extLst>
+      <p:ext uri="{BB962C8B-B14F-4D97-AF65-F5344CB8AC3E}">
+        <p14:creationId xmlns:p14="http://schemas.microsoft.com/office/powerpoint/2010/main" val="2675019132"/>
+      </p:ext>
+    </p:extLst>
+  </p:cSld>
+  <p:clrMapOvr>
+    <a:masterClrMapping/>
+  </p:clrMapOvr>
+</p:sldLayout>
+</file>
+
+<file path=ppt/slideLayouts/slideLayout15.xml><?xml version="1.0" encoding="utf-8"?>
+<p:sldLayout xmlns:a="http://schemas.openxmlformats.org/drawingml/2006/main" xmlns:r="http://schemas.openxmlformats.org/officeDocument/2006/relationships" xmlns:p="http://schemas.openxmlformats.org/presentationml/2006/main" type="obj" preserve="1">
+  <p:cSld name="Title and Content">
+    <p:spTree>
+      <p:nvGrpSpPr>
+        <p:cNvPr id="1" name=""/>
+        <p:cNvGrpSpPr/>
+        <p:nvPr/>
+      </p:nvGrpSpPr>
+      <p:grpSpPr>
+        <a:xfrm>
+          <a:off x="0" y="0"/>
+          <a:ext cx="0" cy="0"/>
+          <a:chOff x="0" y="0"/>
+          <a:chExt cx="0" cy="0"/>
+        </a:xfrm>
+      </p:grpSpPr>
+      <p:sp>
+        <p:nvSpPr>
+          <p:cNvPr id="4" name="TextBox 4">
+            <a:extLst>
+              <a:ext uri="{FF2B5EF4-FFF2-40B4-BE49-F238E27FC236}">
+                <a16:creationId xmlns:a16="http://schemas.microsoft.com/office/drawing/2014/main" id="{87265BB8-3CC4-D24C-9A80-A0DCEA34DCA1}"/>
+              </a:ext>
+            </a:extLst>
+          </p:cNvPr>
+          <p:cNvSpPr txBox="1">
+            <a:spLocks noChangeArrowheads="1"/>
+          </p:cNvSpPr>
+          <p:nvPr/>
+        </p:nvSpPr>
+        <p:spPr bwMode="auto">
+          <a:xfrm>
+            <a:off x="619126" y="6457951"/>
+            <a:ext cx="2752677" cy="200055"/>
+          </a:xfrm>
+          <a:prstGeom prst="rect">
+            <a:avLst/>
+          </a:prstGeom>
+          <a:noFill/>
+          <a:ln>
+            <a:noFill/>
+          </a:ln>
+          <a:extLst>
+            <a:ext uri="{909E8E84-426E-40DD-AFC4-6F175D3DCCD1}">
+              <a14:hiddenFill xmlns:a14="http://schemas.microsoft.com/office/drawing/2010/main">
+                <a:solidFill>
+                  <a:srgbClr val="FFFFFF"/>
+                </a:solidFill>
+              </a14:hiddenFill>
+            </a:ext>
+            <a:ext uri="{91240B29-F687-4F45-9708-019B960494DF}">
+              <a14:hiddenLine xmlns:a14="http://schemas.microsoft.com/office/drawing/2010/main" w="9525">
+                <a:solidFill>
+                  <a:srgbClr val="000000"/>
+                </a:solidFill>
+                <a:miter lim="800000"/>
+                <a:headEnd/>
+                <a:tailEnd/>
+              </a14:hiddenLine>
+            </a:ext>
+          </a:extLst>
+        </p:spPr>
+        <p:txBody>
+          <a:bodyPr wrap="none">
+            <a:spAutoFit/>
+          </a:bodyPr>
+          <a:lstStyle>
+            <a:lvl1pPr>
+              <a:defRPr>
+                <a:solidFill>
+                  <a:schemeClr val="tx1"/>
+                </a:solidFill>
+                <a:latin typeface="Arial" panose="020B0604020202020204" pitchFamily="34" charset="0"/>
+              </a:defRPr>
+            </a:lvl1pPr>
+            <a:lvl2pPr marL="742950" indent="-285750">
+              <a:defRPr>
+                <a:solidFill>
+                  <a:schemeClr val="tx1"/>
+                </a:solidFill>
+                <a:latin typeface="Arial" panose="020B0604020202020204" pitchFamily="34" charset="0"/>
+              </a:defRPr>
+            </a:lvl2pPr>
+            <a:lvl3pPr marL="1143000" indent="-228600">
+              <a:defRPr>
+                <a:solidFill>
+                  <a:schemeClr val="tx1"/>
+                </a:solidFill>
+                <a:latin typeface="Arial" panose="020B0604020202020204" pitchFamily="34" charset="0"/>
+              </a:defRPr>
+            </a:lvl3pPr>
+            <a:lvl4pPr marL="1600200" indent="-228600">
+              <a:defRPr>
+                <a:solidFill>
+                  <a:schemeClr val="tx1"/>
+                </a:solidFill>
+                <a:latin typeface="Arial" panose="020B0604020202020204" pitchFamily="34" charset="0"/>
+              </a:defRPr>
+            </a:lvl4pPr>
+            <a:lvl5pPr marL="2057400" indent="-228600">
+              <a:defRPr>
+                <a:solidFill>
+                  <a:schemeClr val="tx1"/>
+                </a:solidFill>
+                <a:latin typeface="Arial" panose="020B0604020202020204" pitchFamily="34" charset="0"/>
+              </a:defRPr>
+            </a:lvl5pPr>
+            <a:lvl6pPr marL="2514600" indent="-228600" fontAlgn="base">
+              <a:spcBef>
+                <a:spcPct val="0"/>
+              </a:spcBef>
+              <a:spcAft>
+                <a:spcPct val="0"/>
+              </a:spcAft>
+              <a:defRPr>
+                <a:solidFill>
+                  <a:schemeClr val="tx1"/>
+                </a:solidFill>
+                <a:latin typeface="Arial" panose="020B0604020202020204" pitchFamily="34" charset="0"/>
+              </a:defRPr>
+            </a:lvl6pPr>
+            <a:lvl7pPr marL="2971800" indent="-228600" fontAlgn="base">
+              <a:spcBef>
+                <a:spcPct val="0"/>
+              </a:spcBef>
+              <a:spcAft>
+                <a:spcPct val="0"/>
+              </a:spcAft>
+              <a:defRPr>
+                <a:solidFill>
+                  <a:schemeClr val="tx1"/>
+                </a:solidFill>
+                <a:latin typeface="Arial" panose="020B0604020202020204" pitchFamily="34" charset="0"/>
+              </a:defRPr>
+            </a:lvl7pPr>
+            <a:lvl8pPr marL="3429000" indent="-228600" fontAlgn="base">
+              <a:spcBef>
+                <a:spcPct val="0"/>
+              </a:spcBef>
+              <a:spcAft>
+                <a:spcPct val="0"/>
+              </a:spcAft>
+              <a:defRPr>
+                <a:solidFill>
+                  <a:schemeClr val="tx1"/>
+                </a:solidFill>
+                <a:latin typeface="Arial" panose="020B0604020202020204" pitchFamily="34" charset="0"/>
+              </a:defRPr>
+            </a:lvl8pPr>
+            <a:lvl9pPr marL="3886200" indent="-228600" fontAlgn="base">
+              <a:spcBef>
+                <a:spcPct val="0"/>
+              </a:spcBef>
+              <a:spcAft>
+                <a:spcPct val="0"/>
+              </a:spcAft>
+              <a:defRPr>
+                <a:solidFill>
+                  <a:schemeClr val="tx1"/>
+                </a:solidFill>
+                <a:latin typeface="Arial" panose="020B0604020202020204" pitchFamily="34" charset="0"/>
+              </a:defRPr>
+            </a:lvl9pPr>
+          </a:lstStyle>
+          <a:p>
+            <a:pPr eaLnBrk="1" hangingPunct="1"/>
+            <a:r>
+              <a:rPr lang="en-US" altLang="en-US" sz="700">
+                <a:solidFill>
+                  <a:srgbClr val="989998"/>
+                </a:solidFill>
+              </a:rPr>
+              <a:t>© Presidio, Inc. All rights reserved. Proprietary and Confidential. </a:t>
+            </a:r>
+          </a:p>
+        </p:txBody>
+      </p:sp>
+      <p:cxnSp>
+        <p:nvCxnSpPr>
+          <p:cNvPr id="5" name="Straight Connector 4">
+            <a:extLst>
+              <a:ext uri="{FF2B5EF4-FFF2-40B4-BE49-F238E27FC236}">
+                <a16:creationId xmlns:a16="http://schemas.microsoft.com/office/drawing/2014/main" id="{D1A32166-CD09-6C47-9170-C0E551CAC873}"/>
+              </a:ext>
+            </a:extLst>
+          </p:cNvPr>
+          <p:cNvCxnSpPr>
+            <a:cxnSpLocks/>
+          </p:cNvCxnSpPr>
+          <p:nvPr/>
+        </p:nvCxnSpPr>
+        <p:spPr>
+          <a:xfrm>
+            <a:off x="723900" y="6429375"/>
+            <a:ext cx="9544050" cy="0"/>
+          </a:xfrm>
+          <a:prstGeom prst="line">
+            <a:avLst/>
+          </a:prstGeom>
+          <a:ln w="9525">
+            <a:solidFill>
+              <a:schemeClr val="bg1">
+                <a:lumMod val="75000"/>
+              </a:schemeClr>
+            </a:solidFill>
+          </a:ln>
+        </p:spPr>
+        <p:style>
+          <a:lnRef idx="1">
+            <a:schemeClr val="accent1"/>
+          </a:lnRef>
+          <a:fillRef idx="0">
+            <a:schemeClr val="accent1"/>
+          </a:fillRef>
+          <a:effectRef idx="0">
+            <a:schemeClr val="accent1"/>
+          </a:effectRef>
+          <a:fontRef idx="minor">
+            <a:schemeClr val="tx1"/>
+          </a:fontRef>
+        </p:style>
+      </p:cxnSp>
+      <p:sp>
+        <p:nvSpPr>
+          <p:cNvPr id="7" name="Rectangle 6">
+            <a:extLst>
+              <a:ext uri="{FF2B5EF4-FFF2-40B4-BE49-F238E27FC236}">
+                <a16:creationId xmlns:a16="http://schemas.microsoft.com/office/drawing/2014/main" id="{52251A6A-9906-0846-A0AE-A84C2CB71F53}"/>
+              </a:ext>
+            </a:extLst>
+          </p:cNvPr>
+          <p:cNvSpPr/>
+          <p:nvPr/>
+        </p:nvSpPr>
+        <p:spPr>
+          <a:xfrm>
+            <a:off x="781051" y="2"/>
+            <a:ext cx="561975" cy="66675"/>
+          </a:xfrm>
+          <a:prstGeom prst="rect">
+            <a:avLst/>
+          </a:prstGeom>
+          <a:solidFill>
+            <a:schemeClr val="bg1"/>
+          </a:solidFill>
+          <a:ln>
+            <a:noFill/>
+          </a:ln>
+        </p:spPr>
+        <p:style>
+          <a:lnRef idx="2">
+            <a:schemeClr val="accent1">
+              <a:shade val="50000"/>
+            </a:schemeClr>
+          </a:lnRef>
+          <a:fillRef idx="1">
+            <a:schemeClr val="accent1"/>
+          </a:fillRef>
+          <a:effectRef idx="0">
+            <a:schemeClr val="accent1"/>
+          </a:effectRef>
+          <a:fontRef idx="minor">
+            <a:schemeClr val="lt1"/>
+          </a:fontRef>
+        </p:style>
+        <p:txBody>
+          <a:bodyPr anchor="ctr"/>
+          <a:lstStyle/>
+          <a:p>
+            <a:pPr algn="ctr" eaLnBrk="1" fontAlgn="auto" hangingPunct="1">
+              <a:spcBef>
+                <a:spcPts val="0"/>
+              </a:spcBef>
+              <a:spcAft>
+                <a:spcPts val="0"/>
+              </a:spcAft>
+              <a:defRPr/>
+            </a:pPr>
+            <a:endParaRPr lang="en-US" sz="1738"/>
+          </a:p>
+        </p:txBody>
+      </p:sp>
+      <p:pic>
+        <p:nvPicPr>
+          <p:cNvPr id="8" name="Graphic 9">
+            <a:extLst>
+              <a:ext uri="{FF2B5EF4-FFF2-40B4-BE49-F238E27FC236}">
+                <a16:creationId xmlns:a16="http://schemas.microsoft.com/office/drawing/2014/main" id="{19CC3A0E-059E-2348-8EB8-801EB3FD366B}"/>
+              </a:ext>
+            </a:extLst>
+          </p:cNvPr>
+          <p:cNvPicPr>
+            <a:picLocks noChangeAspect="1"/>
+          </p:cNvPicPr>
+          <p:nvPr/>
+        </p:nvPicPr>
+        <p:blipFill>
+          <a:blip r:embed="rId2" cstate="screen">
+            <a:extLst>
+              <a:ext uri="{28A0092B-C50C-407E-A947-70E740481C1C}">
+                <a14:useLocalDpi xmlns:a14="http://schemas.microsoft.com/office/drawing/2010/main"/>
+              </a:ext>
+            </a:extLst>
+          </a:blip>
+          <a:stretch>
+            <a:fillRect/>
+          </a:stretch>
+        </p:blipFill>
+        <p:spPr>
+          <a:xfrm>
+            <a:off x="0" y="279400"/>
+            <a:ext cx="400050" cy="865188"/>
+          </a:xfrm>
+          <a:prstGeom prst="rect">
+            <a:avLst/>
+          </a:prstGeom>
+        </p:spPr>
+      </p:pic>
+      <p:sp>
+        <p:nvSpPr>
+          <p:cNvPr id="2" name="Title 1"/>
+          <p:cNvSpPr>
+            <a:spLocks noGrp="1"/>
+          </p:cNvSpPr>
+          <p:nvPr>
+            <p:ph type="title"/>
+          </p:nvPr>
+        </p:nvSpPr>
+        <p:spPr>
+          <a:xfrm>
+            <a:off x="685801" y="238127"/>
+            <a:ext cx="11058525" cy="976313"/>
+          </a:xfrm>
+        </p:spPr>
+        <p:txBody>
+          <a:bodyPr>
+            <a:normAutofit/>
+          </a:bodyPr>
+          <a:lstStyle>
+            <a:lvl1pPr>
+              <a:defRPr sz="3600" b="1"/>
+            </a:lvl1pPr>
+          </a:lstStyle>
+          <a:p>
+            <a:r>
+              <a:rPr lang="en-US"/>
+              <a:t>Click to edit Master title style</a:t>
+            </a:r>
+          </a:p>
+        </p:txBody>
+      </p:sp>
+      <p:sp>
+        <p:nvSpPr>
+          <p:cNvPr id="3" name="Content Placeholder 2"/>
+          <p:cNvSpPr>
+            <a:spLocks noGrp="1"/>
+          </p:cNvSpPr>
+          <p:nvPr>
+            <p:ph idx="1"/>
+          </p:nvPr>
+        </p:nvSpPr>
+        <p:spPr>
+          <a:xfrm>
+            <a:off x="695326" y="1387475"/>
+            <a:ext cx="11058525" cy="4351338"/>
+          </a:xfrm>
+        </p:spPr>
+        <p:txBody>
+          <a:bodyPr/>
+          <a:lstStyle/>
+          <a:p>
+            <a:pPr lvl="0"/>
+            <a:r>
+              <a:rPr lang="en-US"/>
+              <a:t>Click to edit Master text styles</a:t>
+            </a:r>
+          </a:p>
+          <a:p>
+            <a:pPr lvl="1"/>
+            <a:r>
+              <a:rPr lang="en-US"/>
+              <a:t>Second level</a:t>
+            </a:r>
+          </a:p>
+          <a:p>
+            <a:pPr lvl="2"/>
+            <a:r>
+              <a:rPr lang="en-US"/>
+              <a:t>Third level</a:t>
+            </a:r>
+          </a:p>
+          <a:p>
+            <a:pPr lvl="3"/>
+            <a:r>
+              <a:rPr lang="en-US"/>
+              <a:t>Fourth level</a:t>
+            </a:r>
+          </a:p>
+          <a:p>
+            <a:pPr lvl="4"/>
+            <a:r>
+              <a:rPr lang="en-US"/>
+              <a:t>Fifth level</a:t>
+            </a:r>
+          </a:p>
+        </p:txBody>
+      </p:sp>
+      <p:sp>
+        <p:nvSpPr>
+          <p:cNvPr id="9" name="Slide Number Placeholder 5">
+            <a:extLst>
+              <a:ext uri="{FF2B5EF4-FFF2-40B4-BE49-F238E27FC236}">
+                <a16:creationId xmlns:a16="http://schemas.microsoft.com/office/drawing/2014/main" id="{95EB2BC9-D147-EE4E-A68D-31E4DEFB3BDC}"/>
+              </a:ext>
+            </a:extLst>
+          </p:cNvPr>
+          <p:cNvSpPr>
+            <a:spLocks noGrp="1"/>
+          </p:cNvSpPr>
+          <p:nvPr>
+            <p:ph type="sldNum" sz="quarter" idx="10"/>
+          </p:nvPr>
+        </p:nvSpPr>
+        <p:spPr>
+          <a:xfrm>
+            <a:off x="1" y="6337302"/>
+            <a:ext cx="685800" cy="365125"/>
+          </a:xfrm>
+        </p:spPr>
+        <p:txBody>
+          <a:bodyPr/>
+          <a:lstStyle>
+            <a:lvl1pPr algn="r">
+              <a:defRPr sz="1600" smtClean="0">
+                <a:solidFill>
+                  <a:srgbClr val="333333"/>
+                </a:solidFill>
+              </a:defRPr>
+            </a:lvl1pPr>
+          </a:lstStyle>
+          <a:p>
+            <a:pPr>
+              <a:defRPr/>
+            </a:pPr>
+            <a:fld id="{CF94E228-EDBA-BC4C-ABED-6F3C1A901090}" type="slidenum">
+              <a:rPr lang="en-US"/>
+              <a:pPr>
+                <a:defRPr/>
+              </a:pPr>
+              <a:t>‹#›</a:t>
+            </a:fld>
+            <a:endParaRPr lang="en-US"/>
+          </a:p>
+        </p:txBody>
+      </p:sp>
+      <p:pic>
+        <p:nvPicPr>
+          <p:cNvPr id="10" name="Graphic 9">
+            <a:extLst>
+              <a:ext uri="{FF2B5EF4-FFF2-40B4-BE49-F238E27FC236}">
+                <a16:creationId xmlns:a16="http://schemas.microsoft.com/office/drawing/2014/main" id="{8CA86B90-A6A0-EE42-BC9A-4B49D8805FCD}"/>
+              </a:ext>
+            </a:extLst>
+          </p:cNvPr>
+          <p:cNvPicPr>
+            <a:picLocks noChangeAspect="1"/>
+          </p:cNvPicPr>
+          <p:nvPr userDrawn="1"/>
+        </p:nvPicPr>
+        <p:blipFill>
+          <a:blip r:embed="rId3" cstate="screen">
+            <a:extLst>
+              <a:ext uri="{28A0092B-C50C-407E-A947-70E740481C1C}">
+                <a14:useLocalDpi xmlns:a14="http://schemas.microsoft.com/office/drawing/2010/main"/>
+              </a:ext>
+              <a:ext uri="{96DAC541-7B7A-43D3-8B79-37D633B846F1}">
+                <asvg:svgBlip xmlns:asvg="http://schemas.microsoft.com/office/drawing/2016/SVG/main" r:embed="rId4"/>
+              </a:ext>
+            </a:extLst>
+          </a:blip>
+          <a:stretch>
+            <a:fillRect/>
+          </a:stretch>
+        </p:blipFill>
+        <p:spPr>
+          <a:xfrm>
+            <a:off x="10404534" y="6360160"/>
+            <a:ext cx="1397927" cy="268832"/>
+          </a:xfrm>
+          <a:prstGeom prst="rect">
+            <a:avLst/>
+          </a:prstGeom>
+        </p:spPr>
+      </p:pic>
+    </p:spTree>
+    <p:extLst>
+      <p:ext uri="{BB962C8B-B14F-4D97-AF65-F5344CB8AC3E}">
+        <p14:creationId xmlns:p14="http://schemas.microsoft.com/office/powerpoint/2010/main" val="2135561394"/>
+      </p:ext>
+    </p:extLst>
+  </p:cSld>
+  <p:clrMapOvr>
+    <a:masterClrMapping/>
+  </p:clrMapOvr>
+</p:sldLayout>
+</file>
+
+<file path=ppt/slideLayouts/slideLayout16.xml><?xml version="1.0" encoding="utf-8"?>
+<p:sldLayout xmlns:a="http://schemas.openxmlformats.org/drawingml/2006/main" xmlns:r="http://schemas.openxmlformats.org/officeDocument/2006/relationships" xmlns:p="http://schemas.openxmlformats.org/presentationml/2006/main" preserve="1" userDrawn="1">
+  <p:cSld name="Two Content">
+    <p:spTree>
+      <p:nvGrpSpPr>
+        <p:cNvPr id="1" name=""/>
+        <p:cNvGrpSpPr/>
+        <p:nvPr/>
+      </p:nvGrpSpPr>
+      <p:grpSpPr>
+        <a:xfrm>
+          <a:off x="0" y="0"/>
+          <a:ext cx="0" cy="0"/>
+          <a:chOff x="0" y="0"/>
+          <a:chExt cx="0" cy="0"/>
+        </a:xfrm>
+      </p:grpSpPr>
+      <p:pic>
+        <p:nvPicPr>
+          <p:cNvPr id="5" name="Graphic 4">
+            <a:extLst>
+              <a:ext uri="{FF2B5EF4-FFF2-40B4-BE49-F238E27FC236}">
+                <a16:creationId xmlns:a16="http://schemas.microsoft.com/office/drawing/2014/main" id="{DF0B1224-DAF3-BF42-ADA2-342CA6A9BEEC}"/>
+              </a:ext>
+            </a:extLst>
+          </p:cNvPr>
+          <p:cNvPicPr>
+            <a:picLocks noChangeAspect="1"/>
+          </p:cNvPicPr>
+          <p:nvPr/>
+        </p:nvPicPr>
+        <p:blipFill>
+          <a:blip r:embed="rId2" cstate="screen">
+            <a:extLst>
+              <a:ext uri="{28A0092B-C50C-407E-A947-70E740481C1C}">
+                <a14:useLocalDpi xmlns:a14="http://schemas.microsoft.com/office/drawing/2010/main"/>
+              </a:ext>
+            </a:extLst>
+          </a:blip>
+          <a:stretch>
+            <a:fillRect/>
+          </a:stretch>
+        </p:blipFill>
+        <p:spPr>
+          <a:xfrm>
+            <a:off x="0" y="279400"/>
+            <a:ext cx="400050" cy="865188"/>
+          </a:xfrm>
+          <a:prstGeom prst="rect">
+            <a:avLst/>
+          </a:prstGeom>
+        </p:spPr>
+      </p:pic>
+      <p:sp>
+        <p:nvSpPr>
+          <p:cNvPr id="6" name="TextBox 6">
+            <a:extLst>
+              <a:ext uri="{FF2B5EF4-FFF2-40B4-BE49-F238E27FC236}">
+                <a16:creationId xmlns:a16="http://schemas.microsoft.com/office/drawing/2014/main" id="{402E737C-7032-7B45-9176-1933D43D27E7}"/>
+              </a:ext>
+            </a:extLst>
+          </p:cNvPr>
+          <p:cNvSpPr txBox="1">
+            <a:spLocks noChangeArrowheads="1"/>
+          </p:cNvSpPr>
+          <p:nvPr/>
+        </p:nvSpPr>
+        <p:spPr bwMode="auto">
+          <a:xfrm>
+            <a:off x="619126" y="6457951"/>
+            <a:ext cx="2752677" cy="200055"/>
+          </a:xfrm>
+          <a:prstGeom prst="rect">
+            <a:avLst/>
+          </a:prstGeom>
+          <a:noFill/>
+          <a:ln>
+            <a:noFill/>
+          </a:ln>
+          <a:extLst>
+            <a:ext uri="{909E8E84-426E-40DD-AFC4-6F175D3DCCD1}">
+              <a14:hiddenFill xmlns:a14="http://schemas.microsoft.com/office/drawing/2010/main">
+                <a:solidFill>
+                  <a:srgbClr val="FFFFFF"/>
+                </a:solidFill>
+              </a14:hiddenFill>
+            </a:ext>
+            <a:ext uri="{91240B29-F687-4F45-9708-019B960494DF}">
+              <a14:hiddenLine xmlns:a14="http://schemas.microsoft.com/office/drawing/2010/main" w="9525">
+                <a:solidFill>
+                  <a:srgbClr val="000000"/>
+                </a:solidFill>
+                <a:miter lim="800000"/>
+                <a:headEnd/>
+                <a:tailEnd/>
+              </a14:hiddenLine>
+            </a:ext>
+          </a:extLst>
+        </p:spPr>
+        <p:txBody>
+          <a:bodyPr wrap="none">
+            <a:spAutoFit/>
+          </a:bodyPr>
+          <a:lstStyle>
+            <a:lvl1pPr>
+              <a:defRPr>
+                <a:solidFill>
+                  <a:schemeClr val="tx1"/>
+                </a:solidFill>
+                <a:latin typeface="Arial" panose="020B0604020202020204" pitchFamily="34" charset="0"/>
+              </a:defRPr>
+            </a:lvl1pPr>
+            <a:lvl2pPr marL="742950" indent="-285750">
+              <a:defRPr>
+                <a:solidFill>
+                  <a:schemeClr val="tx1"/>
+                </a:solidFill>
+                <a:latin typeface="Arial" panose="020B0604020202020204" pitchFamily="34" charset="0"/>
+              </a:defRPr>
+            </a:lvl2pPr>
+            <a:lvl3pPr marL="1143000" indent="-228600">
+              <a:defRPr>
+                <a:solidFill>
+                  <a:schemeClr val="tx1"/>
+                </a:solidFill>
+                <a:latin typeface="Arial" panose="020B0604020202020204" pitchFamily="34" charset="0"/>
+              </a:defRPr>
+            </a:lvl3pPr>
+            <a:lvl4pPr marL="1600200" indent="-228600">
+              <a:defRPr>
+                <a:solidFill>
+                  <a:schemeClr val="tx1"/>
+                </a:solidFill>
+                <a:latin typeface="Arial" panose="020B0604020202020204" pitchFamily="34" charset="0"/>
+              </a:defRPr>
+            </a:lvl4pPr>
+            <a:lvl5pPr marL="2057400" indent="-228600">
+              <a:defRPr>
+                <a:solidFill>
+                  <a:schemeClr val="tx1"/>
+                </a:solidFill>
+                <a:latin typeface="Arial" panose="020B0604020202020204" pitchFamily="34" charset="0"/>
+              </a:defRPr>
+            </a:lvl5pPr>
+            <a:lvl6pPr marL="2514600" indent="-228600" fontAlgn="base">
+              <a:spcBef>
+                <a:spcPct val="0"/>
+              </a:spcBef>
+              <a:spcAft>
+                <a:spcPct val="0"/>
+              </a:spcAft>
+              <a:defRPr>
+                <a:solidFill>
+                  <a:schemeClr val="tx1"/>
+                </a:solidFill>
+                <a:latin typeface="Arial" panose="020B0604020202020204" pitchFamily="34" charset="0"/>
+              </a:defRPr>
+            </a:lvl6pPr>
+            <a:lvl7pPr marL="2971800" indent="-228600" fontAlgn="base">
+              <a:spcBef>
+                <a:spcPct val="0"/>
+              </a:spcBef>
+              <a:spcAft>
+                <a:spcPct val="0"/>
+              </a:spcAft>
+              <a:defRPr>
+                <a:solidFill>
+                  <a:schemeClr val="tx1"/>
+                </a:solidFill>
+                <a:latin typeface="Arial" panose="020B0604020202020204" pitchFamily="34" charset="0"/>
+              </a:defRPr>
+            </a:lvl7pPr>
+            <a:lvl8pPr marL="3429000" indent="-228600" fontAlgn="base">
+              <a:spcBef>
+                <a:spcPct val="0"/>
+              </a:spcBef>
+              <a:spcAft>
+                <a:spcPct val="0"/>
+              </a:spcAft>
+              <a:defRPr>
+                <a:solidFill>
+                  <a:schemeClr val="tx1"/>
+                </a:solidFill>
+                <a:latin typeface="Arial" panose="020B0604020202020204" pitchFamily="34" charset="0"/>
+              </a:defRPr>
+            </a:lvl8pPr>
+            <a:lvl9pPr marL="3886200" indent="-228600" fontAlgn="base">
+              <a:spcBef>
+                <a:spcPct val="0"/>
+              </a:spcBef>
+              <a:spcAft>
+                <a:spcPct val="0"/>
+              </a:spcAft>
+              <a:defRPr>
+                <a:solidFill>
+                  <a:schemeClr val="tx1"/>
+                </a:solidFill>
+                <a:latin typeface="Arial" panose="020B0604020202020204" pitchFamily="34" charset="0"/>
+              </a:defRPr>
+            </a:lvl9pPr>
+          </a:lstStyle>
+          <a:p>
+            <a:pPr eaLnBrk="1" hangingPunct="1"/>
+            <a:r>
+              <a:rPr lang="en-US" altLang="en-US" sz="700">
+                <a:solidFill>
+                  <a:srgbClr val="989998"/>
+                </a:solidFill>
+              </a:rPr>
+              <a:t>© Presidio, Inc. All rights reserved. Proprietary and Confidential. </a:t>
+            </a:r>
+          </a:p>
+        </p:txBody>
+      </p:sp>
+      <p:cxnSp>
+        <p:nvCxnSpPr>
+          <p:cNvPr id="7" name="Straight Connector 6">
+            <a:extLst>
+              <a:ext uri="{FF2B5EF4-FFF2-40B4-BE49-F238E27FC236}">
+                <a16:creationId xmlns:a16="http://schemas.microsoft.com/office/drawing/2014/main" id="{DA28DEB5-28F2-9E4C-A8D5-2AE84B94F30F}"/>
+              </a:ext>
+            </a:extLst>
+          </p:cNvPr>
+          <p:cNvCxnSpPr>
+            <a:cxnSpLocks/>
+          </p:cNvCxnSpPr>
+          <p:nvPr/>
+        </p:nvCxnSpPr>
+        <p:spPr>
+          <a:xfrm>
+            <a:off x="723900" y="6429375"/>
+            <a:ext cx="9544050" cy="0"/>
+          </a:xfrm>
+          <a:prstGeom prst="line">
+            <a:avLst/>
+          </a:prstGeom>
+          <a:ln w="9525">
+            <a:solidFill>
+              <a:schemeClr val="bg1">
+                <a:lumMod val="75000"/>
+              </a:schemeClr>
+            </a:solidFill>
+          </a:ln>
+        </p:spPr>
+        <p:style>
+          <a:lnRef idx="1">
+            <a:schemeClr val="accent1"/>
+          </a:lnRef>
+          <a:fillRef idx="0">
+            <a:schemeClr val="accent1"/>
+          </a:fillRef>
+          <a:effectRef idx="0">
+            <a:schemeClr val="accent1"/>
+          </a:effectRef>
+          <a:fontRef idx="minor">
+            <a:schemeClr val="tx1"/>
+          </a:fontRef>
+        </p:style>
+      </p:cxnSp>
+      <p:sp>
+        <p:nvSpPr>
+          <p:cNvPr id="3" name="Content Placeholder 2"/>
+          <p:cNvSpPr>
+            <a:spLocks noGrp="1"/>
+          </p:cNvSpPr>
+          <p:nvPr>
+            <p:ph sz="half" idx="1"/>
+          </p:nvPr>
+        </p:nvSpPr>
+        <p:spPr>
+          <a:xfrm>
+            <a:off x="685799" y="1482725"/>
+            <a:ext cx="4857751" cy="4351338"/>
+          </a:xfrm>
+        </p:spPr>
+        <p:txBody>
+          <a:bodyPr/>
+          <a:lstStyle/>
+          <a:p>
+            <a:pPr lvl="0"/>
+            <a:r>
+              <a:rPr lang="en-US"/>
+              <a:t>Click to edit Master text styles</a:t>
+            </a:r>
+          </a:p>
+          <a:p>
+            <a:pPr lvl="1"/>
+            <a:r>
+              <a:rPr lang="en-US"/>
+              <a:t>Second level</a:t>
+            </a:r>
+          </a:p>
+          <a:p>
+            <a:pPr lvl="2"/>
+            <a:r>
+              <a:rPr lang="en-US"/>
+              <a:t>Third level</a:t>
+            </a:r>
+          </a:p>
+          <a:p>
+            <a:pPr lvl="3"/>
+            <a:r>
+              <a:rPr lang="en-US"/>
+              <a:t>Fourth level</a:t>
+            </a:r>
+          </a:p>
+          <a:p>
+            <a:pPr lvl="4"/>
+            <a:r>
+              <a:rPr lang="en-US"/>
+              <a:t>Fifth level</a:t>
+            </a:r>
+          </a:p>
+        </p:txBody>
+      </p:sp>
+      <p:sp>
+        <p:nvSpPr>
+          <p:cNvPr id="4" name="Content Placeholder 3"/>
+          <p:cNvSpPr>
+            <a:spLocks noGrp="1"/>
+          </p:cNvSpPr>
+          <p:nvPr>
+            <p:ph sz="half" idx="2"/>
+          </p:nvPr>
+        </p:nvSpPr>
+        <p:spPr>
+          <a:xfrm>
+            <a:off x="6181725" y="1482725"/>
+            <a:ext cx="5257800" cy="4351338"/>
+          </a:xfrm>
+        </p:spPr>
+        <p:txBody>
+          <a:bodyPr/>
+          <a:lstStyle/>
+          <a:p>
+            <a:pPr lvl="0"/>
+            <a:r>
+              <a:rPr lang="en-US"/>
+              <a:t>Click to edit Master text styles</a:t>
+            </a:r>
+          </a:p>
+          <a:p>
+            <a:pPr lvl="1"/>
+            <a:r>
+              <a:rPr lang="en-US"/>
+              <a:t>Second level</a:t>
+            </a:r>
+          </a:p>
+          <a:p>
+            <a:pPr lvl="2"/>
+            <a:r>
+              <a:rPr lang="en-US"/>
+              <a:t>Third level</a:t>
+            </a:r>
+          </a:p>
+          <a:p>
+            <a:pPr lvl="3"/>
+            <a:r>
+              <a:rPr lang="en-US"/>
+              <a:t>Fourth level</a:t>
+            </a:r>
+          </a:p>
+          <a:p>
+            <a:pPr lvl="4"/>
+            <a:r>
+              <a:rPr lang="en-US"/>
+              <a:t>Fifth level</a:t>
+            </a:r>
+          </a:p>
+        </p:txBody>
+      </p:sp>
+      <p:sp>
+        <p:nvSpPr>
+          <p:cNvPr id="22" name="Title 1"/>
+          <p:cNvSpPr>
+            <a:spLocks noGrp="1"/>
+          </p:cNvSpPr>
+          <p:nvPr>
+            <p:ph type="title"/>
+          </p:nvPr>
+        </p:nvSpPr>
+        <p:spPr>
+          <a:xfrm>
+            <a:off x="685801" y="238127"/>
+            <a:ext cx="11058525" cy="976313"/>
+          </a:xfrm>
+        </p:spPr>
+        <p:txBody>
+          <a:bodyPr>
+            <a:normAutofit/>
+          </a:bodyPr>
+          <a:lstStyle>
+            <a:lvl1pPr>
+              <a:defRPr sz="3600" b="1"/>
+            </a:lvl1pPr>
+          </a:lstStyle>
+          <a:p>
+            <a:r>
+              <a:rPr lang="en-US"/>
+              <a:t>Click to edit Master title style</a:t>
+            </a:r>
+          </a:p>
+        </p:txBody>
+      </p:sp>
+      <p:sp>
+        <p:nvSpPr>
+          <p:cNvPr id="9" name="Slide Number Placeholder 5">
+            <a:extLst>
+              <a:ext uri="{FF2B5EF4-FFF2-40B4-BE49-F238E27FC236}">
+                <a16:creationId xmlns:a16="http://schemas.microsoft.com/office/drawing/2014/main" id="{B39BD169-C8AF-4D4E-9A58-1FB2D26B4E60}"/>
+              </a:ext>
+            </a:extLst>
+          </p:cNvPr>
+          <p:cNvSpPr>
+            <a:spLocks noGrp="1"/>
+          </p:cNvSpPr>
+          <p:nvPr>
+            <p:ph type="sldNum" sz="quarter" idx="10"/>
+          </p:nvPr>
+        </p:nvSpPr>
+        <p:spPr>
+          <a:xfrm>
+            <a:off x="1" y="6337302"/>
+            <a:ext cx="685800" cy="365125"/>
+          </a:xfrm>
+        </p:spPr>
+        <p:txBody>
+          <a:bodyPr/>
+          <a:lstStyle>
+            <a:lvl1pPr algn="r">
+              <a:defRPr sz="1600" smtClean="0">
+                <a:solidFill>
+                  <a:srgbClr val="333333"/>
+                </a:solidFill>
+              </a:defRPr>
+            </a:lvl1pPr>
+          </a:lstStyle>
+          <a:p>
+            <a:pPr>
+              <a:defRPr/>
+            </a:pPr>
+            <a:fld id="{B2419100-B348-6C46-A05D-815961EF684F}" type="slidenum">
+              <a:rPr lang="en-US"/>
+              <a:pPr>
+                <a:defRPr/>
+              </a:pPr>
+              <a:t>‹#›</a:t>
+            </a:fld>
+            <a:endParaRPr lang="en-US"/>
+          </a:p>
+        </p:txBody>
+      </p:sp>
+      <p:pic>
+        <p:nvPicPr>
+          <p:cNvPr id="10" name="Graphic 9">
+            <a:extLst>
+              <a:ext uri="{FF2B5EF4-FFF2-40B4-BE49-F238E27FC236}">
+                <a16:creationId xmlns:a16="http://schemas.microsoft.com/office/drawing/2014/main" id="{E53A901C-CEC7-784A-B8DC-2B648C7F2D56}"/>
+              </a:ext>
+            </a:extLst>
+          </p:cNvPr>
+          <p:cNvPicPr>
+            <a:picLocks noChangeAspect="1"/>
+          </p:cNvPicPr>
+          <p:nvPr userDrawn="1"/>
+        </p:nvPicPr>
+        <p:blipFill>
+          <a:blip r:embed="rId3" cstate="screen">
+            <a:extLst>
+              <a:ext uri="{28A0092B-C50C-407E-A947-70E740481C1C}">
+                <a14:useLocalDpi xmlns:a14="http://schemas.microsoft.com/office/drawing/2010/main"/>
+              </a:ext>
+              <a:ext uri="{96DAC541-7B7A-43D3-8B79-37D633B846F1}">
+                <asvg:svgBlip xmlns:asvg="http://schemas.microsoft.com/office/drawing/2016/SVG/main" r:embed="rId4"/>
+              </a:ext>
+            </a:extLst>
+          </a:blip>
+          <a:stretch>
+            <a:fillRect/>
+          </a:stretch>
+        </p:blipFill>
+        <p:spPr>
+          <a:xfrm>
+            <a:off x="10404534" y="6360160"/>
+            <a:ext cx="1397927" cy="268832"/>
+          </a:xfrm>
+          <a:prstGeom prst="rect">
+            <a:avLst/>
+          </a:prstGeom>
+        </p:spPr>
+      </p:pic>
+    </p:spTree>
+    <p:extLst>
+      <p:ext uri="{BB962C8B-B14F-4D97-AF65-F5344CB8AC3E}">
+        <p14:creationId xmlns:p14="http://schemas.microsoft.com/office/powerpoint/2010/main" val="149266210"/>
+      </p:ext>
+    </p:extLst>
+  </p:cSld>
+  <p:clrMapOvr>
+    <a:masterClrMapping/>
+  </p:clrMapOvr>
+</p:sldLayout>
+</file>
+
+<file path=ppt/slideLayouts/slideLayout17.xml><?xml version="1.0" encoding="utf-8"?>
+<p:sldLayout xmlns:a="http://schemas.openxmlformats.org/drawingml/2006/main" xmlns:r="http://schemas.openxmlformats.org/officeDocument/2006/relationships" xmlns:p="http://schemas.openxmlformats.org/presentationml/2006/main" preserve="1" userDrawn="1">
+  <p:cSld name="Title Only">
+    <p:spTree>
+      <p:nvGrpSpPr>
+        <p:cNvPr id="1" name=""/>
+        <p:cNvGrpSpPr/>
+        <p:nvPr/>
+      </p:nvGrpSpPr>
+      <p:grpSpPr>
+        <a:xfrm>
+          <a:off x="0" y="0"/>
+          <a:ext cx="0" cy="0"/>
+          <a:chOff x="0" y="0"/>
+          <a:chExt cx="0" cy="0"/>
+        </a:xfrm>
+      </p:grpSpPr>
+      <p:pic>
+        <p:nvPicPr>
+          <p:cNvPr id="3" name="Graphic 4">
+            <a:extLst>
+              <a:ext uri="{FF2B5EF4-FFF2-40B4-BE49-F238E27FC236}">
+                <a16:creationId xmlns:a16="http://schemas.microsoft.com/office/drawing/2014/main" id="{DA66F2CF-2F42-5248-9C10-6405D62601C4}"/>
+              </a:ext>
+            </a:extLst>
+          </p:cNvPr>
+          <p:cNvPicPr>
+            <a:picLocks noChangeAspect="1"/>
+          </p:cNvPicPr>
+          <p:nvPr/>
+        </p:nvPicPr>
+        <p:blipFill>
+          <a:blip r:embed="rId2" cstate="screen">
+            <a:extLst>
+              <a:ext uri="{28A0092B-C50C-407E-A947-70E740481C1C}">
+                <a14:useLocalDpi xmlns:a14="http://schemas.microsoft.com/office/drawing/2010/main"/>
+              </a:ext>
+            </a:extLst>
+          </a:blip>
+          <a:stretch>
+            <a:fillRect/>
+          </a:stretch>
+        </p:blipFill>
+        <p:spPr>
+          <a:xfrm>
+            <a:off x="0" y="279400"/>
+            <a:ext cx="400050" cy="865188"/>
+          </a:xfrm>
+          <a:prstGeom prst="rect">
+            <a:avLst/>
+          </a:prstGeom>
+        </p:spPr>
+      </p:pic>
+      <p:sp>
+        <p:nvSpPr>
+          <p:cNvPr id="4" name="TextBox 6">
+            <a:extLst>
+              <a:ext uri="{FF2B5EF4-FFF2-40B4-BE49-F238E27FC236}">
+                <a16:creationId xmlns:a16="http://schemas.microsoft.com/office/drawing/2014/main" id="{D352EF0B-6323-DC4A-96F2-9F8D230E2D28}"/>
+              </a:ext>
+            </a:extLst>
+          </p:cNvPr>
+          <p:cNvSpPr txBox="1">
+            <a:spLocks noChangeArrowheads="1"/>
+          </p:cNvSpPr>
+          <p:nvPr/>
+        </p:nvSpPr>
+        <p:spPr bwMode="auto">
+          <a:xfrm>
+            <a:off x="619126" y="6457951"/>
+            <a:ext cx="2752677" cy="200055"/>
+          </a:xfrm>
+          <a:prstGeom prst="rect">
+            <a:avLst/>
+          </a:prstGeom>
+          <a:noFill/>
+          <a:ln>
+            <a:noFill/>
+          </a:ln>
+          <a:extLst>
+            <a:ext uri="{909E8E84-426E-40DD-AFC4-6F175D3DCCD1}">
+              <a14:hiddenFill xmlns:a14="http://schemas.microsoft.com/office/drawing/2010/main">
+                <a:solidFill>
+                  <a:srgbClr val="FFFFFF"/>
+                </a:solidFill>
+              </a14:hiddenFill>
+            </a:ext>
+            <a:ext uri="{91240B29-F687-4F45-9708-019B960494DF}">
+              <a14:hiddenLine xmlns:a14="http://schemas.microsoft.com/office/drawing/2010/main" w="9525">
+                <a:solidFill>
+                  <a:srgbClr val="000000"/>
+                </a:solidFill>
+                <a:miter lim="800000"/>
+                <a:headEnd/>
+                <a:tailEnd/>
+              </a14:hiddenLine>
+            </a:ext>
+          </a:extLst>
+        </p:spPr>
+        <p:txBody>
+          <a:bodyPr wrap="none">
+            <a:spAutoFit/>
+          </a:bodyPr>
+          <a:lstStyle>
+            <a:lvl1pPr>
+              <a:defRPr>
+                <a:solidFill>
+                  <a:schemeClr val="tx1"/>
+                </a:solidFill>
+                <a:latin typeface="Arial" panose="020B0604020202020204" pitchFamily="34" charset="0"/>
+              </a:defRPr>
+            </a:lvl1pPr>
+            <a:lvl2pPr marL="742950" indent="-285750">
+              <a:defRPr>
+                <a:solidFill>
+                  <a:schemeClr val="tx1"/>
+                </a:solidFill>
+                <a:latin typeface="Arial" panose="020B0604020202020204" pitchFamily="34" charset="0"/>
+              </a:defRPr>
+            </a:lvl2pPr>
+            <a:lvl3pPr marL="1143000" indent="-228600">
+              <a:defRPr>
+                <a:solidFill>
+                  <a:schemeClr val="tx1"/>
+                </a:solidFill>
+                <a:latin typeface="Arial" panose="020B0604020202020204" pitchFamily="34" charset="0"/>
+              </a:defRPr>
+            </a:lvl3pPr>
+            <a:lvl4pPr marL="1600200" indent="-228600">
+              <a:defRPr>
+                <a:solidFill>
+                  <a:schemeClr val="tx1"/>
+                </a:solidFill>
+                <a:latin typeface="Arial" panose="020B0604020202020204" pitchFamily="34" charset="0"/>
+              </a:defRPr>
+            </a:lvl4pPr>
+            <a:lvl5pPr marL="2057400" indent="-228600">
+              <a:defRPr>
+                <a:solidFill>
+                  <a:schemeClr val="tx1"/>
+                </a:solidFill>
+                <a:latin typeface="Arial" panose="020B0604020202020204" pitchFamily="34" charset="0"/>
+              </a:defRPr>
+            </a:lvl5pPr>
+            <a:lvl6pPr marL="2514600" indent="-228600" fontAlgn="base">
+              <a:spcBef>
+                <a:spcPct val="0"/>
+              </a:spcBef>
+              <a:spcAft>
+                <a:spcPct val="0"/>
+              </a:spcAft>
+              <a:defRPr>
+                <a:solidFill>
+                  <a:schemeClr val="tx1"/>
+                </a:solidFill>
+                <a:latin typeface="Arial" panose="020B0604020202020204" pitchFamily="34" charset="0"/>
+              </a:defRPr>
+            </a:lvl6pPr>
+            <a:lvl7pPr marL="2971800" indent="-228600" fontAlgn="base">
+              <a:spcBef>
+                <a:spcPct val="0"/>
+              </a:spcBef>
+              <a:spcAft>
+                <a:spcPct val="0"/>
+              </a:spcAft>
+              <a:defRPr>
+                <a:solidFill>
+                  <a:schemeClr val="tx1"/>
+                </a:solidFill>
+                <a:latin typeface="Arial" panose="020B0604020202020204" pitchFamily="34" charset="0"/>
+              </a:defRPr>
+            </a:lvl7pPr>
+            <a:lvl8pPr marL="3429000" indent="-228600" fontAlgn="base">
+              <a:spcBef>
+                <a:spcPct val="0"/>
+              </a:spcBef>
+              <a:spcAft>
+                <a:spcPct val="0"/>
+              </a:spcAft>
+              <a:defRPr>
+                <a:solidFill>
+                  <a:schemeClr val="tx1"/>
+                </a:solidFill>
+                <a:latin typeface="Arial" panose="020B0604020202020204" pitchFamily="34" charset="0"/>
+              </a:defRPr>
+            </a:lvl8pPr>
+            <a:lvl9pPr marL="3886200" indent="-228600" fontAlgn="base">
+              <a:spcBef>
+                <a:spcPct val="0"/>
+              </a:spcBef>
+              <a:spcAft>
+                <a:spcPct val="0"/>
+              </a:spcAft>
+              <a:defRPr>
+                <a:solidFill>
+                  <a:schemeClr val="tx1"/>
+                </a:solidFill>
+                <a:latin typeface="Arial" panose="020B0604020202020204" pitchFamily="34" charset="0"/>
+              </a:defRPr>
+            </a:lvl9pPr>
+          </a:lstStyle>
+          <a:p>
+            <a:pPr eaLnBrk="1" hangingPunct="1"/>
+            <a:r>
+              <a:rPr lang="en-US" altLang="en-US" sz="700">
+                <a:solidFill>
+                  <a:srgbClr val="989998"/>
+                </a:solidFill>
+              </a:rPr>
+              <a:t>© Presidio, Inc. All rights reserved. Proprietary and Confidential. </a:t>
+            </a:r>
+          </a:p>
+        </p:txBody>
+      </p:sp>
+      <p:cxnSp>
+        <p:nvCxnSpPr>
+          <p:cNvPr id="5" name="Straight Connector 4">
+            <a:extLst>
+              <a:ext uri="{FF2B5EF4-FFF2-40B4-BE49-F238E27FC236}">
+                <a16:creationId xmlns:a16="http://schemas.microsoft.com/office/drawing/2014/main" id="{FEAD2150-CC17-0841-8FA6-F620F8E136E1}"/>
+              </a:ext>
+            </a:extLst>
+          </p:cNvPr>
+          <p:cNvCxnSpPr>
+            <a:cxnSpLocks/>
+          </p:cNvCxnSpPr>
+          <p:nvPr/>
+        </p:nvCxnSpPr>
+        <p:spPr>
+          <a:xfrm>
+            <a:off x="723900" y="6429375"/>
+            <a:ext cx="9544050" cy="0"/>
+          </a:xfrm>
+          <a:prstGeom prst="line">
+            <a:avLst/>
+          </a:prstGeom>
+          <a:ln w="9525">
+            <a:solidFill>
+              <a:schemeClr val="bg1">
+                <a:lumMod val="75000"/>
+              </a:schemeClr>
+            </a:solidFill>
+          </a:ln>
+        </p:spPr>
+        <p:style>
+          <a:lnRef idx="1">
+            <a:schemeClr val="accent1"/>
+          </a:lnRef>
+          <a:fillRef idx="0">
+            <a:schemeClr val="accent1"/>
+          </a:fillRef>
+          <a:effectRef idx="0">
+            <a:schemeClr val="accent1"/>
+          </a:effectRef>
+          <a:fontRef idx="minor">
+            <a:schemeClr val="tx1"/>
+          </a:fontRef>
+        </p:style>
+      </p:cxnSp>
+      <p:sp>
+        <p:nvSpPr>
+          <p:cNvPr id="17" name="Title 1"/>
+          <p:cNvSpPr>
+            <a:spLocks noGrp="1"/>
+          </p:cNvSpPr>
+          <p:nvPr>
+            <p:ph type="title"/>
+          </p:nvPr>
+        </p:nvSpPr>
+        <p:spPr>
+          <a:xfrm>
+            <a:off x="685801" y="238127"/>
+            <a:ext cx="11058525" cy="976313"/>
+          </a:xfrm>
+        </p:spPr>
+        <p:txBody>
+          <a:bodyPr>
+            <a:normAutofit/>
+          </a:bodyPr>
+          <a:lstStyle>
+            <a:lvl1pPr>
+              <a:defRPr sz="3600" b="1"/>
+            </a:lvl1pPr>
+          </a:lstStyle>
+          <a:p>
+            <a:r>
+              <a:rPr lang="en-US"/>
+              <a:t>Click to edit Master title style</a:t>
+            </a:r>
+          </a:p>
+        </p:txBody>
+      </p:sp>
+      <p:sp>
+        <p:nvSpPr>
+          <p:cNvPr id="7" name="Slide Number Placeholder 5">
+            <a:extLst>
+              <a:ext uri="{FF2B5EF4-FFF2-40B4-BE49-F238E27FC236}">
+                <a16:creationId xmlns:a16="http://schemas.microsoft.com/office/drawing/2014/main" id="{31237975-F5FC-224D-93D4-1BD687D25CB6}"/>
+              </a:ext>
+            </a:extLst>
+          </p:cNvPr>
+          <p:cNvSpPr>
+            <a:spLocks noGrp="1"/>
+          </p:cNvSpPr>
+          <p:nvPr>
+            <p:ph type="sldNum" sz="quarter" idx="10"/>
+          </p:nvPr>
+        </p:nvSpPr>
+        <p:spPr>
+          <a:xfrm>
+            <a:off x="1" y="6337302"/>
+            <a:ext cx="685800" cy="365125"/>
+          </a:xfrm>
+        </p:spPr>
+        <p:txBody>
+          <a:bodyPr/>
+          <a:lstStyle>
+            <a:lvl1pPr algn="r">
+              <a:defRPr sz="1600" smtClean="0">
+                <a:solidFill>
+                  <a:srgbClr val="333333"/>
+                </a:solidFill>
+              </a:defRPr>
+            </a:lvl1pPr>
+          </a:lstStyle>
+          <a:p>
+            <a:pPr>
+              <a:defRPr/>
+            </a:pPr>
+            <a:fld id="{A1949909-090E-7F47-8180-F1C1AE5B4616}" type="slidenum">
+              <a:rPr lang="en-US"/>
+              <a:pPr>
+                <a:defRPr/>
+              </a:pPr>
+              <a:t>‹#›</a:t>
+            </a:fld>
+            <a:endParaRPr lang="en-US"/>
+          </a:p>
+        </p:txBody>
+      </p:sp>
+      <p:pic>
+        <p:nvPicPr>
+          <p:cNvPr id="8" name="Graphic 7">
+            <a:extLst>
+              <a:ext uri="{FF2B5EF4-FFF2-40B4-BE49-F238E27FC236}">
+                <a16:creationId xmlns:a16="http://schemas.microsoft.com/office/drawing/2014/main" id="{43B43F62-D041-A34A-8BBA-6307FF5E1623}"/>
+              </a:ext>
+            </a:extLst>
+          </p:cNvPr>
+          <p:cNvPicPr>
+            <a:picLocks noChangeAspect="1"/>
+          </p:cNvPicPr>
+          <p:nvPr userDrawn="1"/>
+        </p:nvPicPr>
+        <p:blipFill>
+          <a:blip r:embed="rId3" cstate="screen">
+            <a:extLst>
+              <a:ext uri="{28A0092B-C50C-407E-A947-70E740481C1C}">
+                <a14:useLocalDpi xmlns:a14="http://schemas.microsoft.com/office/drawing/2010/main"/>
+              </a:ext>
+              <a:ext uri="{96DAC541-7B7A-43D3-8B79-37D633B846F1}">
+                <asvg:svgBlip xmlns:asvg="http://schemas.microsoft.com/office/drawing/2016/SVG/main" r:embed="rId4"/>
+              </a:ext>
+            </a:extLst>
+          </a:blip>
+          <a:stretch>
+            <a:fillRect/>
+          </a:stretch>
+        </p:blipFill>
+        <p:spPr>
+          <a:xfrm>
+            <a:off x="10404534" y="6360160"/>
+            <a:ext cx="1397927" cy="268832"/>
+          </a:xfrm>
+          <a:prstGeom prst="rect">
+            <a:avLst/>
+          </a:prstGeom>
+        </p:spPr>
+      </p:pic>
+    </p:spTree>
+    <p:extLst>
+      <p:ext uri="{BB962C8B-B14F-4D97-AF65-F5344CB8AC3E}">
+        <p14:creationId xmlns:p14="http://schemas.microsoft.com/office/powerpoint/2010/main" val="1436886750"/>
+      </p:ext>
+    </p:extLst>
+  </p:cSld>
+  <p:clrMapOvr>
+    <a:masterClrMapping/>
+  </p:clrMapOvr>
+</p:sldLayout>
+</file>
+
+<file path=ppt/slideLayouts/slideLayout18.xml><?xml version="1.0" encoding="utf-8"?>
+<p:sldLayout xmlns:a="http://schemas.openxmlformats.org/drawingml/2006/main" xmlns:r="http://schemas.openxmlformats.org/officeDocument/2006/relationships" xmlns:p="http://schemas.openxmlformats.org/presentationml/2006/main" preserve="1" userDrawn="1">
+  <p:cSld name="1_Title Only-no footer">
+    <p:spTree>
+      <p:nvGrpSpPr>
+        <p:cNvPr id="1" name=""/>
+        <p:cNvGrpSpPr/>
+        <p:nvPr/>
+      </p:nvGrpSpPr>
+      <p:grpSpPr>
+        <a:xfrm>
+          <a:off x="0" y="0"/>
+          <a:ext cx="0" cy="0"/>
+          <a:chOff x="0" y="0"/>
+          <a:chExt cx="0" cy="0"/>
+        </a:xfrm>
+      </p:grpSpPr>
+      <p:pic>
+        <p:nvPicPr>
+          <p:cNvPr id="3" name="Graphic 4">
+            <a:extLst>
+              <a:ext uri="{FF2B5EF4-FFF2-40B4-BE49-F238E27FC236}">
+                <a16:creationId xmlns:a16="http://schemas.microsoft.com/office/drawing/2014/main" id="{C92F021B-3E8B-7C4F-B75C-5349E20231BE}"/>
+              </a:ext>
+            </a:extLst>
+          </p:cNvPr>
+          <p:cNvPicPr>
+            <a:picLocks noChangeAspect="1"/>
+          </p:cNvPicPr>
+          <p:nvPr/>
+        </p:nvPicPr>
+        <p:blipFill>
+          <a:blip r:embed="rId2" cstate="screen">
+            <a:extLst>
+              <a:ext uri="{28A0092B-C50C-407E-A947-70E740481C1C}">
+                <a14:useLocalDpi xmlns:a14="http://schemas.microsoft.com/office/drawing/2010/main"/>
+              </a:ext>
+            </a:extLst>
+          </a:blip>
+          <a:stretch>
+            <a:fillRect/>
+          </a:stretch>
+        </p:blipFill>
+        <p:spPr>
+          <a:xfrm>
+            <a:off x="0" y="279400"/>
+            <a:ext cx="400050" cy="865188"/>
+          </a:xfrm>
+          <a:prstGeom prst="rect">
+            <a:avLst/>
+          </a:prstGeom>
+        </p:spPr>
+      </p:pic>
+      <p:sp>
+        <p:nvSpPr>
+          <p:cNvPr id="17" name="Title 1"/>
+          <p:cNvSpPr>
+            <a:spLocks noGrp="1"/>
+          </p:cNvSpPr>
+          <p:nvPr>
+            <p:ph type="title"/>
+          </p:nvPr>
+        </p:nvSpPr>
+        <p:spPr>
+          <a:xfrm>
+            <a:off x="685801" y="238127"/>
+            <a:ext cx="11058525" cy="976313"/>
+          </a:xfrm>
+        </p:spPr>
+        <p:txBody>
+          <a:bodyPr>
+            <a:normAutofit/>
+          </a:bodyPr>
+          <a:lstStyle>
+            <a:lvl1pPr>
+              <a:defRPr sz="3600" b="1"/>
+            </a:lvl1pPr>
+          </a:lstStyle>
+          <a:p>
+            <a:r>
+              <a:rPr lang="en-US"/>
+              <a:t>Click to edit Master title style</a:t>
+            </a:r>
+          </a:p>
+        </p:txBody>
+      </p:sp>
+    </p:spTree>
+    <p:extLst>
+      <p:ext uri="{BB962C8B-B14F-4D97-AF65-F5344CB8AC3E}">
+        <p14:creationId xmlns:p14="http://schemas.microsoft.com/office/powerpoint/2010/main" val="1715932824"/>
+      </p:ext>
+    </p:extLst>
+  </p:cSld>
+  <p:clrMapOvr>
+    <a:masterClrMapping/>
+  </p:clrMapOvr>
+  <p:transition spd="slow"/>
+</p:sldLayout>
+</file>
+
+<file path=ppt/slideLayouts/slideLayout19.xml><?xml version="1.0" encoding="utf-8"?>
+<p:sldLayout xmlns:a="http://schemas.openxmlformats.org/drawingml/2006/main" xmlns:r="http://schemas.openxmlformats.org/officeDocument/2006/relationships" xmlns:p="http://schemas.openxmlformats.org/presentationml/2006/main" preserve="1" userDrawn="1">
+  <p:cSld name="Footer Only">
+    <p:spTree>
+      <p:nvGrpSpPr>
+        <p:cNvPr id="1" name=""/>
+        <p:cNvGrpSpPr/>
+        <p:nvPr/>
+      </p:nvGrpSpPr>
+      <p:grpSpPr>
+        <a:xfrm>
+          <a:off x="0" y="0"/>
+          <a:ext cx="0" cy="0"/>
+          <a:chOff x="0" y="0"/>
+          <a:chExt cx="0" cy="0"/>
+        </a:xfrm>
+      </p:grpSpPr>
+      <p:sp>
+        <p:nvSpPr>
+          <p:cNvPr id="2" name="TextBox 4">
+            <a:extLst>
+              <a:ext uri="{FF2B5EF4-FFF2-40B4-BE49-F238E27FC236}">
+                <a16:creationId xmlns:a16="http://schemas.microsoft.com/office/drawing/2014/main" id="{E4508082-3C66-DE41-824B-8C7D959EE1AE}"/>
+              </a:ext>
+            </a:extLst>
+          </p:cNvPr>
+          <p:cNvSpPr txBox="1">
+            <a:spLocks noChangeArrowheads="1"/>
+          </p:cNvSpPr>
+          <p:nvPr/>
+        </p:nvSpPr>
+        <p:spPr bwMode="auto">
+          <a:xfrm>
+            <a:off x="619126" y="6457951"/>
+            <a:ext cx="2752677" cy="200055"/>
+          </a:xfrm>
+          <a:prstGeom prst="rect">
+            <a:avLst/>
+          </a:prstGeom>
+          <a:noFill/>
+          <a:ln>
+            <a:noFill/>
+          </a:ln>
+          <a:extLst>
+            <a:ext uri="{909E8E84-426E-40DD-AFC4-6F175D3DCCD1}">
+              <a14:hiddenFill xmlns:a14="http://schemas.microsoft.com/office/drawing/2010/main">
+                <a:solidFill>
+                  <a:srgbClr val="FFFFFF"/>
+                </a:solidFill>
+              </a14:hiddenFill>
+            </a:ext>
+            <a:ext uri="{91240B29-F687-4F45-9708-019B960494DF}">
+              <a14:hiddenLine xmlns:a14="http://schemas.microsoft.com/office/drawing/2010/main" w="9525">
+                <a:solidFill>
+                  <a:srgbClr val="000000"/>
+                </a:solidFill>
+                <a:miter lim="800000"/>
+                <a:headEnd/>
+                <a:tailEnd/>
+              </a14:hiddenLine>
+            </a:ext>
+          </a:extLst>
+        </p:spPr>
+        <p:txBody>
+          <a:bodyPr wrap="none">
+            <a:spAutoFit/>
+          </a:bodyPr>
+          <a:lstStyle>
+            <a:lvl1pPr>
+              <a:defRPr>
+                <a:solidFill>
+                  <a:schemeClr val="tx1"/>
+                </a:solidFill>
+                <a:latin typeface="Arial" panose="020B0604020202020204" pitchFamily="34" charset="0"/>
+              </a:defRPr>
+            </a:lvl1pPr>
+            <a:lvl2pPr marL="742950" indent="-285750">
+              <a:defRPr>
+                <a:solidFill>
+                  <a:schemeClr val="tx1"/>
+                </a:solidFill>
+                <a:latin typeface="Arial" panose="020B0604020202020204" pitchFamily="34" charset="0"/>
+              </a:defRPr>
+            </a:lvl2pPr>
+            <a:lvl3pPr marL="1143000" indent="-228600">
+              <a:defRPr>
+                <a:solidFill>
+                  <a:schemeClr val="tx1"/>
+                </a:solidFill>
+                <a:latin typeface="Arial" panose="020B0604020202020204" pitchFamily="34" charset="0"/>
+              </a:defRPr>
+            </a:lvl3pPr>
+            <a:lvl4pPr marL="1600200" indent="-228600">
+              <a:defRPr>
+                <a:solidFill>
+                  <a:schemeClr val="tx1"/>
+                </a:solidFill>
+                <a:latin typeface="Arial" panose="020B0604020202020204" pitchFamily="34" charset="0"/>
+              </a:defRPr>
+            </a:lvl4pPr>
+            <a:lvl5pPr marL="2057400" indent="-228600">
+              <a:defRPr>
+                <a:solidFill>
+                  <a:schemeClr val="tx1"/>
+                </a:solidFill>
+                <a:latin typeface="Arial" panose="020B0604020202020204" pitchFamily="34" charset="0"/>
+              </a:defRPr>
+            </a:lvl5pPr>
+            <a:lvl6pPr marL="2514600" indent="-228600" fontAlgn="base">
+              <a:spcBef>
+                <a:spcPct val="0"/>
+              </a:spcBef>
+              <a:spcAft>
+                <a:spcPct val="0"/>
+              </a:spcAft>
+              <a:defRPr>
+                <a:solidFill>
+                  <a:schemeClr val="tx1"/>
+                </a:solidFill>
+                <a:latin typeface="Arial" panose="020B0604020202020204" pitchFamily="34" charset="0"/>
+              </a:defRPr>
+            </a:lvl6pPr>
+            <a:lvl7pPr marL="2971800" indent="-228600" fontAlgn="base">
+              <a:spcBef>
+                <a:spcPct val="0"/>
+              </a:spcBef>
+              <a:spcAft>
+                <a:spcPct val="0"/>
+              </a:spcAft>
+              <a:defRPr>
+                <a:solidFill>
+                  <a:schemeClr val="tx1"/>
+                </a:solidFill>
+                <a:latin typeface="Arial" panose="020B0604020202020204" pitchFamily="34" charset="0"/>
+              </a:defRPr>
+            </a:lvl7pPr>
+            <a:lvl8pPr marL="3429000" indent="-228600" fontAlgn="base">
+              <a:spcBef>
+                <a:spcPct val="0"/>
+              </a:spcBef>
+              <a:spcAft>
+                <a:spcPct val="0"/>
+              </a:spcAft>
+              <a:defRPr>
+                <a:solidFill>
+                  <a:schemeClr val="tx1"/>
+                </a:solidFill>
+                <a:latin typeface="Arial" panose="020B0604020202020204" pitchFamily="34" charset="0"/>
+              </a:defRPr>
+            </a:lvl8pPr>
+            <a:lvl9pPr marL="3886200" indent="-228600" fontAlgn="base">
+              <a:spcBef>
+                <a:spcPct val="0"/>
+              </a:spcBef>
+              <a:spcAft>
+                <a:spcPct val="0"/>
+              </a:spcAft>
+              <a:defRPr>
+                <a:solidFill>
+                  <a:schemeClr val="tx1"/>
+                </a:solidFill>
+                <a:latin typeface="Arial" panose="020B0604020202020204" pitchFamily="34" charset="0"/>
+              </a:defRPr>
+            </a:lvl9pPr>
+          </a:lstStyle>
+          <a:p>
+            <a:pPr eaLnBrk="1" hangingPunct="1"/>
+            <a:r>
+              <a:rPr lang="en-US" altLang="en-US" sz="700">
+                <a:solidFill>
+                  <a:srgbClr val="989998"/>
+                </a:solidFill>
+              </a:rPr>
+              <a:t>© Presidio, Inc. All rights reserved. Proprietary and Confidential. </a:t>
+            </a:r>
+          </a:p>
+        </p:txBody>
+      </p:sp>
+      <p:cxnSp>
+        <p:nvCxnSpPr>
+          <p:cNvPr id="3" name="Straight Connector 2">
+            <a:extLst>
+              <a:ext uri="{FF2B5EF4-FFF2-40B4-BE49-F238E27FC236}">
+                <a16:creationId xmlns:a16="http://schemas.microsoft.com/office/drawing/2014/main" id="{818E294F-853D-3F43-97FD-73DCB4910F35}"/>
+              </a:ext>
+            </a:extLst>
+          </p:cNvPr>
+          <p:cNvCxnSpPr>
+            <a:cxnSpLocks/>
+          </p:cNvCxnSpPr>
+          <p:nvPr/>
+        </p:nvCxnSpPr>
+        <p:spPr>
+          <a:xfrm>
+            <a:off x="723900" y="6429375"/>
+            <a:ext cx="9544050" cy="0"/>
+          </a:xfrm>
+          <a:prstGeom prst="line">
+            <a:avLst/>
+          </a:prstGeom>
+          <a:ln w="9525">
+            <a:solidFill>
+              <a:schemeClr val="bg1">
+                <a:lumMod val="75000"/>
+              </a:schemeClr>
+            </a:solidFill>
+          </a:ln>
+        </p:spPr>
+        <p:style>
+          <a:lnRef idx="1">
+            <a:schemeClr val="accent1"/>
+          </a:lnRef>
+          <a:fillRef idx="0">
+            <a:schemeClr val="accent1"/>
+          </a:fillRef>
+          <a:effectRef idx="0">
+            <a:schemeClr val="accent1"/>
+          </a:effectRef>
+          <a:fontRef idx="minor">
+            <a:schemeClr val="tx1"/>
+          </a:fontRef>
+        </p:style>
+      </p:cxnSp>
+      <p:sp>
+        <p:nvSpPr>
+          <p:cNvPr id="5" name="Slide Number Placeholder 5">
+            <a:extLst>
+              <a:ext uri="{FF2B5EF4-FFF2-40B4-BE49-F238E27FC236}">
+                <a16:creationId xmlns:a16="http://schemas.microsoft.com/office/drawing/2014/main" id="{9983A090-E8F6-644B-8CAD-AC1AE541E5E3}"/>
+              </a:ext>
+            </a:extLst>
+          </p:cNvPr>
+          <p:cNvSpPr>
+            <a:spLocks noGrp="1"/>
+          </p:cNvSpPr>
+          <p:nvPr>
+            <p:ph type="sldNum" sz="quarter" idx="10"/>
+          </p:nvPr>
+        </p:nvSpPr>
+        <p:spPr>
+          <a:xfrm>
+            <a:off x="1" y="6337302"/>
+            <a:ext cx="685800" cy="365125"/>
+          </a:xfrm>
+        </p:spPr>
+        <p:txBody>
+          <a:bodyPr/>
+          <a:lstStyle>
+            <a:lvl1pPr algn="r">
+              <a:defRPr sz="1600" smtClean="0">
+                <a:solidFill>
+                  <a:srgbClr val="333333"/>
+                </a:solidFill>
+              </a:defRPr>
+            </a:lvl1pPr>
+          </a:lstStyle>
+          <a:p>
+            <a:pPr>
+              <a:defRPr/>
+            </a:pPr>
+            <a:fld id="{69BFB6C7-4CFE-684D-9F0F-089FE7A8AE8E}" type="slidenum">
+              <a:rPr lang="en-US"/>
+              <a:pPr>
+                <a:defRPr/>
+              </a:pPr>
+              <a:t>‹#›</a:t>
+            </a:fld>
+            <a:endParaRPr lang="en-US"/>
+          </a:p>
+        </p:txBody>
+      </p:sp>
+      <p:pic>
+        <p:nvPicPr>
+          <p:cNvPr id="6" name="Graphic 5">
+            <a:extLst>
+              <a:ext uri="{FF2B5EF4-FFF2-40B4-BE49-F238E27FC236}">
+                <a16:creationId xmlns:a16="http://schemas.microsoft.com/office/drawing/2014/main" id="{28D010D6-C6F8-F141-A1B1-181F06E83DFC}"/>
+              </a:ext>
+            </a:extLst>
+          </p:cNvPr>
+          <p:cNvPicPr>
+            <a:picLocks noChangeAspect="1"/>
+          </p:cNvPicPr>
+          <p:nvPr userDrawn="1"/>
+        </p:nvPicPr>
+        <p:blipFill>
+          <a:blip r:embed="rId2" cstate="screen">
+            <a:extLst>
+              <a:ext uri="{28A0092B-C50C-407E-A947-70E740481C1C}">
+                <a14:useLocalDpi xmlns:a14="http://schemas.microsoft.com/office/drawing/2010/main"/>
+              </a:ext>
+              <a:ext uri="{96DAC541-7B7A-43D3-8B79-37D633B846F1}">
+                <asvg:svgBlip xmlns:asvg="http://schemas.microsoft.com/office/drawing/2016/SVG/main" r:embed="rId3"/>
+              </a:ext>
+            </a:extLst>
+          </a:blip>
+          <a:stretch>
+            <a:fillRect/>
+          </a:stretch>
+        </p:blipFill>
+        <p:spPr>
+          <a:xfrm>
+            <a:off x="10404534" y="6360160"/>
+            <a:ext cx="1397927" cy="268832"/>
+          </a:xfrm>
+          <a:prstGeom prst="rect">
+            <a:avLst/>
+          </a:prstGeom>
+        </p:spPr>
+      </p:pic>
+    </p:spTree>
+    <p:extLst>
+      <p:ext uri="{BB962C8B-B14F-4D97-AF65-F5344CB8AC3E}">
+        <p14:creationId xmlns:p14="http://schemas.microsoft.com/office/powerpoint/2010/main" val="4148104692"/>
+      </p:ext>
+    </p:extLst>
+  </p:cSld>
+  <p:clrMapOvr>
+    <a:masterClrMapping/>
+  </p:clrMapOvr>
+</p:sldLayout>
+</file>
+
 <file path=ppt/slideLayouts/slideLayout2.xml><?xml version="1.0" encoding="utf-8"?>
 <p:sldLayout xmlns:a="http://schemas.openxmlformats.org/drawingml/2006/main" xmlns:r="http://schemas.openxmlformats.org/officeDocument/2006/relationships" xmlns:p="http://schemas.openxmlformats.org/presentationml/2006/main" type="obj" preserve="1">
   <p:cSld name="Title and Content">
@@ -931,6 +3985,271 @@
     <p:extLst>
       <p:ext uri="{BB962C8B-B14F-4D97-AF65-F5344CB8AC3E}">
         <p14:creationId xmlns:p14="http://schemas.microsoft.com/office/powerpoint/2010/main" val="238392230"/>
+      </p:ext>
+    </p:extLst>
+  </p:cSld>
+  <p:clrMapOvr>
+    <a:masterClrMapping/>
+  </p:clrMapOvr>
+</p:sldLayout>
+</file>
+
+<file path=ppt/slideLayouts/slideLayout20.xml><?xml version="1.0" encoding="utf-8"?>
+<p:sldLayout xmlns:a="http://schemas.openxmlformats.org/drawingml/2006/main" xmlns:r="http://schemas.openxmlformats.org/officeDocument/2006/relationships" xmlns:p="http://schemas.openxmlformats.org/presentationml/2006/main" preserve="1" userDrawn="1">
+  <p:cSld name="Blank">
+    <p:spTree>
+      <p:nvGrpSpPr>
+        <p:cNvPr id="1" name=""/>
+        <p:cNvGrpSpPr/>
+        <p:nvPr/>
+      </p:nvGrpSpPr>
+      <p:grpSpPr>
+        <a:xfrm>
+          <a:off x="0" y="0"/>
+          <a:ext cx="0" cy="0"/>
+          <a:chOff x="0" y="0"/>
+          <a:chExt cx="0" cy="0"/>
+        </a:xfrm>
+      </p:grpSpPr>
+    </p:spTree>
+    <p:extLst>
+      <p:ext uri="{BB962C8B-B14F-4D97-AF65-F5344CB8AC3E}">
+        <p14:creationId xmlns:p14="http://schemas.microsoft.com/office/powerpoint/2010/main" val="1860816815"/>
+      </p:ext>
+    </p:extLst>
+  </p:cSld>
+  <p:clrMapOvr>
+    <a:masterClrMapping/>
+  </p:clrMapOvr>
+</p:sldLayout>
+</file>
+
+<file path=ppt/slideLayouts/slideLayout21.xml><?xml version="1.0" encoding="utf-8"?>
+<p:sldLayout xmlns:a="http://schemas.openxmlformats.org/drawingml/2006/main" xmlns:r="http://schemas.openxmlformats.org/officeDocument/2006/relationships" xmlns:p="http://schemas.openxmlformats.org/presentationml/2006/main" preserve="1" userDrawn="1">
+  <p:cSld name="Section Slide">
+    <p:bg>
+      <p:bgPr>
+        <a:blipFill dpi="0" rotWithShape="0">
+          <a:blip r:embed="rId2" cstate="screen">
+            <a:extLst>
+              <a:ext uri="{28A0092B-C50C-407E-A947-70E740481C1C}">
+                <a14:useLocalDpi xmlns:a14="http://schemas.microsoft.com/office/drawing/2010/main"/>
+              </a:ext>
+            </a:extLst>
+          </a:blip>
+          <a:srcRect/>
+          <a:stretch>
+            <a:fillRect/>
+          </a:stretch>
+        </a:blipFill>
+        <a:effectLst/>
+      </p:bgPr>
+    </p:bg>
+    <p:spTree>
+      <p:nvGrpSpPr>
+        <p:cNvPr id="1" name=""/>
+        <p:cNvGrpSpPr/>
+        <p:nvPr/>
+      </p:nvGrpSpPr>
+      <p:grpSpPr>
+        <a:xfrm>
+          <a:off x="0" y="0"/>
+          <a:ext cx="0" cy="0"/>
+          <a:chOff x="0" y="0"/>
+          <a:chExt cx="0" cy="0"/>
+        </a:xfrm>
+      </p:grpSpPr>
+      <p:sp>
+        <p:nvSpPr>
+          <p:cNvPr id="4" name="Rectangle 3">
+            <a:extLst>
+              <a:ext uri="{FF2B5EF4-FFF2-40B4-BE49-F238E27FC236}">
+                <a16:creationId xmlns:a16="http://schemas.microsoft.com/office/drawing/2014/main" id="{69401AD8-5990-D04D-B5D4-8857BA954750}"/>
+              </a:ext>
+            </a:extLst>
+          </p:cNvPr>
+          <p:cNvSpPr/>
+          <p:nvPr/>
+        </p:nvSpPr>
+        <p:spPr>
+          <a:xfrm>
+            <a:off x="896938" y="1662115"/>
+            <a:ext cx="561975" cy="66675"/>
+          </a:xfrm>
+          <a:prstGeom prst="rect">
+            <a:avLst/>
+          </a:prstGeom>
+          <a:solidFill>
+            <a:schemeClr val="accent2"/>
+          </a:solidFill>
+          <a:ln>
+            <a:noFill/>
+          </a:ln>
+        </p:spPr>
+        <p:style>
+          <a:lnRef idx="2">
+            <a:schemeClr val="accent1">
+              <a:shade val="50000"/>
+            </a:schemeClr>
+          </a:lnRef>
+          <a:fillRef idx="1">
+            <a:schemeClr val="accent1"/>
+          </a:fillRef>
+          <a:effectRef idx="0">
+            <a:schemeClr val="accent1"/>
+          </a:effectRef>
+          <a:fontRef idx="minor">
+            <a:schemeClr val="lt1"/>
+          </a:fontRef>
+        </p:style>
+        <p:txBody>
+          <a:bodyPr anchor="ctr"/>
+          <a:lstStyle/>
+          <a:p>
+            <a:pPr algn="ctr" eaLnBrk="1" fontAlgn="auto" hangingPunct="1">
+              <a:spcBef>
+                <a:spcPts val="0"/>
+              </a:spcBef>
+              <a:spcAft>
+                <a:spcPts val="0"/>
+              </a:spcAft>
+              <a:defRPr/>
+            </a:pPr>
+            <a:endParaRPr lang="en-US" sz="1738"/>
+          </a:p>
+        </p:txBody>
+      </p:sp>
+      <p:sp>
+        <p:nvSpPr>
+          <p:cNvPr id="17" name="Title 1"/>
+          <p:cNvSpPr>
+            <a:spLocks noGrp="1"/>
+          </p:cNvSpPr>
+          <p:nvPr>
+            <p:ph type="title"/>
+          </p:nvPr>
+        </p:nvSpPr>
+        <p:spPr>
+          <a:xfrm>
+            <a:off x="757720" y="2212262"/>
+            <a:ext cx="5913669" cy="2495550"/>
+          </a:xfrm>
+        </p:spPr>
+        <p:txBody>
+          <a:bodyPr>
+            <a:normAutofit/>
+          </a:bodyPr>
+          <a:lstStyle>
+            <a:lvl1pPr algn="l">
+              <a:defRPr sz="4800" b="1">
+                <a:solidFill>
+                  <a:schemeClr val="bg1"/>
+                </a:solidFill>
+              </a:defRPr>
+            </a:lvl1pPr>
+          </a:lstStyle>
+          <a:p>
+            <a:r>
+              <a:rPr lang="en-US"/>
+              <a:t>Click to edit Master title style</a:t>
+            </a:r>
+          </a:p>
+        </p:txBody>
+      </p:sp>
+      <p:sp>
+        <p:nvSpPr>
+          <p:cNvPr id="3" name="Picture Placeholder 2"/>
+          <p:cNvSpPr>
+            <a:spLocks noGrp="1"/>
+          </p:cNvSpPr>
+          <p:nvPr>
+            <p:ph type="pic" sz="quarter" idx="10"/>
+          </p:nvPr>
+        </p:nvSpPr>
+        <p:spPr>
+          <a:xfrm>
+            <a:off x="8465905" y="2373817"/>
+            <a:ext cx="2117974" cy="2115990"/>
+          </a:xfrm>
+          <a:prstGeom prst="ellipse">
+            <a:avLst/>
+          </a:prstGeom>
+        </p:spPr>
+        <p:txBody>
+          <a:bodyPr rtlCol="0" anchor="ctr">
+            <a:normAutofit/>
+          </a:bodyPr>
+          <a:lstStyle>
+            <a:lvl1pPr marL="0" indent="0" algn="ctr">
+              <a:buNone/>
+              <a:defRPr sz="1200">
+                <a:solidFill>
+                  <a:schemeClr val="bg1"/>
+                </a:solidFill>
+              </a:defRPr>
+            </a:lvl1pPr>
+          </a:lstStyle>
+          <a:p>
+            <a:pPr lvl="0"/>
+            <a:r>
+              <a:rPr lang="en-US" noProof="0"/>
+              <a:t>Click icon to add picture</a:t>
+            </a:r>
+          </a:p>
+        </p:txBody>
+      </p:sp>
+    </p:spTree>
+    <p:extLst>
+      <p:ext uri="{BB962C8B-B14F-4D97-AF65-F5344CB8AC3E}">
+        <p14:creationId xmlns:p14="http://schemas.microsoft.com/office/powerpoint/2010/main" val="2210017067"/>
+      </p:ext>
+    </p:extLst>
+  </p:cSld>
+  <p:clrMapOvr>
+    <a:masterClrMapping/>
+  </p:clrMapOvr>
+</p:sldLayout>
+</file>
+
+<file path=ppt/slideLayouts/slideLayout22.xml><?xml version="1.0" encoding="utf-8"?>
+<p:sldLayout xmlns:a="http://schemas.openxmlformats.org/drawingml/2006/main" xmlns:r="http://schemas.openxmlformats.org/officeDocument/2006/relationships" xmlns:p="http://schemas.openxmlformats.org/presentationml/2006/main" preserve="1" userDrawn="1">
+  <p:cSld name="Title Slide 3 City End">
+    <p:bg>
+      <p:bgPr>
+        <a:blipFill dpi="0" rotWithShape="0">
+          <a:blip r:embed="rId2" cstate="screen">
+            <a:extLst>
+              <a:ext uri="{28A0092B-C50C-407E-A947-70E740481C1C}">
+                <a14:useLocalDpi xmlns:a14="http://schemas.microsoft.com/office/drawing/2010/main"/>
+              </a:ext>
+            </a:extLst>
+          </a:blip>
+          <a:srcRect/>
+          <a:stretch>
+            <a:fillRect/>
+          </a:stretch>
+        </a:blipFill>
+        <a:effectLst/>
+      </p:bgPr>
+    </p:bg>
+    <p:spTree>
+      <p:nvGrpSpPr>
+        <p:cNvPr id="1" name=""/>
+        <p:cNvGrpSpPr/>
+        <p:nvPr/>
+      </p:nvGrpSpPr>
+      <p:grpSpPr>
+        <a:xfrm>
+          <a:off x="0" y="0"/>
+          <a:ext cx="0" cy="0"/>
+          <a:chOff x="0" y="0"/>
+          <a:chExt cx="0" cy="0"/>
+        </a:xfrm>
+      </p:grpSpPr>
+    </p:spTree>
+    <p:extLst>
+      <p:ext uri="{BB962C8B-B14F-4D97-AF65-F5344CB8AC3E}">
+        <p14:creationId xmlns:p14="http://schemas.microsoft.com/office/powerpoint/2010/main" val="1213977536"/>
       </p:ext>
     </p:extLst>
   </p:cSld>
@@ -3326,9 +6645,17 @@
 </p:sldMaster>
 </file>
 
-<file path=ppt/slides/slide1.xml><?xml version="1.0" encoding="utf-8"?>
-<p:sld xmlns:a="http://schemas.openxmlformats.org/drawingml/2006/main" xmlns:r="http://schemas.openxmlformats.org/officeDocument/2006/relationships" xmlns:p="http://schemas.openxmlformats.org/presentationml/2006/main">
+<file path=ppt/slideMasters/slideMaster2.xml><?xml version="1.0" encoding="utf-8"?>
+<p:sldMaster xmlns:a="http://schemas.openxmlformats.org/drawingml/2006/main" xmlns:r="http://schemas.openxmlformats.org/officeDocument/2006/relationships" xmlns:p="http://schemas.openxmlformats.org/presentationml/2006/main">
   <p:cSld>
+    <p:bg>
+      <p:bgPr>
+        <a:solidFill>
+          <a:schemeClr val="bg1"/>
+        </a:solidFill>
+        <a:effectLst/>
+      </p:bgPr>
+    </p:bg>
     <p:spTree>
       <p:nvGrpSpPr>
         <p:cNvPr id="1" name=""/>
@@ -3345,10 +6672,166 @@
       </p:grpSpPr>
       <p:sp>
         <p:nvSpPr>
-          <p:cNvPr id="2" name="Title 1">
-            <a:extLst>
-              <a:ext uri="{FF2B5EF4-FFF2-40B4-BE49-F238E27FC236}">
-                <a16:creationId xmlns:a16="http://schemas.microsoft.com/office/drawing/2014/main" id="{0B851A5C-8049-D6B7-A9ED-146CB656D241}"/>
+          <p:cNvPr id="1026" name="Title Placeholder 1">
+            <a:extLst>
+              <a:ext uri="{FF2B5EF4-FFF2-40B4-BE49-F238E27FC236}">
+                <a16:creationId xmlns:a16="http://schemas.microsoft.com/office/drawing/2014/main" id="{6D57D823-8F3B-8244-A2A2-F82A32281C29}"/>
+              </a:ext>
+            </a:extLst>
+          </p:cNvPr>
+          <p:cNvSpPr>
+            <a:spLocks noGrp="1" noChangeArrowheads="1"/>
+          </p:cNvSpPr>
+          <p:nvPr>
+            <p:ph type="title"/>
+          </p:nvPr>
+        </p:nvSpPr>
+        <p:spPr bwMode="auto">
+          <a:xfrm>
+            <a:off x="838200" y="365127"/>
+            <a:ext cx="10515600" cy="1325563"/>
+          </a:xfrm>
+          <a:prstGeom prst="rect">
+            <a:avLst/>
+          </a:prstGeom>
+          <a:noFill/>
+          <a:ln>
+            <a:noFill/>
+          </a:ln>
+          <a:extLst>
+            <a:ext uri="{909E8E84-426E-40DD-AFC4-6F175D3DCCD1}">
+              <a14:hiddenFill xmlns:a14="http://schemas.microsoft.com/office/drawing/2010/main">
+                <a:solidFill>
+                  <a:srgbClr val="FFFFFF"/>
+                </a:solidFill>
+              </a14:hiddenFill>
+            </a:ext>
+            <a:ext uri="{91240B29-F687-4F45-9708-019B960494DF}">
+              <a14:hiddenLine xmlns:a14="http://schemas.microsoft.com/office/drawing/2010/main" w="9525">
+                <a:solidFill>
+                  <a:srgbClr val="000000"/>
+                </a:solidFill>
+                <a:miter lim="800000"/>
+                <a:headEnd/>
+                <a:tailEnd/>
+              </a14:hiddenLine>
+            </a:ext>
+          </a:extLst>
+        </p:spPr>
+        <p:txBody>
+          <a:bodyPr vert="horz" wrap="square" lIns="91440" tIns="45720" rIns="91440" bIns="45720" numCol="1" anchor="ctr" anchorCtr="0" compatLnSpc="1">
+            <a:prstTxWarp prst="textNoShape">
+              <a:avLst/>
+            </a:prstTxWarp>
+          </a:bodyPr>
+          <a:lstStyle/>
+          <a:p>
+            <a:pPr lvl="0"/>
+            <a:r>
+              <a:rPr lang="en-US" altLang="en-US"/>
+              <a:t>Click to edit Master title style</a:t>
+            </a:r>
+          </a:p>
+        </p:txBody>
+      </p:sp>
+      <p:sp>
+        <p:nvSpPr>
+          <p:cNvPr id="1027" name="Text Placeholder 2">
+            <a:extLst>
+              <a:ext uri="{FF2B5EF4-FFF2-40B4-BE49-F238E27FC236}">
+                <a16:creationId xmlns:a16="http://schemas.microsoft.com/office/drawing/2014/main" id="{3EA322BF-5589-0A40-981A-CA01D0A8B6C3}"/>
+              </a:ext>
+            </a:extLst>
+          </p:cNvPr>
+          <p:cNvSpPr>
+            <a:spLocks noGrp="1" noChangeArrowheads="1"/>
+          </p:cNvSpPr>
+          <p:nvPr>
+            <p:ph type="body" idx="1"/>
+          </p:nvPr>
+        </p:nvSpPr>
+        <p:spPr bwMode="auto">
+          <a:xfrm>
+            <a:off x="838200" y="1825625"/>
+            <a:ext cx="10515600" cy="4351338"/>
+          </a:xfrm>
+          <a:prstGeom prst="rect">
+            <a:avLst/>
+          </a:prstGeom>
+          <a:noFill/>
+          <a:ln>
+            <a:noFill/>
+          </a:ln>
+          <a:extLst>
+            <a:ext uri="{909E8E84-426E-40DD-AFC4-6F175D3DCCD1}">
+              <a14:hiddenFill xmlns:a14="http://schemas.microsoft.com/office/drawing/2010/main">
+                <a:solidFill>
+                  <a:srgbClr val="FFFFFF"/>
+                </a:solidFill>
+              </a14:hiddenFill>
+            </a:ext>
+            <a:ext uri="{91240B29-F687-4F45-9708-019B960494DF}">
+              <a14:hiddenLine xmlns:a14="http://schemas.microsoft.com/office/drawing/2010/main" w="9525">
+                <a:solidFill>
+                  <a:srgbClr val="000000"/>
+                </a:solidFill>
+                <a:miter lim="800000"/>
+                <a:headEnd/>
+                <a:tailEnd/>
+              </a14:hiddenLine>
+            </a:ext>
+          </a:extLst>
+        </p:spPr>
+        <p:txBody>
+          <a:bodyPr vert="horz" wrap="square" lIns="91440" tIns="45720" rIns="91440" bIns="45720" numCol="1" anchor="t" anchorCtr="0" compatLnSpc="1">
+            <a:prstTxWarp prst="textNoShape">
+              <a:avLst/>
+            </a:prstTxWarp>
+          </a:bodyPr>
+          <a:lstStyle/>
+          <a:p>
+            <a:pPr lvl="0"/>
+            <a:r>
+              <a:rPr lang="en-US" altLang="en-US"/>
+              <a:t>Click to edit Master text styles</a:t>
+            </a:r>
+          </a:p>
+          <a:p>
+            <a:pPr lvl="1"/>
+            <a:r>
+              <a:rPr lang="en-US" altLang="en-US"/>
+              <a:t>Second level</a:t>
+            </a:r>
+          </a:p>
+          <a:p>
+            <a:pPr lvl="2"/>
+            <a:r>
+              <a:rPr lang="en-US" altLang="en-US"/>
+              <a:t>Third level</a:t>
+            </a:r>
+          </a:p>
+          <a:p>
+            <a:pPr lvl="3"/>
+            <a:r>
+              <a:rPr lang="en-US" altLang="en-US"/>
+              <a:t>Fourth level</a:t>
+            </a:r>
+          </a:p>
+          <a:p>
+            <a:pPr lvl="4"/>
+            <a:r>
+              <a:rPr lang="en-US" altLang="en-US"/>
+              <a:t>Fifth level</a:t>
+            </a:r>
+          </a:p>
+        </p:txBody>
+      </p:sp>
+      <p:sp>
+        <p:nvSpPr>
+          <p:cNvPr id="6" name="Slide Number Placeholder 5">
+            <a:extLst>
+              <a:ext uri="{FF2B5EF4-FFF2-40B4-BE49-F238E27FC236}">
+                <a16:creationId xmlns:a16="http://schemas.microsoft.com/office/drawing/2014/main" id="{5EB2FFEC-18CB-E645-960D-8EDDDC51683C}"/>
               </a:ext>
             </a:extLst>
           </p:cNvPr>
@@ -3356,63 +6839,1311 @@
             <a:spLocks noGrp="1"/>
           </p:cNvSpPr>
           <p:nvPr>
-            <p:ph type="ctrTitle"/>
+            <p:ph type="sldNum" sz="quarter" idx="4"/>
           </p:nvPr>
         </p:nvSpPr>
         <p:spPr>
           <a:xfrm>
-            <a:off x="609600" y="161664"/>
-            <a:ext cx="10363200" cy="1065252"/>
+            <a:off x="8610601" y="6356352"/>
+            <a:ext cx="2743200" cy="365125"/>
+          </a:xfrm>
+          <a:prstGeom prst="rect">
+            <a:avLst/>
+          </a:prstGeom>
+        </p:spPr>
+        <p:txBody>
+          <a:bodyPr vert="horz" lIns="91440" tIns="45720" rIns="91440" bIns="45720" rtlCol="0" anchor="ctr"/>
+          <a:lstStyle>
+            <a:lvl1pPr algn="r" eaLnBrk="1" fontAlgn="auto" hangingPunct="1">
+              <a:spcBef>
+                <a:spcPts val="0"/>
+              </a:spcBef>
+              <a:spcAft>
+                <a:spcPts val="0"/>
+              </a:spcAft>
+              <a:defRPr sz="1200" smtClean="0">
+                <a:solidFill>
+                  <a:srgbClr val="333333"/>
+                </a:solidFill>
+                <a:latin typeface="+mn-lt"/>
+              </a:defRPr>
+            </a:lvl1pPr>
+          </a:lstStyle>
+          <a:p>
+            <a:pPr>
+              <a:defRPr/>
+            </a:pPr>
+            <a:fld id="{A8C65966-93CC-F24E-90A5-02507490DB4E}" type="slidenum">
+              <a:rPr lang="en-US"/>
+              <a:pPr>
+                <a:defRPr/>
+              </a:pPr>
+              <a:t>‹#›</a:t>
+            </a:fld>
+            <a:endParaRPr lang="en-US"/>
+          </a:p>
+        </p:txBody>
+      </p:sp>
+    </p:spTree>
+    <p:extLst>
+      <p:ext uri="{BB962C8B-B14F-4D97-AF65-F5344CB8AC3E}">
+        <p14:creationId xmlns:p14="http://schemas.microsoft.com/office/powerpoint/2010/main" val="1549077326"/>
+      </p:ext>
+    </p:extLst>
+  </p:cSld>
+  <p:clrMap bg1="lt1" tx1="dk1" bg2="lt2" tx2="dk2" accent1="accent1" accent2="accent2" accent3="accent3" accent4="accent4" accent5="accent5" accent6="accent6" hlink="hlink" folHlink="folHlink"/>
+  <p:sldLayoutIdLst>
+    <p:sldLayoutId id="2147483661" r:id="rId1"/>
+    <p:sldLayoutId id="2147483662" r:id="rId2"/>
+    <p:sldLayoutId id="2147483663" r:id="rId3"/>
+    <p:sldLayoutId id="2147483664" r:id="rId4"/>
+    <p:sldLayoutId id="2147483665" r:id="rId5"/>
+    <p:sldLayoutId id="2147483666" r:id="rId6"/>
+    <p:sldLayoutId id="2147483667" r:id="rId7"/>
+    <p:sldLayoutId id="2147483668" r:id="rId8"/>
+    <p:sldLayoutId id="2147483669" r:id="rId9"/>
+    <p:sldLayoutId id="2147483670" r:id="rId10"/>
+    <p:sldLayoutId id="2147483671" r:id="rId11"/>
+  </p:sldLayoutIdLst>
+  <p:hf hdr="0" dt="0"/>
+  <p:txStyles>
+    <p:titleStyle>
+      <a:lvl1pPr algn="l" rtl="0" eaLnBrk="1" fontAlgn="base" hangingPunct="1">
+        <a:lnSpc>
+          <a:spcPct val="90000"/>
+        </a:lnSpc>
+        <a:spcBef>
+          <a:spcPct val="0"/>
+        </a:spcBef>
+        <a:spcAft>
+          <a:spcPct val="0"/>
+        </a:spcAft>
+        <a:defRPr sz="4400" kern="1200">
+          <a:solidFill>
+            <a:srgbClr val="333333"/>
+          </a:solidFill>
+          <a:latin typeface="+mj-lt"/>
+          <a:ea typeface="+mj-ea"/>
+          <a:cs typeface="+mj-cs"/>
+        </a:defRPr>
+      </a:lvl1pPr>
+      <a:lvl2pPr algn="l" rtl="0" eaLnBrk="1" fontAlgn="base" hangingPunct="1">
+        <a:lnSpc>
+          <a:spcPct val="90000"/>
+        </a:lnSpc>
+        <a:spcBef>
+          <a:spcPct val="0"/>
+        </a:spcBef>
+        <a:spcAft>
+          <a:spcPct val="0"/>
+        </a:spcAft>
+        <a:defRPr sz="4400">
+          <a:solidFill>
+            <a:srgbClr val="333333"/>
+          </a:solidFill>
+          <a:latin typeface="Arial" panose="020B0604020202020204" pitchFamily="34" charset="0"/>
+        </a:defRPr>
+      </a:lvl2pPr>
+      <a:lvl3pPr algn="l" rtl="0" eaLnBrk="1" fontAlgn="base" hangingPunct="1">
+        <a:lnSpc>
+          <a:spcPct val="90000"/>
+        </a:lnSpc>
+        <a:spcBef>
+          <a:spcPct val="0"/>
+        </a:spcBef>
+        <a:spcAft>
+          <a:spcPct val="0"/>
+        </a:spcAft>
+        <a:defRPr sz="4400">
+          <a:solidFill>
+            <a:srgbClr val="333333"/>
+          </a:solidFill>
+          <a:latin typeface="Arial" panose="020B0604020202020204" pitchFamily="34" charset="0"/>
+        </a:defRPr>
+      </a:lvl3pPr>
+      <a:lvl4pPr algn="l" rtl="0" eaLnBrk="1" fontAlgn="base" hangingPunct="1">
+        <a:lnSpc>
+          <a:spcPct val="90000"/>
+        </a:lnSpc>
+        <a:spcBef>
+          <a:spcPct val="0"/>
+        </a:spcBef>
+        <a:spcAft>
+          <a:spcPct val="0"/>
+        </a:spcAft>
+        <a:defRPr sz="4400">
+          <a:solidFill>
+            <a:srgbClr val="333333"/>
+          </a:solidFill>
+          <a:latin typeface="Arial" panose="020B0604020202020204" pitchFamily="34" charset="0"/>
+        </a:defRPr>
+      </a:lvl4pPr>
+      <a:lvl5pPr algn="l" rtl="0" eaLnBrk="1" fontAlgn="base" hangingPunct="1">
+        <a:lnSpc>
+          <a:spcPct val="90000"/>
+        </a:lnSpc>
+        <a:spcBef>
+          <a:spcPct val="0"/>
+        </a:spcBef>
+        <a:spcAft>
+          <a:spcPct val="0"/>
+        </a:spcAft>
+        <a:defRPr sz="4400">
+          <a:solidFill>
+            <a:srgbClr val="333333"/>
+          </a:solidFill>
+          <a:latin typeface="Arial" panose="020B0604020202020204" pitchFamily="34" charset="0"/>
+        </a:defRPr>
+      </a:lvl5pPr>
+      <a:lvl6pPr marL="457195" algn="l" rtl="0" eaLnBrk="1" fontAlgn="base" hangingPunct="1">
+        <a:lnSpc>
+          <a:spcPct val="90000"/>
+        </a:lnSpc>
+        <a:spcBef>
+          <a:spcPct val="0"/>
+        </a:spcBef>
+        <a:spcAft>
+          <a:spcPct val="0"/>
+        </a:spcAft>
+        <a:defRPr sz="4400">
+          <a:solidFill>
+            <a:srgbClr val="333333"/>
+          </a:solidFill>
+          <a:latin typeface="Arial" panose="020B0604020202020204" pitchFamily="34" charset="0"/>
+        </a:defRPr>
+      </a:lvl6pPr>
+      <a:lvl7pPr marL="914390" algn="l" rtl="0" eaLnBrk="1" fontAlgn="base" hangingPunct="1">
+        <a:lnSpc>
+          <a:spcPct val="90000"/>
+        </a:lnSpc>
+        <a:spcBef>
+          <a:spcPct val="0"/>
+        </a:spcBef>
+        <a:spcAft>
+          <a:spcPct val="0"/>
+        </a:spcAft>
+        <a:defRPr sz="4400">
+          <a:solidFill>
+            <a:srgbClr val="333333"/>
+          </a:solidFill>
+          <a:latin typeface="Arial" panose="020B0604020202020204" pitchFamily="34" charset="0"/>
+        </a:defRPr>
+      </a:lvl7pPr>
+      <a:lvl8pPr marL="1371586" algn="l" rtl="0" eaLnBrk="1" fontAlgn="base" hangingPunct="1">
+        <a:lnSpc>
+          <a:spcPct val="90000"/>
+        </a:lnSpc>
+        <a:spcBef>
+          <a:spcPct val="0"/>
+        </a:spcBef>
+        <a:spcAft>
+          <a:spcPct val="0"/>
+        </a:spcAft>
+        <a:defRPr sz="4400">
+          <a:solidFill>
+            <a:srgbClr val="333333"/>
+          </a:solidFill>
+          <a:latin typeface="Arial" panose="020B0604020202020204" pitchFamily="34" charset="0"/>
+        </a:defRPr>
+      </a:lvl8pPr>
+      <a:lvl9pPr marL="1828781" algn="l" rtl="0" eaLnBrk="1" fontAlgn="base" hangingPunct="1">
+        <a:lnSpc>
+          <a:spcPct val="90000"/>
+        </a:lnSpc>
+        <a:spcBef>
+          <a:spcPct val="0"/>
+        </a:spcBef>
+        <a:spcAft>
+          <a:spcPct val="0"/>
+        </a:spcAft>
+        <a:defRPr sz="4400">
+          <a:solidFill>
+            <a:srgbClr val="333333"/>
+          </a:solidFill>
+          <a:latin typeface="Arial" panose="020B0604020202020204" pitchFamily="34" charset="0"/>
+        </a:defRPr>
+      </a:lvl9pPr>
+    </p:titleStyle>
+    <p:bodyStyle>
+      <a:lvl1pPr marL="228597" indent="-228597" algn="l" rtl="0" eaLnBrk="1" fontAlgn="base" hangingPunct="1">
+        <a:lnSpc>
+          <a:spcPct val="90000"/>
+        </a:lnSpc>
+        <a:spcBef>
+          <a:spcPts val="1000"/>
+        </a:spcBef>
+        <a:spcAft>
+          <a:spcPct val="0"/>
+        </a:spcAft>
+        <a:buClr>
+          <a:schemeClr val="tx2"/>
+        </a:buClr>
+        <a:buFont typeface="Arial" panose="020B0604020202020204" pitchFamily="34" charset="0"/>
+        <a:buChar char="•"/>
+        <a:defRPr sz="2800" kern="1200">
+          <a:solidFill>
+            <a:srgbClr val="333333"/>
+          </a:solidFill>
+          <a:latin typeface="+mn-lt"/>
+          <a:ea typeface="+mn-ea"/>
+          <a:cs typeface="+mn-cs"/>
+        </a:defRPr>
+      </a:lvl1pPr>
+      <a:lvl2pPr marL="634993" indent="-228597" algn="l" rtl="0" eaLnBrk="1" fontAlgn="base" hangingPunct="1">
+        <a:lnSpc>
+          <a:spcPct val="90000"/>
+        </a:lnSpc>
+        <a:spcBef>
+          <a:spcPts val="500"/>
+        </a:spcBef>
+        <a:spcAft>
+          <a:spcPct val="0"/>
+        </a:spcAft>
+        <a:buClr>
+          <a:srgbClr val="616062"/>
+        </a:buClr>
+        <a:buFont typeface="Arial" panose="020B0604020202020204" pitchFamily="34" charset="0"/>
+        <a:buChar char="•"/>
+        <a:defRPr sz="2400" kern="1200">
+          <a:solidFill>
+            <a:srgbClr val="616062"/>
+          </a:solidFill>
+          <a:latin typeface="+mn-lt"/>
+          <a:ea typeface="+mn-ea"/>
+          <a:cs typeface="+mn-cs"/>
+        </a:defRPr>
+      </a:lvl2pPr>
+      <a:lvl3pPr marL="804854" indent="-169861" algn="l" rtl="0" eaLnBrk="1" fontAlgn="base" hangingPunct="1">
+        <a:lnSpc>
+          <a:spcPct val="90000"/>
+        </a:lnSpc>
+        <a:spcBef>
+          <a:spcPts val="500"/>
+        </a:spcBef>
+        <a:spcAft>
+          <a:spcPct val="0"/>
+        </a:spcAft>
+        <a:buFont typeface="Arial" panose="020B0604020202020204" pitchFamily="34" charset="0"/>
+        <a:buChar char="•"/>
+        <a:defRPr sz="2000" kern="1200">
+          <a:solidFill>
+            <a:srgbClr val="616062"/>
+          </a:solidFill>
+          <a:latin typeface="+mn-lt"/>
+          <a:ea typeface="+mn-ea"/>
+          <a:cs typeface="+mn-cs"/>
+        </a:defRPr>
+      </a:lvl3pPr>
+      <a:lvl4pPr marL="1146163" indent="-284160" algn="l" rtl="0" eaLnBrk="1" fontAlgn="base" hangingPunct="1">
+        <a:lnSpc>
+          <a:spcPct val="90000"/>
+        </a:lnSpc>
+        <a:spcBef>
+          <a:spcPts val="500"/>
+        </a:spcBef>
+        <a:spcAft>
+          <a:spcPct val="0"/>
+        </a:spcAft>
+        <a:buFont typeface="Arial" panose="020B0604020202020204" pitchFamily="34" charset="0"/>
+        <a:buChar char="•"/>
+        <a:defRPr kern="1200">
+          <a:solidFill>
+            <a:srgbClr val="616062"/>
+          </a:solidFill>
+          <a:latin typeface="+mn-lt"/>
+          <a:ea typeface="+mn-ea"/>
+          <a:cs typeface="+mn-cs"/>
+        </a:defRPr>
+      </a:lvl4pPr>
+      <a:lvl5pPr marL="1430323" indent="-284160" algn="l" rtl="0" eaLnBrk="1" fontAlgn="base" hangingPunct="1">
+        <a:lnSpc>
+          <a:spcPct val="90000"/>
+        </a:lnSpc>
+        <a:spcBef>
+          <a:spcPts val="500"/>
+        </a:spcBef>
+        <a:spcAft>
+          <a:spcPct val="0"/>
+        </a:spcAft>
+        <a:buFont typeface="Arial" panose="020B0604020202020204" pitchFamily="34" charset="0"/>
+        <a:buChar char="•"/>
+        <a:defRPr kern="1200">
+          <a:solidFill>
+            <a:srgbClr val="616062"/>
+          </a:solidFill>
+          <a:latin typeface="+mn-lt"/>
+          <a:ea typeface="+mn-ea"/>
+          <a:cs typeface="+mn-cs"/>
+        </a:defRPr>
+      </a:lvl5pPr>
+      <a:lvl6pPr marL="2514573" indent="-228597" algn="l" defTabSz="914390" rtl="0" eaLnBrk="1" latinLnBrk="0" hangingPunct="1">
+        <a:lnSpc>
+          <a:spcPct val="90000"/>
+        </a:lnSpc>
+        <a:spcBef>
+          <a:spcPts val="500"/>
+        </a:spcBef>
+        <a:buFont typeface="Arial" panose="020B0604020202020204" pitchFamily="34" charset="0"/>
+        <a:buChar char="•"/>
+        <a:defRPr sz="1800" kern="1200">
+          <a:solidFill>
+            <a:schemeClr val="tx1"/>
+          </a:solidFill>
+          <a:latin typeface="+mn-lt"/>
+          <a:ea typeface="+mn-ea"/>
+          <a:cs typeface="+mn-cs"/>
+        </a:defRPr>
+      </a:lvl6pPr>
+      <a:lvl7pPr marL="2971769" indent="-228597" algn="l" defTabSz="914390" rtl="0" eaLnBrk="1" latinLnBrk="0" hangingPunct="1">
+        <a:lnSpc>
+          <a:spcPct val="90000"/>
+        </a:lnSpc>
+        <a:spcBef>
+          <a:spcPts val="500"/>
+        </a:spcBef>
+        <a:buFont typeface="Arial" panose="020B0604020202020204" pitchFamily="34" charset="0"/>
+        <a:buChar char="•"/>
+        <a:defRPr sz="1800" kern="1200">
+          <a:solidFill>
+            <a:schemeClr val="tx1"/>
+          </a:solidFill>
+          <a:latin typeface="+mn-lt"/>
+          <a:ea typeface="+mn-ea"/>
+          <a:cs typeface="+mn-cs"/>
+        </a:defRPr>
+      </a:lvl7pPr>
+      <a:lvl8pPr marL="3428964" indent="-228597" algn="l" defTabSz="914390" rtl="0" eaLnBrk="1" latinLnBrk="0" hangingPunct="1">
+        <a:lnSpc>
+          <a:spcPct val="90000"/>
+        </a:lnSpc>
+        <a:spcBef>
+          <a:spcPts val="500"/>
+        </a:spcBef>
+        <a:buFont typeface="Arial" panose="020B0604020202020204" pitchFamily="34" charset="0"/>
+        <a:buChar char="•"/>
+        <a:defRPr sz="1800" kern="1200">
+          <a:solidFill>
+            <a:schemeClr val="tx1"/>
+          </a:solidFill>
+          <a:latin typeface="+mn-lt"/>
+          <a:ea typeface="+mn-ea"/>
+          <a:cs typeface="+mn-cs"/>
+        </a:defRPr>
+      </a:lvl8pPr>
+      <a:lvl9pPr marL="3886158" indent="-228597" algn="l" defTabSz="914390" rtl="0" eaLnBrk="1" latinLnBrk="0" hangingPunct="1">
+        <a:lnSpc>
+          <a:spcPct val="90000"/>
+        </a:lnSpc>
+        <a:spcBef>
+          <a:spcPts val="500"/>
+        </a:spcBef>
+        <a:buFont typeface="Arial" panose="020B0604020202020204" pitchFamily="34" charset="0"/>
+        <a:buChar char="•"/>
+        <a:defRPr sz="1800" kern="1200">
+          <a:solidFill>
+            <a:schemeClr val="tx1"/>
+          </a:solidFill>
+          <a:latin typeface="+mn-lt"/>
+          <a:ea typeface="+mn-ea"/>
+          <a:cs typeface="+mn-cs"/>
+        </a:defRPr>
+      </a:lvl9pPr>
+    </p:bodyStyle>
+    <p:otherStyle>
+      <a:defPPr>
+        <a:defRPr lang="en-US"/>
+      </a:defPPr>
+      <a:lvl1pPr marL="0" algn="l" defTabSz="914390" rtl="0" eaLnBrk="1" latinLnBrk="0" hangingPunct="1">
+        <a:defRPr sz="1800" kern="1200">
+          <a:solidFill>
+            <a:schemeClr val="tx1"/>
+          </a:solidFill>
+          <a:latin typeface="+mn-lt"/>
+          <a:ea typeface="+mn-ea"/>
+          <a:cs typeface="+mn-cs"/>
+        </a:defRPr>
+      </a:lvl1pPr>
+      <a:lvl2pPr marL="457195" algn="l" defTabSz="914390" rtl="0" eaLnBrk="1" latinLnBrk="0" hangingPunct="1">
+        <a:defRPr sz="1800" kern="1200">
+          <a:solidFill>
+            <a:schemeClr val="tx1"/>
+          </a:solidFill>
+          <a:latin typeface="+mn-lt"/>
+          <a:ea typeface="+mn-ea"/>
+          <a:cs typeface="+mn-cs"/>
+        </a:defRPr>
+      </a:lvl2pPr>
+      <a:lvl3pPr marL="914390" algn="l" defTabSz="914390" rtl="0" eaLnBrk="1" latinLnBrk="0" hangingPunct="1">
+        <a:defRPr sz="1800" kern="1200">
+          <a:solidFill>
+            <a:schemeClr val="tx1"/>
+          </a:solidFill>
+          <a:latin typeface="+mn-lt"/>
+          <a:ea typeface="+mn-ea"/>
+          <a:cs typeface="+mn-cs"/>
+        </a:defRPr>
+      </a:lvl3pPr>
+      <a:lvl4pPr marL="1371586" algn="l" defTabSz="914390" rtl="0" eaLnBrk="1" latinLnBrk="0" hangingPunct="1">
+        <a:defRPr sz="1800" kern="1200">
+          <a:solidFill>
+            <a:schemeClr val="tx1"/>
+          </a:solidFill>
+          <a:latin typeface="+mn-lt"/>
+          <a:ea typeface="+mn-ea"/>
+          <a:cs typeface="+mn-cs"/>
+        </a:defRPr>
+      </a:lvl4pPr>
+      <a:lvl5pPr marL="1828781" algn="l" defTabSz="914390" rtl="0" eaLnBrk="1" latinLnBrk="0" hangingPunct="1">
+        <a:defRPr sz="1800" kern="1200">
+          <a:solidFill>
+            <a:schemeClr val="tx1"/>
+          </a:solidFill>
+          <a:latin typeface="+mn-lt"/>
+          <a:ea typeface="+mn-ea"/>
+          <a:cs typeface="+mn-cs"/>
+        </a:defRPr>
+      </a:lvl5pPr>
+      <a:lvl6pPr marL="2285975" algn="l" defTabSz="914390" rtl="0" eaLnBrk="1" latinLnBrk="0" hangingPunct="1">
+        <a:defRPr sz="1800" kern="1200">
+          <a:solidFill>
+            <a:schemeClr val="tx1"/>
+          </a:solidFill>
+          <a:latin typeface="+mn-lt"/>
+          <a:ea typeface="+mn-ea"/>
+          <a:cs typeface="+mn-cs"/>
+        </a:defRPr>
+      </a:lvl6pPr>
+      <a:lvl7pPr marL="2743170" algn="l" defTabSz="914390" rtl="0" eaLnBrk="1" latinLnBrk="0" hangingPunct="1">
+        <a:defRPr sz="1800" kern="1200">
+          <a:solidFill>
+            <a:schemeClr val="tx1"/>
+          </a:solidFill>
+          <a:latin typeface="+mn-lt"/>
+          <a:ea typeface="+mn-ea"/>
+          <a:cs typeface="+mn-cs"/>
+        </a:defRPr>
+      </a:lvl7pPr>
+      <a:lvl8pPr marL="3200366" algn="l" defTabSz="914390" rtl="0" eaLnBrk="1" latinLnBrk="0" hangingPunct="1">
+        <a:defRPr sz="1800" kern="1200">
+          <a:solidFill>
+            <a:schemeClr val="tx1"/>
+          </a:solidFill>
+          <a:latin typeface="+mn-lt"/>
+          <a:ea typeface="+mn-ea"/>
+          <a:cs typeface="+mn-cs"/>
+        </a:defRPr>
+      </a:lvl8pPr>
+      <a:lvl9pPr marL="3657561" algn="l" defTabSz="914390" rtl="0" eaLnBrk="1" latinLnBrk="0" hangingPunct="1">
+        <a:defRPr sz="1800" kern="1200">
+          <a:solidFill>
+            <a:schemeClr val="tx1"/>
+          </a:solidFill>
+          <a:latin typeface="+mn-lt"/>
+          <a:ea typeface="+mn-ea"/>
+          <a:cs typeface="+mn-cs"/>
+        </a:defRPr>
+      </a:lvl9pPr>
+    </p:otherStyle>
+  </p:txStyles>
+</p:sldMaster>
+</file>
+
+<file path=ppt/slides/slide1.xml><?xml version="1.0" encoding="utf-8"?>
+<p:sld xmlns:a="http://schemas.openxmlformats.org/drawingml/2006/main" xmlns:r="http://schemas.openxmlformats.org/officeDocument/2006/relationships" xmlns:p="http://schemas.openxmlformats.org/presentationml/2006/main">
+  <p:cSld>
+    <p:spTree>
+      <p:nvGrpSpPr>
+        <p:cNvPr id="1" name="">
+          <a:extLst>
+            <a:ext uri="{FF2B5EF4-FFF2-40B4-BE49-F238E27FC236}">
+              <a16:creationId xmlns:a16="http://schemas.microsoft.com/office/drawing/2014/main" id="{0B99B159-6DD4-1BBB-CA47-E6AAB73632BF}"/>
+            </a:ext>
+          </a:extLst>
+        </p:cNvPr>
+        <p:cNvGrpSpPr/>
+        <p:nvPr/>
+      </p:nvGrpSpPr>
+      <p:grpSpPr>
+        <a:xfrm>
+          <a:off x="0" y="0"/>
+          <a:ext cx="0" cy="0"/>
+          <a:chOff x="0" y="0"/>
+          <a:chExt cx="0" cy="0"/>
+        </a:xfrm>
+      </p:grpSpPr>
+      <p:sp>
+        <p:nvSpPr>
+          <p:cNvPr id="2" name="Title 1">
+            <a:extLst>
+              <a:ext uri="{FF2B5EF4-FFF2-40B4-BE49-F238E27FC236}">
+                <a16:creationId xmlns:a16="http://schemas.microsoft.com/office/drawing/2014/main" id="{4F5BCD86-223D-A8A8-096C-9FF792988F9C}"/>
+              </a:ext>
+            </a:extLst>
+          </p:cNvPr>
+          <p:cNvSpPr>
+            <a:spLocks noGrp="1"/>
+          </p:cNvSpPr>
+          <p:nvPr>
+            <p:ph type="ctrTitle"/>
+          </p:nvPr>
+        </p:nvSpPr>
+        <p:spPr>
+          <a:xfrm>
+            <a:off x="525251" y="2504373"/>
+            <a:ext cx="5704100" cy="1160168"/>
           </a:xfrm>
         </p:spPr>
         <p:txBody>
           <a:bodyPr/>
           <a:lstStyle/>
           <a:p>
-            <a:r>
-              <a:rPr lang="en-IN" b="1" dirty="0"/>
+            <a:br>
+              <a:rPr lang="en-US" sz="3200" dirty="0"/>
+            </a:br>
+            <a:br>
+              <a:rPr lang="en-US" sz="3200" dirty="0"/>
+            </a:br>
+            <a:endParaRPr lang="en-US" dirty="0"/>
+          </a:p>
+        </p:txBody>
+      </p:sp>
+      <p:sp>
+        <p:nvSpPr>
+          <p:cNvPr id="3" name="Subtitle 2">
+            <a:extLst>
+              <a:ext uri="{FF2B5EF4-FFF2-40B4-BE49-F238E27FC236}">
+                <a16:creationId xmlns:a16="http://schemas.microsoft.com/office/drawing/2014/main" id="{76B9EBD2-D46D-4CA4-3FA8-401F9894C6E5}"/>
+              </a:ext>
+            </a:extLst>
+          </p:cNvPr>
+          <p:cNvSpPr>
+            <a:spLocks noGrp="1"/>
+          </p:cNvSpPr>
+          <p:nvPr>
+            <p:ph type="subTitle" idx="1"/>
+          </p:nvPr>
+        </p:nvSpPr>
+        <p:spPr/>
+        <p:txBody>
+          <a:bodyPr/>
+          <a:lstStyle/>
+          <a:p>
+            <a:r>
+              <a:rPr lang="en-US" dirty="0"/>
+              <a:t>8 Jul 2025</a:t>
+            </a:r>
+          </a:p>
+        </p:txBody>
+      </p:sp>
+      <p:sp>
+        <p:nvSpPr>
+          <p:cNvPr id="9" name="Title 1">
+            <a:extLst>
+              <a:ext uri="{FF2B5EF4-FFF2-40B4-BE49-F238E27FC236}">
+                <a16:creationId xmlns:a16="http://schemas.microsoft.com/office/drawing/2014/main" id="{98A718C9-6B6F-2073-1EC4-A5A28D510620}"/>
+              </a:ext>
+            </a:extLst>
+          </p:cNvPr>
+          <p:cNvSpPr txBox="1">
+            <a:spLocks/>
+          </p:cNvSpPr>
+          <p:nvPr/>
+        </p:nvSpPr>
+        <p:spPr bwMode="auto">
+          <a:xfrm>
+            <a:off x="348966" y="1924288"/>
+            <a:ext cx="7999771" cy="2047211"/>
+          </a:xfrm>
+          <a:prstGeom prst="rect">
+            <a:avLst/>
+          </a:prstGeom>
+          <a:noFill/>
+          <a:ln>
+            <a:noFill/>
+          </a:ln>
+          <a:extLst>
+            <a:ext uri="{909E8E84-426E-40DD-AFC4-6F175D3DCCD1}">
+              <a14:hiddenFill xmlns:a14="http://schemas.microsoft.com/office/drawing/2010/main">
+                <a:solidFill>
+                  <a:srgbClr val="FFFFFF"/>
+                </a:solidFill>
+              </a14:hiddenFill>
+            </a:ext>
+            <a:ext uri="{91240B29-F687-4F45-9708-019B960494DF}">
+              <a14:hiddenLine xmlns:a14="http://schemas.microsoft.com/office/drawing/2010/main" w="9525">
+                <a:solidFill>
+                  <a:srgbClr val="000000"/>
+                </a:solidFill>
+                <a:miter lim="800000"/>
+                <a:headEnd/>
+                <a:tailEnd/>
+              </a14:hiddenLine>
+            </a:ext>
+          </a:extLst>
+        </p:spPr>
+        <p:txBody>
+          <a:bodyPr vert="horz" wrap="square" lIns="91440" tIns="45720" rIns="91440" bIns="45720" numCol="1" anchor="b" anchorCtr="0" compatLnSpc="1">
+            <a:prstTxWarp prst="textNoShape">
+              <a:avLst/>
+            </a:prstTxWarp>
+            <a:normAutofit fontScale="97500"/>
+          </a:bodyPr>
+          <a:lstStyle>
+            <a:lvl1pPr algn="l" rtl="0" eaLnBrk="1" fontAlgn="base" hangingPunct="1">
+              <a:lnSpc>
+                <a:spcPct val="90000"/>
+              </a:lnSpc>
+              <a:spcBef>
+                <a:spcPct val="0"/>
+              </a:spcBef>
+              <a:spcAft>
+                <a:spcPct val="0"/>
+              </a:spcAft>
+              <a:defRPr sz="6000" b="1" kern="1200">
+                <a:solidFill>
+                  <a:schemeClr val="bg1"/>
+                </a:solidFill>
+                <a:latin typeface="+mj-lt"/>
+                <a:ea typeface="+mj-ea"/>
+                <a:cs typeface="+mj-cs"/>
+              </a:defRPr>
+            </a:lvl1pPr>
+            <a:lvl2pPr algn="l" rtl="0" eaLnBrk="1" fontAlgn="base" hangingPunct="1">
+              <a:lnSpc>
+                <a:spcPct val="90000"/>
+              </a:lnSpc>
+              <a:spcBef>
+                <a:spcPct val="0"/>
+              </a:spcBef>
+              <a:spcAft>
+                <a:spcPct val="0"/>
+              </a:spcAft>
+              <a:defRPr sz="4400">
+                <a:solidFill>
+                  <a:srgbClr val="333333"/>
+                </a:solidFill>
+                <a:latin typeface="Arial" panose="020B0604020202020204" pitchFamily="34" charset="0"/>
+              </a:defRPr>
+            </a:lvl2pPr>
+            <a:lvl3pPr algn="l" rtl="0" eaLnBrk="1" fontAlgn="base" hangingPunct="1">
+              <a:lnSpc>
+                <a:spcPct val="90000"/>
+              </a:lnSpc>
+              <a:spcBef>
+                <a:spcPct val="0"/>
+              </a:spcBef>
+              <a:spcAft>
+                <a:spcPct val="0"/>
+              </a:spcAft>
+              <a:defRPr sz="4400">
+                <a:solidFill>
+                  <a:srgbClr val="333333"/>
+                </a:solidFill>
+                <a:latin typeface="Arial" panose="020B0604020202020204" pitchFamily="34" charset="0"/>
+              </a:defRPr>
+            </a:lvl3pPr>
+            <a:lvl4pPr algn="l" rtl="0" eaLnBrk="1" fontAlgn="base" hangingPunct="1">
+              <a:lnSpc>
+                <a:spcPct val="90000"/>
+              </a:lnSpc>
+              <a:spcBef>
+                <a:spcPct val="0"/>
+              </a:spcBef>
+              <a:spcAft>
+                <a:spcPct val="0"/>
+              </a:spcAft>
+              <a:defRPr sz="4400">
+                <a:solidFill>
+                  <a:srgbClr val="333333"/>
+                </a:solidFill>
+                <a:latin typeface="Arial" panose="020B0604020202020204" pitchFamily="34" charset="0"/>
+              </a:defRPr>
+            </a:lvl4pPr>
+            <a:lvl5pPr algn="l" rtl="0" eaLnBrk="1" fontAlgn="base" hangingPunct="1">
+              <a:lnSpc>
+                <a:spcPct val="90000"/>
+              </a:lnSpc>
+              <a:spcBef>
+                <a:spcPct val="0"/>
+              </a:spcBef>
+              <a:spcAft>
+                <a:spcPct val="0"/>
+              </a:spcAft>
+              <a:defRPr sz="4400">
+                <a:solidFill>
+                  <a:srgbClr val="333333"/>
+                </a:solidFill>
+                <a:latin typeface="Arial" panose="020B0604020202020204" pitchFamily="34" charset="0"/>
+              </a:defRPr>
+            </a:lvl5pPr>
+            <a:lvl6pPr marL="457200" algn="l" rtl="0" eaLnBrk="1" fontAlgn="base" hangingPunct="1">
+              <a:lnSpc>
+                <a:spcPct val="90000"/>
+              </a:lnSpc>
+              <a:spcBef>
+                <a:spcPct val="0"/>
+              </a:spcBef>
+              <a:spcAft>
+                <a:spcPct val="0"/>
+              </a:spcAft>
+              <a:defRPr sz="4400">
+                <a:solidFill>
+                  <a:srgbClr val="333333"/>
+                </a:solidFill>
+                <a:latin typeface="Arial" panose="020B0604020202020204" pitchFamily="34" charset="0"/>
+              </a:defRPr>
+            </a:lvl6pPr>
+            <a:lvl7pPr marL="914400" algn="l" rtl="0" eaLnBrk="1" fontAlgn="base" hangingPunct="1">
+              <a:lnSpc>
+                <a:spcPct val="90000"/>
+              </a:lnSpc>
+              <a:spcBef>
+                <a:spcPct val="0"/>
+              </a:spcBef>
+              <a:spcAft>
+                <a:spcPct val="0"/>
+              </a:spcAft>
+              <a:defRPr sz="4400">
+                <a:solidFill>
+                  <a:srgbClr val="333333"/>
+                </a:solidFill>
+                <a:latin typeface="Arial" panose="020B0604020202020204" pitchFamily="34" charset="0"/>
+              </a:defRPr>
+            </a:lvl7pPr>
+            <a:lvl8pPr marL="1371600" algn="l" rtl="0" eaLnBrk="1" fontAlgn="base" hangingPunct="1">
+              <a:lnSpc>
+                <a:spcPct val="90000"/>
+              </a:lnSpc>
+              <a:spcBef>
+                <a:spcPct val="0"/>
+              </a:spcBef>
+              <a:spcAft>
+                <a:spcPct val="0"/>
+              </a:spcAft>
+              <a:defRPr sz="4400">
+                <a:solidFill>
+                  <a:srgbClr val="333333"/>
+                </a:solidFill>
+                <a:latin typeface="Arial" panose="020B0604020202020204" pitchFamily="34" charset="0"/>
+              </a:defRPr>
+            </a:lvl8pPr>
+            <a:lvl9pPr marL="1828800" algn="l" rtl="0" eaLnBrk="1" fontAlgn="base" hangingPunct="1">
+              <a:lnSpc>
+                <a:spcPct val="90000"/>
+              </a:lnSpc>
+              <a:spcBef>
+                <a:spcPct val="0"/>
+              </a:spcBef>
+              <a:spcAft>
+                <a:spcPct val="0"/>
+              </a:spcAft>
+              <a:defRPr sz="4400">
+                <a:solidFill>
+                  <a:srgbClr val="333333"/>
+                </a:solidFill>
+                <a:latin typeface="Arial" panose="020B0604020202020204" pitchFamily="34" charset="0"/>
+              </a:defRPr>
+            </a:lvl9pPr>
+          </a:lstStyle>
+          <a:p>
+            <a:pPr defTabSz="883128"/>
+            <a:r>
+              <a:rPr lang="en-US" dirty="0"/>
               <a:t>Integrate </a:t>
             </a:r>
             <a:r>
-              <a:rPr lang="en-IN" b="1" dirty="0" err="1"/>
+              <a:rPr lang="en-US" dirty="0" err="1"/>
               <a:t>LangFuse</a:t>
             </a:r>
             <a:r>
-              <a:rPr lang="en-IN" b="1" dirty="0"/>
+              <a:rPr lang="en-US" dirty="0"/>
               <a:t> to AI Agent</a:t>
             </a:r>
-          </a:p>
-        </p:txBody>
-      </p:sp>
-      <p:sp>
-        <p:nvSpPr>
-          <p:cNvPr id="3" name="Subtitle 2">
-            <a:extLst>
-              <a:ext uri="{FF2B5EF4-FFF2-40B4-BE49-F238E27FC236}">
-                <a16:creationId xmlns:a16="http://schemas.microsoft.com/office/drawing/2014/main" id="{042845B7-78F5-6EC4-7DD7-E10E21623BFE}"/>
-              </a:ext>
-            </a:extLst>
-          </p:cNvPr>
-          <p:cNvSpPr>
-            <a:spLocks noGrp="1"/>
-          </p:cNvSpPr>
-          <p:nvPr>
-            <p:ph type="subTitle" idx="1"/>
+            <a:endParaRPr lang="en-IN" sz="5988" b="0" dirty="0">
+              <a:latin typeface="Arial" panose="020B0604020202020204"/>
+            </a:endParaRPr>
+          </a:p>
+        </p:txBody>
+      </p:sp>
+      <p:sp>
+        <p:nvSpPr>
+          <p:cNvPr id="4" name="Subtitle 2">
+            <a:extLst>
+              <a:ext uri="{FF2B5EF4-FFF2-40B4-BE49-F238E27FC236}">
+                <a16:creationId xmlns:a16="http://schemas.microsoft.com/office/drawing/2014/main" id="{41970FAD-1BC5-5CC1-DA15-57C193E94748}"/>
+              </a:ext>
+            </a:extLst>
+          </p:cNvPr>
+          <p:cNvSpPr txBox="1">
+            <a:spLocks/>
+          </p:cNvSpPr>
+          <p:nvPr/>
+        </p:nvSpPr>
+        <p:spPr bwMode="auto">
+          <a:xfrm>
+            <a:off x="525251" y="4408606"/>
+            <a:ext cx="3940802" cy="580084"/>
+          </a:xfrm>
+          <a:prstGeom prst="rect">
+            <a:avLst/>
+          </a:prstGeom>
+          <a:noFill/>
+          <a:ln>
+            <a:noFill/>
+          </a:ln>
+          <a:extLst>
+            <a:ext uri="{909E8E84-426E-40DD-AFC4-6F175D3DCCD1}">
+              <a14:hiddenFill xmlns:a14="http://schemas.microsoft.com/office/drawing/2010/main">
+                <a:solidFill>
+                  <a:srgbClr val="FFFFFF"/>
+                </a:solidFill>
+              </a14:hiddenFill>
+            </a:ext>
+            <a:ext uri="{91240B29-F687-4F45-9708-019B960494DF}">
+              <a14:hiddenLine xmlns:a14="http://schemas.microsoft.com/office/drawing/2010/main" w="9525">
+                <a:solidFill>
+                  <a:srgbClr val="000000"/>
+                </a:solidFill>
+                <a:miter lim="800000"/>
+                <a:headEnd/>
+                <a:tailEnd/>
+              </a14:hiddenLine>
+            </a:ext>
+          </a:extLst>
+        </p:spPr>
+        <p:txBody>
+          <a:bodyPr vert="horz" wrap="square" lIns="91440" tIns="45720" rIns="91440" bIns="45720" numCol="1" anchor="t" anchorCtr="0" compatLnSpc="1">
+            <a:prstTxWarp prst="textNoShape">
+              <a:avLst/>
+            </a:prstTxWarp>
+          </a:bodyPr>
+          <a:lstStyle>
+            <a:lvl1pPr marL="0" indent="0" algn="l" rtl="0" eaLnBrk="1" fontAlgn="base" hangingPunct="1">
+              <a:lnSpc>
+                <a:spcPct val="90000"/>
+              </a:lnSpc>
+              <a:spcBef>
+                <a:spcPts val="1000"/>
+              </a:spcBef>
+              <a:spcAft>
+                <a:spcPct val="0"/>
+              </a:spcAft>
+              <a:buClr>
+                <a:schemeClr val="tx2"/>
+              </a:buClr>
+              <a:buFont typeface="Arial" panose="020B0604020202020204" pitchFamily="34" charset="0"/>
+              <a:buNone/>
+              <a:defRPr sz="2400" kern="1200">
+                <a:solidFill>
+                  <a:schemeClr val="bg1"/>
+                </a:solidFill>
+                <a:latin typeface="+mn-lt"/>
+                <a:ea typeface="+mn-ea"/>
+                <a:cs typeface="+mn-cs"/>
+              </a:defRPr>
+            </a:lvl1pPr>
+            <a:lvl2pPr marL="457200" indent="0" algn="ctr" rtl="0" eaLnBrk="1" fontAlgn="base" hangingPunct="1">
+              <a:lnSpc>
+                <a:spcPct val="90000"/>
+              </a:lnSpc>
+              <a:spcBef>
+                <a:spcPts val="500"/>
+              </a:spcBef>
+              <a:spcAft>
+                <a:spcPct val="0"/>
+              </a:spcAft>
+              <a:buClr>
+                <a:srgbClr val="616062"/>
+              </a:buClr>
+              <a:buFont typeface="Arial" panose="020B0604020202020204" pitchFamily="34" charset="0"/>
+              <a:buNone/>
+              <a:defRPr sz="2000" kern="1200">
+                <a:solidFill>
+                  <a:srgbClr val="616062"/>
+                </a:solidFill>
+                <a:latin typeface="+mn-lt"/>
+                <a:ea typeface="+mn-ea"/>
+                <a:cs typeface="+mn-cs"/>
+              </a:defRPr>
+            </a:lvl2pPr>
+            <a:lvl3pPr marL="914400" indent="0" algn="ctr" rtl="0" eaLnBrk="1" fontAlgn="base" hangingPunct="1">
+              <a:lnSpc>
+                <a:spcPct val="90000"/>
+              </a:lnSpc>
+              <a:spcBef>
+                <a:spcPts val="500"/>
+              </a:spcBef>
+              <a:spcAft>
+                <a:spcPct val="0"/>
+              </a:spcAft>
+              <a:buFont typeface="Arial" panose="020B0604020202020204" pitchFamily="34" charset="0"/>
+              <a:buNone/>
+              <a:defRPr sz="1800" kern="1200">
+                <a:solidFill>
+                  <a:srgbClr val="616062"/>
+                </a:solidFill>
+                <a:latin typeface="+mn-lt"/>
+                <a:ea typeface="+mn-ea"/>
+                <a:cs typeface="+mn-cs"/>
+              </a:defRPr>
+            </a:lvl3pPr>
+            <a:lvl4pPr marL="1371600" indent="0" algn="ctr" rtl="0" eaLnBrk="1" fontAlgn="base" hangingPunct="1">
+              <a:lnSpc>
+                <a:spcPct val="90000"/>
+              </a:lnSpc>
+              <a:spcBef>
+                <a:spcPts val="500"/>
+              </a:spcBef>
+              <a:spcAft>
+                <a:spcPct val="0"/>
+              </a:spcAft>
+              <a:buFont typeface="Arial" panose="020B0604020202020204" pitchFamily="34" charset="0"/>
+              <a:buNone/>
+              <a:defRPr sz="1600" kern="1200">
+                <a:solidFill>
+                  <a:srgbClr val="616062"/>
+                </a:solidFill>
+                <a:latin typeface="+mn-lt"/>
+                <a:ea typeface="+mn-ea"/>
+                <a:cs typeface="+mn-cs"/>
+              </a:defRPr>
+            </a:lvl4pPr>
+            <a:lvl5pPr marL="1828800" indent="0" algn="ctr" rtl="0" eaLnBrk="1" fontAlgn="base" hangingPunct="1">
+              <a:lnSpc>
+                <a:spcPct val="90000"/>
+              </a:lnSpc>
+              <a:spcBef>
+                <a:spcPts val="500"/>
+              </a:spcBef>
+              <a:spcAft>
+                <a:spcPct val="0"/>
+              </a:spcAft>
+              <a:buFont typeface="Arial" panose="020B0604020202020204" pitchFamily="34" charset="0"/>
+              <a:buNone/>
+              <a:defRPr sz="1600" kern="1200">
+                <a:solidFill>
+                  <a:srgbClr val="616062"/>
+                </a:solidFill>
+                <a:latin typeface="+mn-lt"/>
+                <a:ea typeface="+mn-ea"/>
+                <a:cs typeface="+mn-cs"/>
+              </a:defRPr>
+            </a:lvl5pPr>
+            <a:lvl6pPr marL="2286000" indent="0" algn="ctr" defTabSz="914400" rtl="0" eaLnBrk="1" latinLnBrk="0" hangingPunct="1">
+              <a:lnSpc>
+                <a:spcPct val="90000"/>
+              </a:lnSpc>
+              <a:spcBef>
+                <a:spcPts val="500"/>
+              </a:spcBef>
+              <a:buFont typeface="Arial" panose="020B0604020202020204" pitchFamily="34" charset="0"/>
+              <a:buNone/>
+              <a:defRPr sz="1600" kern="1200">
+                <a:solidFill>
+                  <a:schemeClr val="tx1"/>
+                </a:solidFill>
+                <a:latin typeface="+mn-lt"/>
+                <a:ea typeface="+mn-ea"/>
+                <a:cs typeface="+mn-cs"/>
+              </a:defRPr>
+            </a:lvl6pPr>
+            <a:lvl7pPr marL="2743200" indent="0" algn="ctr" defTabSz="914400" rtl="0" eaLnBrk="1" latinLnBrk="0" hangingPunct="1">
+              <a:lnSpc>
+                <a:spcPct val="90000"/>
+              </a:lnSpc>
+              <a:spcBef>
+                <a:spcPts val="500"/>
+              </a:spcBef>
+              <a:buFont typeface="Arial" panose="020B0604020202020204" pitchFamily="34" charset="0"/>
+              <a:buNone/>
+              <a:defRPr sz="1600" kern="1200">
+                <a:solidFill>
+                  <a:schemeClr val="tx1"/>
+                </a:solidFill>
+                <a:latin typeface="+mn-lt"/>
+                <a:ea typeface="+mn-ea"/>
+                <a:cs typeface="+mn-cs"/>
+              </a:defRPr>
+            </a:lvl7pPr>
+            <a:lvl8pPr marL="3200400" indent="0" algn="ctr" defTabSz="914400" rtl="0" eaLnBrk="1" latinLnBrk="0" hangingPunct="1">
+              <a:lnSpc>
+                <a:spcPct val="90000"/>
+              </a:lnSpc>
+              <a:spcBef>
+                <a:spcPts val="500"/>
+              </a:spcBef>
+              <a:buFont typeface="Arial" panose="020B0604020202020204" pitchFamily="34" charset="0"/>
+              <a:buNone/>
+              <a:defRPr sz="1600" kern="1200">
+                <a:solidFill>
+                  <a:schemeClr val="tx1"/>
+                </a:solidFill>
+                <a:latin typeface="+mn-lt"/>
+                <a:ea typeface="+mn-ea"/>
+                <a:cs typeface="+mn-cs"/>
+              </a:defRPr>
+            </a:lvl8pPr>
+            <a:lvl9pPr marL="3657600" indent="0" algn="ctr" defTabSz="914400" rtl="0" eaLnBrk="1" latinLnBrk="0" hangingPunct="1">
+              <a:lnSpc>
+                <a:spcPct val="90000"/>
+              </a:lnSpc>
+              <a:spcBef>
+                <a:spcPts val="500"/>
+              </a:spcBef>
+              <a:buFont typeface="Arial" panose="020B0604020202020204" pitchFamily="34" charset="0"/>
+              <a:buNone/>
+              <a:defRPr sz="1600" kern="1200">
+                <a:solidFill>
+                  <a:schemeClr val="tx1"/>
+                </a:solidFill>
+                <a:latin typeface="+mn-lt"/>
+                <a:ea typeface="+mn-ea"/>
+                <a:cs typeface="+mn-cs"/>
+              </a:defRPr>
+            </a:lvl9pPr>
+          </a:lstStyle>
+          <a:p>
+            <a:pPr defTabSz="883128">
+              <a:spcBef>
+                <a:spcPts val="966"/>
+              </a:spcBef>
+              <a:buClr>
+                <a:srgbClr val="007EB8"/>
+              </a:buClr>
+            </a:pPr>
+            <a:r>
+              <a:rPr lang="en-US" dirty="0">
+                <a:solidFill>
+                  <a:srgbClr val="FFFFFF"/>
+                </a:solidFill>
+                <a:latin typeface="Arial" panose="020B0604020202020204"/>
+              </a:rPr>
+              <a:t>Sankareswari Athiappan</a:t>
+            </a:r>
+          </a:p>
+        </p:txBody>
+      </p:sp>
+    </p:spTree>
+    <p:extLst>
+      <p:ext uri="{BB962C8B-B14F-4D97-AF65-F5344CB8AC3E}">
+        <p14:creationId xmlns:p14="http://schemas.microsoft.com/office/powerpoint/2010/main" val="2294252477"/>
+      </p:ext>
+    </p:extLst>
+  </p:cSld>
+  <p:clrMapOvr>
+    <a:masterClrMapping/>
+  </p:clrMapOvr>
+</p:sld>
+</file>
+
+<file path=ppt/slides/slide2.xml><?xml version="1.0" encoding="utf-8"?>
+<p:sld xmlns:a="http://schemas.openxmlformats.org/drawingml/2006/main" xmlns:r="http://schemas.openxmlformats.org/officeDocument/2006/relationships" xmlns:p="http://schemas.openxmlformats.org/presentationml/2006/main">
+  <p:cSld>
+    <p:bg>
+      <p:bgPr>
+        <a:solidFill>
+          <a:schemeClr val="bg1"/>
+        </a:solidFill>
+        <a:effectLst/>
+      </p:bgPr>
+    </p:bg>
+    <p:spTree>
+      <p:nvGrpSpPr>
+        <p:cNvPr id="1" name=""/>
+        <p:cNvGrpSpPr/>
+        <p:nvPr/>
+      </p:nvGrpSpPr>
+      <p:grpSpPr>
+        <a:xfrm>
+          <a:off x="0" y="0"/>
+          <a:ext cx="0" cy="0"/>
+          <a:chOff x="0" y="0"/>
+          <a:chExt cx="0" cy="0"/>
+        </a:xfrm>
+      </p:grpSpPr>
+      <p:sp useBgFill="1">
+        <p:nvSpPr>
+          <p:cNvPr id="20" name="Rectangle 19">
+            <a:extLst>
+              <a:ext uri="{FF2B5EF4-FFF2-40B4-BE49-F238E27FC236}">
+                <a16:creationId xmlns:a16="http://schemas.microsoft.com/office/drawing/2014/main" id="{37B65277-82C6-6D08-6DCA-4A7DCC3B7136}"/>
+              </a:ext>
+              <a:ext uri="{C183D7F6-B498-43B3-948B-1728B52AA6E4}">
+                <adec:decorative xmlns:adec="http://schemas.microsoft.com/office/drawing/2017/decorative" val="1"/>
+              </a:ext>
+            </a:extLst>
+          </p:cNvPr>
+          <p:cNvSpPr>
+            <a:spLocks noGrp="1" noRot="1" noChangeAspect="1" noMove="1" noResize="1" noEditPoints="1" noAdjustHandles="1" noChangeArrowheads="1" noChangeShapeType="1" noTextEdit="1"/>
+          </p:cNvSpPr>
+          <p:nvPr>
+            <p:extLst>
+              <p:ext uri="{386F3935-93C4-4BCD-93E2-E3B085C9AB24}">
+                <p16:designElem xmlns:p16="http://schemas.microsoft.com/office/powerpoint/2015/main" val="1"/>
+              </p:ext>
+            </p:extLst>
           </p:nvPr>
         </p:nvSpPr>
         <p:spPr>
           <a:xfrm>
-            <a:off x="420547" y="1356549"/>
-            <a:ext cx="9742025" cy="3747886"/>
+            <a:off x="0" y="0"/>
+            <a:ext cx="12192000" cy="6858000"/>
+          </a:xfrm>
+          <a:prstGeom prst="rect">
+            <a:avLst/>
+          </a:prstGeom>
+          <a:ln w="12700" cap="flat" cmpd="sng" algn="ctr">
+            <a:noFill/>
+            <a:prstDash val="solid"/>
+            <a:miter lim="800000"/>
+          </a:ln>
+          <a:effectLst/>
+          <a:extLst>
+            <a:ext uri="{91240B29-F687-4F45-9708-019B960494DF}">
+              <a14:hiddenLine xmlns:a14="http://schemas.microsoft.com/office/drawing/2010/main" w="12700" cap="flat" cmpd="sng" algn="ctr">
+                <a:solidFill>
+                  <a:schemeClr val="accent1">
+                    <a:shade val="15000"/>
+                  </a:schemeClr>
+                </a:solidFill>
+                <a:prstDash val="solid"/>
+                <a:miter lim="800000"/>
+              </a14:hiddenLine>
+            </a:ext>
+          </a:extLst>
+        </p:spPr>
+        <p:style>
+          <a:lnRef idx="2">
+            <a:schemeClr val="accent1">
+              <a:shade val="15000"/>
+            </a:schemeClr>
+          </a:lnRef>
+          <a:fillRef idx="1">
+            <a:schemeClr val="accent1"/>
+          </a:fillRef>
+          <a:effectRef idx="0">
+            <a:schemeClr val="accent1"/>
+          </a:effectRef>
+          <a:fontRef idx="minor">
+            <a:schemeClr val="lt1"/>
+          </a:fontRef>
+        </p:style>
+        <p:txBody>
+          <a:bodyPr rtlCol="0" anchor="ctr"/>
+          <a:lstStyle/>
+          <a:p>
+            <a:pPr algn="ctr"/>
+            <a:endParaRPr lang="en-US"/>
+          </a:p>
+        </p:txBody>
+      </p:sp>
+      <p:sp>
+        <p:nvSpPr>
+          <p:cNvPr id="2" name="Title 1">
+            <a:extLst>
+              <a:ext uri="{FF2B5EF4-FFF2-40B4-BE49-F238E27FC236}">
+                <a16:creationId xmlns:a16="http://schemas.microsoft.com/office/drawing/2014/main" id="{0B851A5C-8049-D6B7-A9ED-146CB656D241}"/>
+              </a:ext>
+            </a:extLst>
+          </p:cNvPr>
+          <p:cNvSpPr>
+            <a:spLocks noGrp="1"/>
+          </p:cNvSpPr>
+          <p:nvPr>
+            <p:ph type="ctrTitle"/>
+          </p:nvPr>
+        </p:nvSpPr>
+        <p:spPr>
+          <a:xfrm>
+            <a:off x="2141196" y="-556555"/>
+            <a:ext cx="9363865" cy="1527048"/>
           </a:xfrm>
         </p:spPr>
         <p:txBody>
-          <a:bodyPr>
+          <a:bodyPr vert="horz" lIns="91440" tIns="45720" rIns="91440" bIns="45720" rtlCol="0" anchor="b">
             <a:normAutofit/>
           </a:bodyPr>
           <a:lstStyle/>
           <a:p>
-            <a:pPr marL="285750" indent="-285750" algn="l">
+            <a:pPr algn="l"/>
+            <a:r>
+              <a:rPr lang="en-US" sz="3600" b="1" kern="1200" dirty="0">
+                <a:solidFill>
+                  <a:schemeClr val="tx1"/>
+                </a:solidFill>
+                <a:latin typeface="+mj-lt"/>
+                <a:ea typeface="+mj-ea"/>
+                <a:cs typeface="+mj-cs"/>
+              </a:rPr>
+              <a:t>Integrate </a:t>
+            </a:r>
+            <a:r>
+              <a:rPr lang="en-US" sz="3600" b="1" kern="1200" dirty="0" err="1">
+                <a:solidFill>
+                  <a:schemeClr val="tx1"/>
+                </a:solidFill>
+                <a:latin typeface="+mj-lt"/>
+                <a:ea typeface="+mj-ea"/>
+                <a:cs typeface="+mj-cs"/>
+              </a:rPr>
+              <a:t>LangFuse</a:t>
+            </a:r>
+            <a:r>
+              <a:rPr lang="en-US" sz="3600" b="1" kern="1200" dirty="0">
+                <a:solidFill>
+                  <a:schemeClr val="tx1"/>
+                </a:solidFill>
+                <a:latin typeface="+mj-lt"/>
+                <a:ea typeface="+mj-ea"/>
+                <a:cs typeface="+mj-cs"/>
+              </a:rPr>
+              <a:t> to AI Agent</a:t>
+            </a:r>
+          </a:p>
+        </p:txBody>
+      </p:sp>
+      <p:sp>
+        <p:nvSpPr>
+          <p:cNvPr id="3" name="Subtitle 2">
+            <a:extLst>
+              <a:ext uri="{FF2B5EF4-FFF2-40B4-BE49-F238E27FC236}">
+                <a16:creationId xmlns:a16="http://schemas.microsoft.com/office/drawing/2014/main" id="{042845B7-78F5-6EC4-7DD7-E10E21623BFE}"/>
+              </a:ext>
+            </a:extLst>
+          </p:cNvPr>
+          <p:cNvSpPr>
+            <a:spLocks noGrp="1"/>
+          </p:cNvSpPr>
+          <p:nvPr>
+            <p:ph type="subTitle" idx="1"/>
+          </p:nvPr>
+        </p:nvSpPr>
+        <p:spPr>
+          <a:xfrm>
+            <a:off x="419101" y="1102440"/>
+            <a:ext cx="10171562" cy="4534085"/>
+          </a:xfrm>
+        </p:spPr>
+        <p:txBody>
+          <a:bodyPr vert="horz" lIns="91440" tIns="45720" rIns="91440" bIns="45720" rtlCol="0">
+            <a:normAutofit/>
+          </a:bodyPr>
+          <a:lstStyle/>
+          <a:p>
+            <a:pPr marL="285750" indent="-228600" algn="l">
+              <a:lnSpc>
+                <a:spcPct val="120000"/>
+              </a:lnSpc>
+              <a:buFont typeface="Arial" panose="020B0604020202020204" pitchFamily="34" charset="0"/>
+              <a:buChar char="•"/>
+            </a:pPr>
+            <a:endParaRPr lang="en-US" sz="1800" dirty="0"/>
+          </a:p>
+          <a:p>
+            <a:pPr marL="285750" indent="-228600" algn="l">
+              <a:lnSpc>
+                <a:spcPct val="120000"/>
+              </a:lnSpc>
               <a:buFont typeface="Arial" panose="020B0604020202020204" pitchFamily="34" charset="0"/>
               <a:buChar char="•"/>
             </a:pPr>
@@ -3432,7 +8163,20 @@
             </a:r>
           </a:p>
           <a:p>
-            <a:pPr marL="285750" indent="-285750" algn="l">
+            <a:pPr marL="285750" indent="-228600" algn="l">
+              <a:lnSpc>
+                <a:spcPct val="120000"/>
+              </a:lnSpc>
+              <a:buFont typeface="Arial" panose="020B0604020202020204" pitchFamily="34" charset="0"/>
+              <a:buChar char="•"/>
+            </a:pPr>
+            <a:endParaRPr lang="en-US" sz="1800" dirty="0"/>
+          </a:p>
+          <a:p>
+            <a:pPr marL="285750" indent="-228600" algn="l">
+              <a:lnSpc>
+                <a:spcPct val="120000"/>
+              </a:lnSpc>
               <a:buFont typeface="Arial" panose="020B0604020202020204" pitchFamily="34" charset="0"/>
               <a:buChar char="•"/>
             </a:pPr>
@@ -3452,14 +8196,20 @@
             </a:r>
           </a:p>
           <a:p>
-            <a:pPr marL="285750" indent="-285750" algn="l">
+            <a:pPr marL="285750" indent="-228600" algn="l">
+              <a:lnSpc>
+                <a:spcPct val="120000"/>
+              </a:lnSpc>
               <a:buFont typeface="Arial" panose="020B0604020202020204" pitchFamily="34" charset="0"/>
               <a:buChar char="•"/>
             </a:pPr>
             <a:endParaRPr lang="en-US" sz="1800" dirty="0"/>
           </a:p>
           <a:p>
-            <a:pPr marL="285750" indent="-285750" algn="l">
+            <a:pPr marL="285750" indent="-228600" algn="l">
+              <a:lnSpc>
+                <a:spcPct val="120000"/>
+              </a:lnSpc>
               <a:buFont typeface="Arial" panose="020B0604020202020204" pitchFamily="34" charset="0"/>
               <a:buChar char="•"/>
             </a:pPr>
@@ -3474,6 +8224,45 @@
           </a:p>
         </p:txBody>
       </p:sp>
+      <p:pic>
+        <p:nvPicPr>
+          <p:cNvPr id="7" name="Graphic 6" descr="User">
+            <a:extLst>
+              <a:ext uri="{FF2B5EF4-FFF2-40B4-BE49-F238E27FC236}">
+                <a16:creationId xmlns:a16="http://schemas.microsoft.com/office/drawing/2014/main" id="{2A90D551-0222-F186-9F04-075037EECBD1}"/>
+              </a:ext>
+            </a:extLst>
+          </p:cNvPr>
+          <p:cNvPicPr>
+            <a:picLocks noChangeAspect="1"/>
+          </p:cNvPicPr>
+          <p:nvPr/>
+        </p:nvPicPr>
+        <p:blipFill>
+          <a:blip r:embed="rId4">
+            <a:extLst>
+              <a:ext uri="{28A0092B-C50C-407E-A947-70E740481C1C}">
+                <a14:useLocalDpi xmlns:a14="http://schemas.microsoft.com/office/drawing/2010/main" val="0"/>
+              </a:ext>
+              <a:ext uri="{96DAC541-7B7A-43D3-8B79-37D633B846F1}">
+                <asvg:svgBlip xmlns:asvg="http://schemas.microsoft.com/office/drawing/2016/SVG/main" r:embed="rId5"/>
+              </a:ext>
+            </a:extLst>
+          </a:blip>
+          <a:stretch>
+            <a:fillRect/>
+          </a:stretch>
+        </p:blipFill>
+        <p:spPr>
+          <a:xfrm>
+            <a:off x="10091197" y="1102440"/>
+            <a:ext cx="1681703" cy="1681703"/>
+          </a:xfrm>
+          <a:prstGeom prst="rect">
+            <a:avLst/>
+          </a:prstGeom>
+        </p:spPr>
+      </p:pic>
     </p:spTree>
     <p:extLst>
       <p:ext uri="{BB962C8B-B14F-4D97-AF65-F5344CB8AC3E}">
@@ -3487,7 +8276,7 @@
 </p:sld>
 </file>
 
-<file path=ppt/slides/slide2.xml><?xml version="1.0" encoding="utf-8"?>
+<file path=ppt/slides/slide3.xml><?xml version="1.0" encoding="utf-8"?>
 <p:sld xmlns:a="http://schemas.openxmlformats.org/drawingml/2006/main" xmlns:r="http://schemas.openxmlformats.org/officeDocument/2006/relationships" xmlns:p="http://schemas.openxmlformats.org/presentationml/2006/main">
   <p:cSld>
     <p:bg>
@@ -3520,10 +8309,10 @@
       </p:grpSpPr>
       <p:sp useBgFill="1">
         <p:nvSpPr>
-          <p:cNvPr id="10" name="Rectangle 9">
-            <a:extLst>
-              <a:ext uri="{FF2B5EF4-FFF2-40B4-BE49-F238E27FC236}">
-                <a16:creationId xmlns:a16="http://schemas.microsoft.com/office/drawing/2014/main" id="{BCED4D40-4B67-4331-AC48-79B82B4A47D8}"/>
+          <p:cNvPr id="28" name="Rectangle 27">
+            <a:extLst>
+              <a:ext uri="{FF2B5EF4-FFF2-40B4-BE49-F238E27FC236}">
+                <a16:creationId xmlns:a16="http://schemas.microsoft.com/office/drawing/2014/main" id="{C4879EFC-8E62-4E00-973C-C45EE9EC676D}"/>
               </a:ext>
               <a:ext uri="{C183D7F6-B498-43B3-948B-1728B52AA6E4}">
                 <adec:decorative xmlns:adec="http://schemas.microsoft.com/office/drawing/2017/decorative" val="1"/>
@@ -3544,7 +8333,7 @@
         <p:spPr>
           <a:xfrm>
             <a:off x="0" y="0"/>
-            <a:ext cx="12192000" cy="6858000"/>
+            <a:ext cx="12188952" cy="6858000"/>
           </a:xfrm>
           <a:prstGeom prst="rect">
             <a:avLst/>
@@ -3596,13 +8385,13 @@
         </p:nvSpPr>
         <p:spPr>
           <a:xfrm>
-            <a:off x="638881" y="417576"/>
-            <a:ext cx="10909640" cy="342708"/>
+            <a:off x="447812" y="-130915"/>
+            <a:ext cx="10909640" cy="1368614"/>
           </a:xfrm>
         </p:spPr>
         <p:txBody>
           <a:bodyPr anchor="ctr">
-            <a:normAutofit fontScale="90000"/>
+            <a:normAutofit/>
           </a:bodyPr>
           <a:lstStyle/>
           <a:p>
@@ -3619,10 +8408,10 @@
       </p:sp>
       <p:sp>
         <p:nvSpPr>
-          <p:cNvPr id="12" name="sketch line">
-            <a:extLst>
-              <a:ext uri="{FF2B5EF4-FFF2-40B4-BE49-F238E27FC236}">
-                <a16:creationId xmlns:a16="http://schemas.microsoft.com/office/drawing/2014/main" id="{670CEDEF-4F34-412E-84EE-329C1E936AF5}"/>
+          <p:cNvPr id="30" name="sketch line">
+            <a:extLst>
+              <a:ext uri="{FF2B5EF4-FFF2-40B4-BE49-F238E27FC236}">
+                <a16:creationId xmlns:a16="http://schemas.microsoft.com/office/drawing/2014/main" id="{D6A9C53F-5F90-40A5-8C85-5412D39C8C68}"/>
               </a:ext>
               <a:ext uri="{C183D7F6-B498-43B3-948B-1728B52AA6E4}">
                 <adec:decorative xmlns:adec="http://schemas.microsoft.com/office/drawing/2017/decorative" val="1"/>
@@ -3642,46 +8431,38 @@
         </p:nvSpPr>
         <p:spPr>
           <a:xfrm>
-            <a:off x="3807702" y="1733454"/>
-            <a:ext cx="4572000" cy="18288"/>
+            <a:off x="4450080" y="1850683"/>
+            <a:ext cx="3291840" cy="18288"/>
           </a:xfrm>
           <a:custGeom>
             <a:avLst/>
             <a:gdLst>
-              <a:gd name="connsiteX0" fmla="*/ 0 w 4572000"/>
+              <a:gd name="connsiteX0" fmla="*/ 0 w 3291840"/>
               <a:gd name="connsiteY0" fmla="*/ 0 h 18288"/>
-              <a:gd name="connsiteX1" fmla="*/ 515983 w 4572000"/>
+              <a:gd name="connsiteX1" fmla="*/ 658368 w 3291840"/>
               <a:gd name="connsiteY1" fmla="*/ 0 h 18288"/>
-              <a:gd name="connsiteX2" fmla="*/ 1031966 w 4572000"/>
+              <a:gd name="connsiteX2" fmla="*/ 1283818 w 3291840"/>
               <a:gd name="connsiteY2" fmla="*/ 0 h 18288"/>
-              <a:gd name="connsiteX3" fmla="*/ 1639389 w 4572000"/>
+              <a:gd name="connsiteX3" fmla="*/ 1909267 w 3291840"/>
               <a:gd name="connsiteY3" fmla="*/ 0 h 18288"/>
-              <a:gd name="connsiteX4" fmla="*/ 2383971 w 4572000"/>
+              <a:gd name="connsiteX4" fmla="*/ 2633472 w 3291840"/>
               <a:gd name="connsiteY4" fmla="*/ 0 h 18288"/>
-              <a:gd name="connsiteX5" fmla="*/ 2945674 w 4572000"/>
+              <a:gd name="connsiteX5" fmla="*/ 3291840 w 3291840"/>
               <a:gd name="connsiteY5" fmla="*/ 0 h 18288"/>
-              <a:gd name="connsiteX6" fmla="*/ 3507377 w 4572000"/>
-              <a:gd name="connsiteY6" fmla="*/ 0 h 18288"/>
-              <a:gd name="connsiteX7" fmla="*/ 4572000 w 4572000"/>
-              <a:gd name="connsiteY7" fmla="*/ 0 h 18288"/>
-              <a:gd name="connsiteX8" fmla="*/ 4572000 w 4572000"/>
+              <a:gd name="connsiteX6" fmla="*/ 3291840 w 3291840"/>
+              <a:gd name="connsiteY6" fmla="*/ 18288 h 18288"/>
+              <a:gd name="connsiteX7" fmla="*/ 2633472 w 3291840"/>
+              <a:gd name="connsiteY7" fmla="*/ 18288 h 18288"/>
+              <a:gd name="connsiteX8" fmla="*/ 2073859 w 3291840"/>
               <a:gd name="connsiteY8" fmla="*/ 18288 h 18288"/>
-              <a:gd name="connsiteX9" fmla="*/ 3873137 w 4572000"/>
+              <a:gd name="connsiteX9" fmla="*/ 1448410 w 3291840"/>
               <a:gd name="connsiteY9" fmla="*/ 18288 h 18288"/>
-              <a:gd name="connsiteX10" fmla="*/ 3311434 w 4572000"/>
+              <a:gd name="connsiteX10" fmla="*/ 822960 w 3291840"/>
               <a:gd name="connsiteY10" fmla="*/ 18288 h 18288"/>
-              <a:gd name="connsiteX11" fmla="*/ 2749731 w 4572000"/>
+              <a:gd name="connsiteX11" fmla="*/ 0 w 3291840"/>
               <a:gd name="connsiteY11" fmla="*/ 18288 h 18288"/>
-              <a:gd name="connsiteX12" fmla="*/ 2050869 w 4572000"/>
-              <a:gd name="connsiteY12" fmla="*/ 18288 h 18288"/>
-              <a:gd name="connsiteX13" fmla="*/ 1306286 w 4572000"/>
-              <a:gd name="connsiteY13" fmla="*/ 18288 h 18288"/>
-              <a:gd name="connsiteX14" fmla="*/ 790303 w 4572000"/>
-              <a:gd name="connsiteY14" fmla="*/ 18288 h 18288"/>
-              <a:gd name="connsiteX15" fmla="*/ 0 w 4572000"/>
-              <a:gd name="connsiteY15" fmla="*/ 18288 h 18288"/>
-              <a:gd name="connsiteX16" fmla="*/ 0 w 4572000"/>
-              <a:gd name="connsiteY16" fmla="*/ 0 h 18288"/>
+              <a:gd name="connsiteX12" fmla="*/ 0 w 3291840"/>
+              <a:gd name="connsiteY12" fmla="*/ 0 h 18288"/>
             </a:gdLst>
             <a:ahLst/>
             <a:cxnLst>
@@ -3724,189 +8505,137 @@
               <a:cxn ang="0">
                 <a:pos x="connsiteX12" y="connsiteY12"/>
               </a:cxn>
-              <a:cxn ang="0">
-                <a:pos x="connsiteX13" y="connsiteY13"/>
-              </a:cxn>
-              <a:cxn ang="0">
-                <a:pos x="connsiteX14" y="connsiteY14"/>
-              </a:cxn>
-              <a:cxn ang="0">
-                <a:pos x="connsiteX15" y="connsiteY15"/>
-              </a:cxn>
-              <a:cxn ang="0">
-                <a:pos x="connsiteX16" y="connsiteY16"/>
-              </a:cxn>
             </a:cxnLst>
             <a:rect l="l" t="t" r="r" b="b"/>
             <a:pathLst>
-              <a:path w="4572000" h="18288" fill="none" extrusionOk="0">
+              <a:path w="3291840" h="18288" fill="none" extrusionOk="0">
                 <a:moveTo>
                   <a:pt x="0" y="0"/>
                 </a:moveTo>
                 <a:cubicBezTo>
-                  <a:pt x="105156" y="-20963"/>
-                  <a:pt x="340432" y="822"/>
-                  <a:pt x="515983" y="0"/>
+                  <a:pt x="173077" y="-20031"/>
+                  <a:pt x="443104" y="6424"/>
+                  <a:pt x="658368" y="0"/>
                 </a:cubicBezTo>
                 <a:cubicBezTo>
-                  <a:pt x="691534" y="-822"/>
-                  <a:pt x="850679" y="16479"/>
-                  <a:pt x="1031966" y="0"/>
+                  <a:pt x="873632" y="-6424"/>
+                  <a:pt x="1034028" y="11764"/>
+                  <a:pt x="1283818" y="0"/>
                 </a:cubicBezTo>
                 <a:cubicBezTo>
-                  <a:pt x="1213253" y="-16479"/>
-                  <a:pt x="1443646" y="-18730"/>
-                  <a:pt x="1639389" y="0"/>
+                  <a:pt x="1533608" y="-11764"/>
+                  <a:pt x="1691227" y="-30112"/>
+                  <a:pt x="1909267" y="0"/>
                 </a:cubicBezTo>
                 <a:cubicBezTo>
-                  <a:pt x="1835132" y="18730"/>
-                  <a:pt x="2159975" y="18531"/>
-                  <a:pt x="2383971" y="0"/>
+                  <a:pt x="2127307" y="30112"/>
+                  <a:pt x="2272465" y="-18735"/>
+                  <a:pt x="2633472" y="0"/>
                 </a:cubicBezTo>
                 <a:cubicBezTo>
-                  <a:pt x="2607967" y="-18531"/>
-                  <a:pt x="2719096" y="-12030"/>
-                  <a:pt x="2945674" y="0"/>
+                  <a:pt x="2994479" y="18735"/>
+                  <a:pt x="3023324" y="-32030"/>
+                  <a:pt x="3291840" y="0"/>
                 </a:cubicBezTo>
                 <a:cubicBezTo>
-                  <a:pt x="3172252" y="12030"/>
-                  <a:pt x="3269167" y="27666"/>
-                  <a:pt x="3507377" y="0"/>
+                  <a:pt x="3291406" y="7551"/>
+                  <a:pt x="3291373" y="9822"/>
+                  <a:pt x="3291840" y="18288"/>
                 </a:cubicBezTo>
                 <a:cubicBezTo>
-                  <a:pt x="3745587" y="-27666"/>
-                  <a:pt x="4116741" y="18705"/>
-                  <a:pt x="4572000" y="0"/>
+                  <a:pt x="3048445" y="38989"/>
+                  <a:pt x="2846548" y="-14400"/>
+                  <a:pt x="2633472" y="18288"/>
                 </a:cubicBezTo>
                 <a:cubicBezTo>
-                  <a:pt x="4572895" y="8974"/>
-                  <a:pt x="4571454" y="9359"/>
-                  <a:pt x="4572000" y="18288"/>
+                  <a:pt x="2420396" y="50976"/>
+                  <a:pt x="2304099" y="6336"/>
+                  <a:pt x="2073859" y="18288"/>
                 </a:cubicBezTo>
                 <a:cubicBezTo>
-                  <a:pt x="4374698" y="3942"/>
-                  <a:pt x="4098874" y="-11042"/>
-                  <a:pt x="3873137" y="18288"/>
+                  <a:pt x="1843619" y="30240"/>
+                  <a:pt x="1706926" y="10778"/>
+                  <a:pt x="1448410" y="18288"/>
                 </a:cubicBezTo>
                 <a:cubicBezTo>
-                  <a:pt x="3647400" y="47618"/>
-                  <a:pt x="3517055" y="5421"/>
-                  <a:pt x="3311434" y="18288"/>
+                  <a:pt x="1189894" y="25798"/>
+                  <a:pt x="1002278" y="8992"/>
+                  <a:pt x="822960" y="18288"/>
                 </a:cubicBezTo>
                 <a:cubicBezTo>
-                  <a:pt x="3105813" y="31155"/>
-                  <a:pt x="3025168" y="17856"/>
-                  <a:pt x="2749731" y="18288"/>
-                </a:cubicBezTo>
-                <a:cubicBezTo>
-                  <a:pt x="2474294" y="18720"/>
-                  <a:pt x="2291766" y="-14168"/>
-                  <a:pt x="2050869" y="18288"/>
-                </a:cubicBezTo>
-                <a:cubicBezTo>
-                  <a:pt x="1809972" y="50744"/>
-                  <a:pt x="1540276" y="46798"/>
-                  <a:pt x="1306286" y="18288"/>
-                </a:cubicBezTo>
-                <a:cubicBezTo>
-                  <a:pt x="1072296" y="-10222"/>
-                  <a:pt x="972445" y="19645"/>
-                  <a:pt x="790303" y="18288"/>
-                </a:cubicBezTo>
-                <a:cubicBezTo>
-                  <a:pt x="608161" y="16931"/>
-                  <a:pt x="200981" y="8241"/>
+                  <a:pt x="643642" y="27585"/>
+                  <a:pt x="307039" y="38051"/>
                   <a:pt x="0" y="18288"/>
                 </a:cubicBezTo>
                 <a:cubicBezTo>
-                  <a:pt x="-229" y="14222"/>
-                  <a:pt x="509" y="5816"/>
+                  <a:pt x="60" y="11696"/>
+                  <a:pt x="66" y="3758"/>
                   <a:pt x="0" y="0"/>
                 </a:cubicBezTo>
                 <a:close/>
               </a:path>
-              <a:path w="4572000" h="18288" stroke="0" extrusionOk="0">
+              <a:path w="3291840" h="18288" stroke="0" extrusionOk="0">
                 <a:moveTo>
                   <a:pt x="0" y="0"/>
                 </a:moveTo>
                 <a:cubicBezTo>
-                  <a:pt x="143285" y="-9565"/>
-                  <a:pt x="327959" y="-11498"/>
-                  <a:pt x="561703" y="0"/>
+                  <a:pt x="195850" y="28018"/>
+                  <a:pt x="434891" y="17390"/>
+                  <a:pt x="592531" y="0"/>
                 </a:cubicBezTo>
                 <a:cubicBezTo>
-                  <a:pt x="795447" y="11498"/>
-                  <a:pt x="838260" y="18255"/>
-                  <a:pt x="1077686" y="0"/>
+                  <a:pt x="750171" y="-17390"/>
+                  <a:pt x="1018709" y="32200"/>
+                  <a:pt x="1316736" y="0"/>
                 </a:cubicBezTo>
                 <a:cubicBezTo>
-                  <a:pt x="1317112" y="-18255"/>
-                  <a:pt x="1437472" y="23514"/>
-                  <a:pt x="1639389" y="0"/>
+                  <a:pt x="1614763" y="-32200"/>
+                  <a:pt x="1696480" y="-11367"/>
+                  <a:pt x="1876349" y="0"/>
                 </a:cubicBezTo>
                 <a:cubicBezTo>
-                  <a:pt x="1841306" y="-23514"/>
-                  <a:pt x="2037142" y="-12551"/>
-                  <a:pt x="2292531" y="0"/>
+                  <a:pt x="2056218" y="11367"/>
+                  <a:pt x="2193364" y="13433"/>
+                  <a:pt x="2435962" y="0"/>
                 </a:cubicBezTo>
                 <a:cubicBezTo>
-                  <a:pt x="2547920" y="12551"/>
-                  <a:pt x="2810436" y="-20352"/>
-                  <a:pt x="2991394" y="0"/>
+                  <a:pt x="2678560" y="-13433"/>
+                  <a:pt x="3010901" y="-42367"/>
+                  <a:pt x="3291840" y="0"/>
                 </a:cubicBezTo>
                 <a:cubicBezTo>
-                  <a:pt x="3172352" y="20352"/>
-                  <a:pt x="3530025" y="-13347"/>
-                  <a:pt x="3735977" y="0"/>
+                  <a:pt x="3291758" y="4406"/>
+                  <a:pt x="3291751" y="9982"/>
+                  <a:pt x="3291840" y="18288"/>
                 </a:cubicBezTo>
                 <a:cubicBezTo>
-                  <a:pt x="3941929" y="13347"/>
-                  <a:pt x="4161497" y="34086"/>
-                  <a:pt x="4572000" y="0"/>
+                  <a:pt x="3108993" y="14228"/>
+                  <a:pt x="2952658" y="46900"/>
+                  <a:pt x="2666390" y="18288"/>
                 </a:cubicBezTo>
                 <a:cubicBezTo>
-                  <a:pt x="4571545" y="6162"/>
-                  <a:pt x="4571903" y="11775"/>
-                  <a:pt x="4572000" y="18288"/>
+                  <a:pt x="2380122" y="-10324"/>
+                  <a:pt x="2263855" y="41055"/>
+                  <a:pt x="2040941" y="18288"/>
                 </a:cubicBezTo>
                 <a:cubicBezTo>
-                  <a:pt x="4228040" y="36490"/>
-                  <a:pt x="4199736" y="42557"/>
-                  <a:pt x="3873137" y="18288"/>
+                  <a:pt x="1818027" y="-4479"/>
+                  <a:pt x="1675097" y="6509"/>
+                  <a:pt x="1415491" y="18288"/>
                 </a:cubicBezTo>
                 <a:cubicBezTo>
-                  <a:pt x="3546538" y="-5981"/>
-                  <a:pt x="3472124" y="16809"/>
-                  <a:pt x="3128554" y="18288"/>
+                  <a:pt x="1155885" y="30068"/>
+                  <a:pt x="852976" y="36210"/>
+                  <a:pt x="691286" y="18288"/>
                 </a:cubicBezTo>
                 <a:cubicBezTo>
-                  <a:pt x="2784984" y="19767"/>
-                  <a:pt x="2735896" y="-17781"/>
-                  <a:pt x="2383971" y="18288"/>
-                </a:cubicBezTo>
-                <a:cubicBezTo>
-                  <a:pt x="2032046" y="54357"/>
-                  <a:pt x="2019324" y="2920"/>
-                  <a:pt x="1867989" y="18288"/>
-                </a:cubicBezTo>
-                <a:cubicBezTo>
-                  <a:pt x="1716654" y="33656"/>
-                  <a:pt x="1418675" y="32575"/>
-                  <a:pt x="1169126" y="18288"/>
-                </a:cubicBezTo>
-                <a:cubicBezTo>
-                  <a:pt x="919577" y="4001"/>
-                  <a:pt x="798537" y="16165"/>
-                  <a:pt x="561703" y="18288"/>
-                </a:cubicBezTo>
-                <a:cubicBezTo>
-                  <a:pt x="324869" y="20411"/>
-                  <a:pt x="221395" y="-912"/>
+                  <a:pt x="529596" y="366"/>
+                  <a:pt x="187183" y="13912"/>
                   <a:pt x="0" y="18288"/>
                 </a:cubicBezTo>
                 <a:cubicBezTo>
-                  <a:pt x="766" y="10800"/>
-                  <a:pt x="-457" y="8180"/>
+                  <a:pt x="189" y="14288"/>
+                  <a:pt x="-703" y="3747"/>
                   <a:pt x="0" y="0"/>
                 </a:cubicBezTo>
                 <a:close/>
@@ -3923,7 +8652,7 @@
             <a:round/>
             <a:extLst>
               <a:ext uri="{C807C97D-BFC1-408E-A445-0C87EB9F89A2}">
-                <ask:lineSketchStyleProps xmlns:ask="http://schemas.microsoft.com/office/drawing/2018/sketchyshapes" sd="2727557108">
+                <ask:lineSketchStyleProps xmlns:ask="http://schemas.microsoft.com/office/drawing/2018/sketchyshapes" sd="2863741219">
                   <a:prstGeom prst="rect">
                     <a:avLst/>
                   </a:prstGeom>
@@ -3962,10 +8691,10 @@
       </p:sp>
       <p:pic>
         <p:nvPicPr>
-          <p:cNvPr id="5" name="Picture 4" descr="A screenshot of a computer&#10;&#10;AI-generated content may be incorrect.">
-            <a:extLst>
-              <a:ext uri="{FF2B5EF4-FFF2-40B4-BE49-F238E27FC236}">
-                <a16:creationId xmlns:a16="http://schemas.microsoft.com/office/drawing/2014/main" id="{EC95119D-E0E4-0DD6-4743-357F7E62F7E5}"/>
+          <p:cNvPr id="3" name="Picture 2" descr="A screenshot of a computer&#10;&#10;AI-generated content may be incorrect.">
+            <a:extLst>
+              <a:ext uri="{FF2B5EF4-FFF2-40B4-BE49-F238E27FC236}">
+                <a16:creationId xmlns:a16="http://schemas.microsoft.com/office/drawing/2014/main" id="{16EAA18B-29EC-6996-3AA0-8E88408A1621}"/>
               </a:ext>
             </a:extLst>
           </p:cNvPr>
@@ -3976,14 +8705,15 @@
         </p:nvPicPr>
         <p:blipFill>
           <a:blip r:embed="rId2"/>
+          <a:srcRect t="2171" r="-1" b="8662"/>
           <a:stretch>
             <a:fillRect/>
           </a:stretch>
         </p:blipFill>
         <p:spPr>
           <a:xfrm>
-            <a:off x="446672" y="1177860"/>
-            <a:ext cx="5593970" cy="2496953"/>
+            <a:off x="3823987" y="3850569"/>
+            <a:ext cx="3917933" cy="2550231"/>
           </a:xfrm>
           <a:prstGeom prst="rect">
             <a:avLst/>
@@ -3992,10 +8722,10 @@
       </p:pic>
       <p:pic>
         <p:nvPicPr>
-          <p:cNvPr id="6" name="Picture 5">
-            <a:extLst>
-              <a:ext uri="{FF2B5EF4-FFF2-40B4-BE49-F238E27FC236}">
-                <a16:creationId xmlns:a16="http://schemas.microsoft.com/office/drawing/2014/main" id="{77B0485A-2984-12FF-EF3F-7F88A53C085E}"/>
+          <p:cNvPr id="9" name="Picture 8" descr="A screenshot of a computer&#10;&#10;AI-generated content may be incorrect.">
+            <a:extLst>
+              <a:ext uri="{FF2B5EF4-FFF2-40B4-BE49-F238E27FC236}">
+                <a16:creationId xmlns:a16="http://schemas.microsoft.com/office/drawing/2014/main" id="{3BA28356-9508-44DC-93AD-1572A5A31FF3}"/>
               </a:ext>
             </a:extLst>
           </p:cNvPr>
@@ -4012,38 +8742,8 @@
         </p:blipFill>
         <p:spPr>
           <a:xfrm>
-            <a:off x="3972927" y="2724912"/>
-            <a:ext cx="8337953" cy="4133088"/>
-          </a:xfrm>
-          <a:prstGeom prst="rect">
-            <a:avLst/>
-          </a:prstGeom>
-        </p:spPr>
-      </p:pic>
-      <p:pic>
-        <p:nvPicPr>
-          <p:cNvPr id="8" name="Picture 7" descr="A screenshot of a computer&#10;&#10;AI-generated content may be incorrect.">
-            <a:extLst>
-              <a:ext uri="{FF2B5EF4-FFF2-40B4-BE49-F238E27FC236}">
-                <a16:creationId xmlns:a16="http://schemas.microsoft.com/office/drawing/2014/main" id="{C1C63702-BF44-CF7E-7394-A73679149AB2}"/>
-              </a:ext>
-            </a:extLst>
-          </p:cNvPr>
-          <p:cNvPicPr>
-            <a:picLocks noChangeAspect="1"/>
-          </p:cNvPicPr>
-          <p:nvPr/>
-        </p:nvPicPr>
-        <p:blipFill>
-          <a:blip r:embed="rId4"/>
-          <a:stretch>
-            <a:fillRect/>
-          </a:stretch>
-        </p:blipFill>
-        <p:spPr>
-          <a:xfrm>
-            <a:off x="384956" y="4092389"/>
-            <a:ext cx="3203015" cy="2227956"/>
+            <a:off x="1922544" y="1001456"/>
+            <a:ext cx="7720817" cy="2953211"/>
           </a:xfrm>
           <a:prstGeom prst="rect">
             <a:avLst/>
@@ -4060,6 +8760,214 @@
   <p:clrMapOvr>
     <a:masterClrMapping/>
   </p:clrMapOvr>
+</p:sld>
+</file>
+
+<file path=ppt/slides/slide4.xml><?xml version="1.0" encoding="utf-8"?>
+<p:sld xmlns:a="http://schemas.openxmlformats.org/drawingml/2006/main" xmlns:r="http://schemas.openxmlformats.org/officeDocument/2006/relationships" xmlns:p="http://schemas.openxmlformats.org/presentationml/2006/main">
+  <p:cSld>
+    <p:bg>
+      <p:bgPr>
+        <a:solidFill>
+          <a:schemeClr val="bg1"/>
+        </a:solidFill>
+        <a:effectLst/>
+      </p:bgPr>
+    </p:bg>
+    <p:spTree>
+      <p:nvGrpSpPr>
+        <p:cNvPr id="1" name="">
+          <a:extLst>
+            <a:ext uri="{FF2B5EF4-FFF2-40B4-BE49-F238E27FC236}">
+              <a16:creationId xmlns:a16="http://schemas.microsoft.com/office/drawing/2014/main" id="{725C239C-8EFF-6903-70E6-59EB431F38DE}"/>
+            </a:ext>
+          </a:extLst>
+        </p:cNvPr>
+        <p:cNvGrpSpPr/>
+        <p:nvPr/>
+      </p:nvGrpSpPr>
+      <p:grpSpPr>
+        <a:xfrm>
+          <a:off x="0" y="0"/>
+          <a:ext cx="0" cy="0"/>
+          <a:chOff x="0" y="0"/>
+          <a:chExt cx="0" cy="0"/>
+        </a:xfrm>
+      </p:grpSpPr>
+      <p:sp>
+        <p:nvSpPr>
+          <p:cNvPr id="2" name="Title 1">
+            <a:extLst>
+              <a:ext uri="{FF2B5EF4-FFF2-40B4-BE49-F238E27FC236}">
+                <a16:creationId xmlns:a16="http://schemas.microsoft.com/office/drawing/2014/main" id="{3EF5611D-5ED2-F33E-A178-5FC74B99BD03}"/>
+              </a:ext>
+            </a:extLst>
+          </p:cNvPr>
+          <p:cNvSpPr>
+            <a:spLocks noGrp="1"/>
+          </p:cNvSpPr>
+          <p:nvPr>
+            <p:ph type="ctrTitle"/>
+          </p:nvPr>
+        </p:nvSpPr>
+        <p:spPr>
+          <a:xfrm>
+            <a:off x="640080" y="5576887"/>
+            <a:ext cx="10911840" cy="640081"/>
+          </a:xfrm>
+        </p:spPr>
+        <p:txBody>
+          <a:bodyPr vert="horz" lIns="91440" tIns="45720" rIns="91440" bIns="45720" rtlCol="0" anchor="ctr">
+            <a:normAutofit/>
+          </a:bodyPr>
+          <a:lstStyle/>
+          <a:p>
+            <a:r>
+              <a:rPr lang="en-US" sz="3200"/>
+              <a:t>LangFuse Screenshots</a:t>
+            </a:r>
+          </a:p>
+        </p:txBody>
+      </p:sp>
+      <p:pic>
+        <p:nvPicPr>
+          <p:cNvPr id="6" name="Picture 5">
+            <a:extLst>
+              <a:ext uri="{FF2B5EF4-FFF2-40B4-BE49-F238E27FC236}">
+                <a16:creationId xmlns:a16="http://schemas.microsoft.com/office/drawing/2014/main" id="{2C31DEF1-79B6-8EB4-64B1-3F004CA86FFB}"/>
+              </a:ext>
+            </a:extLst>
+          </p:cNvPr>
+          <p:cNvPicPr>
+            <a:picLocks noChangeAspect="1"/>
+          </p:cNvPicPr>
+          <p:nvPr/>
+        </p:nvPicPr>
+        <p:blipFill>
+          <a:blip r:embed="rId2"/>
+          <a:srcRect r="1" b="10454"/>
+          <a:stretch>
+            <a:fillRect/>
+          </a:stretch>
+        </p:blipFill>
+        <p:spPr>
+          <a:xfrm>
+            <a:off x="640080" y="640080"/>
+            <a:ext cx="10911840" cy="4836795"/>
+          </a:xfrm>
+          <a:prstGeom prst="rect">
+            <a:avLst/>
+          </a:prstGeom>
+          <a:ln w="19050">
+            <a:solidFill>
+              <a:schemeClr val="tx1"/>
+            </a:solidFill>
+            <a:miter lim="800000"/>
+          </a:ln>
+        </p:spPr>
+      </p:pic>
+    </p:spTree>
+    <p:extLst>
+      <p:ext uri="{BB962C8B-B14F-4D97-AF65-F5344CB8AC3E}">
+        <p14:creationId xmlns:p14="http://schemas.microsoft.com/office/powerpoint/2010/main" val="4007531431"/>
+      </p:ext>
+    </p:extLst>
+  </p:cSld>
+  <p:clrMapOvr>
+    <a:overrideClrMapping bg1="dk1" tx1="lt1" bg2="dk2" tx2="lt2" accent1="accent1" accent2="accent2" accent3="accent3" accent4="accent4" accent5="accent5" accent6="accent6" hlink="hlink" folHlink="folHlink"/>
+  </p:clrMapOvr>
+  <p:timing>
+    <p:tnLst>
+      <p:par>
+        <p:cTn id="1" dur="indefinite" restart="never" nodeType="tmRoot">
+          <p:childTnLst>
+            <p:seq concurrent="1" nextAc="seek">
+              <p:cTn id="2" dur="indefinite" nodeType="mainSeq">
+                <p:childTnLst>
+                  <p:par>
+                    <p:cTn id="3" fill="hold">
+                      <p:stCondLst>
+                        <p:cond delay="indefinite"/>
+                        <p:cond evt="onBegin" delay="0">
+                          <p:tn val="2"/>
+                        </p:cond>
+                      </p:stCondLst>
+                      <p:childTnLst>
+                        <p:par>
+                          <p:cTn id="4" fill="hold">
+                            <p:stCondLst>
+                              <p:cond delay="0"/>
+                            </p:stCondLst>
+                            <p:childTnLst>
+                              <p:par>
+                                <p:cTn id="5" presetID="10" presetClass="entr" presetSubtype="0" fill="hold" grpId="0" nodeType="withEffect">
+                                  <p:stCondLst>
+                                    <p:cond delay="1000"/>
+                                  </p:stCondLst>
+                                  <p:iterate>
+                                    <p:tmPct val="10000"/>
+                                  </p:iterate>
+                                  <p:childTnLst>
+                                    <p:set>
+                                      <p:cBhvr>
+                                        <p:cTn id="6" dur="1" fill="hold">
+                                          <p:stCondLst>
+                                            <p:cond delay="0"/>
+                                          </p:stCondLst>
+                                        </p:cTn>
+                                        <p:tgtEl>
+                                          <p:spTgt spid="2"/>
+                                        </p:tgtEl>
+                                        <p:attrNameLst>
+                                          <p:attrName>style.visibility</p:attrName>
+                                        </p:attrNameLst>
+                                      </p:cBhvr>
+                                      <p:to>
+                                        <p:strVal val="visible"/>
+                                      </p:to>
+                                    </p:set>
+                                    <p:animEffect transition="in" filter="fade">
+                                      <p:cBhvr>
+                                        <p:cTn id="7" dur="700"/>
+                                        <p:tgtEl>
+                                          <p:spTgt spid="2"/>
+                                        </p:tgtEl>
+                                      </p:cBhvr>
+                                    </p:animEffect>
+                                  </p:childTnLst>
+                                </p:cTn>
+                              </p:par>
+                            </p:childTnLst>
+                          </p:cTn>
+                        </p:par>
+                      </p:childTnLst>
+                    </p:cTn>
+                  </p:par>
+                </p:childTnLst>
+              </p:cTn>
+              <p:prevCondLst>
+                <p:cond evt="onPrev" delay="0">
+                  <p:tgtEl>
+                    <p:sldTgt/>
+                  </p:tgtEl>
+                </p:cond>
+              </p:prevCondLst>
+              <p:nextCondLst>
+                <p:cond evt="onNext" delay="0">
+                  <p:tgtEl>
+                    <p:sldTgt/>
+                  </p:tgtEl>
+                </p:cond>
+              </p:nextCondLst>
+            </p:seq>
+          </p:childTnLst>
+        </p:cTn>
+      </p:par>
+    </p:tnLst>
+    <p:bldLst>
+      <p:bldP spid="2" grpId="0"/>
+    </p:bldLst>
+  </p:timing>
 </p:sld>
 </file>
 
@@ -4376,4 +9284,657 @@
     </a:ext>
   </a:extLst>
 </a:theme>
+</file>
+
+<file path=ppt/theme/theme2.xml><?xml version="1.0" encoding="utf-8"?>
+<a:theme xmlns:a="http://schemas.openxmlformats.org/drawingml/2006/main" name="1_Office Theme">
+  <a:themeElements>
+    <a:clrScheme name="Presidio 2021">
+      <a:dk1>
+        <a:srgbClr val="000000"/>
+      </a:dk1>
+      <a:lt1>
+        <a:srgbClr val="FFFFFF"/>
+      </a:lt1>
+      <a:dk2>
+        <a:srgbClr val="007EB8"/>
+      </a:dk2>
+      <a:lt2>
+        <a:srgbClr val="EEECE1"/>
+      </a:lt2>
+      <a:accent1>
+        <a:srgbClr val="0080BA"/>
+      </a:accent1>
+      <a:accent2>
+        <a:srgbClr val="FF9901"/>
+      </a:accent2>
+      <a:accent3>
+        <a:srgbClr val="989998"/>
+      </a:accent3>
+      <a:accent4>
+        <a:srgbClr val="71D24B"/>
+      </a:accent4>
+      <a:accent5>
+        <a:srgbClr val="616062"/>
+      </a:accent5>
+      <a:accent6>
+        <a:srgbClr val="00447A"/>
+      </a:accent6>
+      <a:hlink>
+        <a:srgbClr val="05ABEF"/>
+      </a:hlink>
+      <a:folHlink>
+        <a:srgbClr val="00447A"/>
+      </a:folHlink>
+    </a:clrScheme>
+    <a:fontScheme name="Arial">
+      <a:majorFont>
+        <a:latin typeface="Arial" panose="020B0604020202020204"/>
+        <a:ea typeface=""/>
+        <a:cs typeface=""/>
+        <a:font script="Jpan" typeface="ＭＳ Ｐゴシック"/>
+        <a:font script="Hang" typeface="굴림"/>
+        <a:font script="Hans" typeface="黑体"/>
+        <a:font script="Hant" typeface="微軟正黑體"/>
+        <a:font script="Arab" typeface="Arial"/>
+        <a:font script="Hebr" typeface="Arial"/>
+        <a:font script="Thai" typeface="Cordia New"/>
+        <a:font script="Ethi" typeface="Nyala"/>
+        <a:font script="Beng" typeface="Vrinda"/>
+        <a:font script="Gujr" typeface="Shruti"/>
+        <a:font script="Khmr" typeface="DaunPenh"/>
+        <a:font script="Knda" typeface="Tunga"/>
+        <a:font script="Guru" typeface="Raavi"/>
+        <a:font script="Cans" typeface="Euphemia"/>
+        <a:font script="Cher" typeface="Plantagenet Cherokee"/>
+        <a:font script="Yiii" typeface="Microsoft Yi Baiti"/>
+        <a:font script="Tibt" typeface="Microsoft Himalaya"/>
+        <a:font script="Thaa" typeface="MV Boli"/>
+        <a:font script="Deva" typeface="Mangal"/>
+        <a:font script="Telu" typeface="Gautami"/>
+        <a:font script="Taml" typeface="Latha"/>
+        <a:font script="Syrc" typeface="Estrangelo Edessa"/>
+        <a:font script="Orya" typeface="Kalinga"/>
+        <a:font script="Mlym" typeface="Kartika"/>
+        <a:font script="Laoo" typeface="DokChampa"/>
+        <a:font script="Sinh" typeface="Iskoola Pota"/>
+        <a:font script="Mong" typeface="Mongolian Baiti"/>
+        <a:font script="Viet" typeface="Arial"/>
+        <a:font script="Uigh" typeface="Microsoft Uighur"/>
+        <a:font script="Geor" typeface="Sylfaen"/>
+      </a:majorFont>
+      <a:minorFont>
+        <a:latin typeface="Arial" panose="020B0604020202020204"/>
+        <a:ea typeface=""/>
+        <a:cs typeface=""/>
+        <a:font script="Jpan" typeface="ＭＳ Ｐゴシック"/>
+        <a:font script="Hang" typeface="굴림"/>
+        <a:font script="Hans" typeface="黑体"/>
+        <a:font script="Hant" typeface="微軟正黑體"/>
+        <a:font script="Arab" typeface="Arial"/>
+        <a:font script="Hebr" typeface="Arial"/>
+        <a:font script="Thai" typeface="Cordia New"/>
+        <a:font script="Ethi" typeface="Nyala"/>
+        <a:font script="Beng" typeface="Vrinda"/>
+        <a:font script="Gujr" typeface="Shruti"/>
+        <a:font script="Khmr" typeface="DaunPenh"/>
+        <a:font script="Knda" typeface="Tunga"/>
+        <a:font script="Guru" typeface="Raavi"/>
+        <a:font script="Cans" typeface="Euphemia"/>
+        <a:font script="Cher" typeface="Plantagenet Cherokee"/>
+        <a:font script="Yiii" typeface="Microsoft Yi Baiti"/>
+        <a:font script="Tibt" typeface="Microsoft Himalaya"/>
+        <a:font script="Thaa" typeface="MV Boli"/>
+        <a:font script="Deva" typeface="Mangal"/>
+        <a:font script="Telu" typeface="Gautami"/>
+        <a:font script="Taml" typeface="Latha"/>
+        <a:font script="Syrc" typeface="Estrangelo Edessa"/>
+        <a:font script="Orya" typeface="Kalinga"/>
+        <a:font script="Mlym" typeface="Kartika"/>
+        <a:font script="Laoo" typeface="DokChampa"/>
+        <a:font script="Sinh" typeface="Iskoola Pota"/>
+        <a:font script="Mong" typeface="Mongolian Baiti"/>
+        <a:font script="Viet" typeface="Arial"/>
+        <a:font script="Uigh" typeface="Microsoft Uighur"/>
+        <a:font script="Geor" typeface="Sylfaen"/>
+      </a:minorFont>
+    </a:fontScheme>
+    <a:fmtScheme name="Office">
+      <a:fillStyleLst>
+        <a:solidFill>
+          <a:schemeClr val="phClr"/>
+        </a:solidFill>
+        <a:gradFill rotWithShape="1">
+          <a:gsLst>
+            <a:gs pos="0">
+              <a:schemeClr val="phClr">
+                <a:lumMod val="110000"/>
+                <a:satMod val="105000"/>
+                <a:tint val="67000"/>
+              </a:schemeClr>
+            </a:gs>
+            <a:gs pos="50000">
+              <a:schemeClr val="phClr">
+                <a:lumMod val="105000"/>
+                <a:satMod val="103000"/>
+                <a:tint val="73000"/>
+              </a:schemeClr>
+            </a:gs>
+            <a:gs pos="100000">
+              <a:schemeClr val="phClr">
+                <a:lumMod val="105000"/>
+                <a:satMod val="109000"/>
+                <a:tint val="81000"/>
+              </a:schemeClr>
+            </a:gs>
+          </a:gsLst>
+          <a:lin ang="5400000" scaled="0"/>
+        </a:gradFill>
+        <a:gradFill rotWithShape="1">
+          <a:gsLst>
+            <a:gs pos="0">
+              <a:schemeClr val="phClr">
+                <a:satMod val="103000"/>
+                <a:lumMod val="102000"/>
+                <a:tint val="94000"/>
+              </a:schemeClr>
+            </a:gs>
+            <a:gs pos="50000">
+              <a:schemeClr val="phClr">
+                <a:satMod val="110000"/>
+                <a:lumMod val="100000"/>
+                <a:shade val="100000"/>
+              </a:schemeClr>
+            </a:gs>
+            <a:gs pos="100000">
+              <a:schemeClr val="phClr">
+                <a:lumMod val="99000"/>
+                <a:satMod val="120000"/>
+                <a:shade val="78000"/>
+              </a:schemeClr>
+            </a:gs>
+          </a:gsLst>
+          <a:lin ang="5400000" scaled="0"/>
+        </a:gradFill>
+      </a:fillStyleLst>
+      <a:lnStyleLst>
+        <a:ln w="6350" cap="flat" cmpd="sng" algn="ctr">
+          <a:solidFill>
+            <a:schemeClr val="phClr"/>
+          </a:solidFill>
+          <a:prstDash val="solid"/>
+          <a:miter lim="800000"/>
+        </a:ln>
+        <a:ln w="12700" cap="flat" cmpd="sng" algn="ctr">
+          <a:solidFill>
+            <a:schemeClr val="phClr"/>
+          </a:solidFill>
+          <a:prstDash val="solid"/>
+          <a:miter lim="800000"/>
+        </a:ln>
+        <a:ln w="19050" cap="flat" cmpd="sng" algn="ctr">
+          <a:solidFill>
+            <a:schemeClr val="phClr"/>
+          </a:solidFill>
+          <a:prstDash val="solid"/>
+          <a:miter lim="800000"/>
+        </a:ln>
+      </a:lnStyleLst>
+      <a:effectStyleLst>
+        <a:effectStyle>
+          <a:effectLst/>
+        </a:effectStyle>
+        <a:effectStyle>
+          <a:effectLst/>
+        </a:effectStyle>
+        <a:effectStyle>
+          <a:effectLst>
+            <a:outerShdw blurRad="57150" dist="19050" dir="5400000" algn="ctr" rotWithShape="0">
+              <a:srgbClr val="000000">
+                <a:alpha val="63000"/>
+              </a:srgbClr>
+            </a:outerShdw>
+          </a:effectLst>
+        </a:effectStyle>
+      </a:effectStyleLst>
+      <a:bgFillStyleLst>
+        <a:solidFill>
+          <a:schemeClr val="phClr"/>
+        </a:solidFill>
+        <a:solidFill>
+          <a:schemeClr val="phClr">
+            <a:tint val="95000"/>
+            <a:satMod val="170000"/>
+          </a:schemeClr>
+        </a:solidFill>
+        <a:gradFill rotWithShape="1">
+          <a:gsLst>
+            <a:gs pos="0">
+              <a:schemeClr val="phClr">
+                <a:tint val="93000"/>
+                <a:satMod val="150000"/>
+                <a:shade val="98000"/>
+                <a:lumMod val="102000"/>
+              </a:schemeClr>
+            </a:gs>
+            <a:gs pos="50000">
+              <a:schemeClr val="phClr">
+                <a:tint val="98000"/>
+                <a:satMod val="130000"/>
+                <a:shade val="90000"/>
+                <a:lumMod val="103000"/>
+              </a:schemeClr>
+            </a:gs>
+            <a:gs pos="100000">
+              <a:schemeClr val="phClr">
+                <a:shade val="63000"/>
+                <a:satMod val="120000"/>
+              </a:schemeClr>
+            </a:gs>
+          </a:gsLst>
+          <a:lin ang="5400000" scaled="0"/>
+        </a:gradFill>
+      </a:bgFillStyleLst>
+    </a:fmtScheme>
+  </a:themeElements>
+  <a:objectDefaults>
+    <a:spDef>
+      <a:spPr>
+        <a:solidFill>
+          <a:schemeClr val="tx2"/>
+        </a:solidFill>
+        <a:ln>
+          <a:noFill/>
+        </a:ln>
+      </a:spPr>
+      <a:bodyPr rtlCol="0" anchor="ctr"/>
+      <a:lstStyle>
+        <a:defPPr algn="ctr">
+          <a:defRPr/>
+        </a:defPPr>
+      </a:lstStyle>
+      <a:style>
+        <a:lnRef idx="2">
+          <a:schemeClr val="accent1">
+            <a:shade val="50000"/>
+          </a:schemeClr>
+        </a:lnRef>
+        <a:fillRef idx="1">
+          <a:schemeClr val="accent1"/>
+        </a:fillRef>
+        <a:effectRef idx="0">
+          <a:schemeClr val="accent1"/>
+        </a:effectRef>
+        <a:fontRef idx="minor">
+          <a:schemeClr val="lt1"/>
+        </a:fontRef>
+      </a:style>
+    </a:spDef>
+    <a:lnDef>
+      <a:spPr>
+        <a:ln w="12700">
+          <a:solidFill>
+            <a:schemeClr val="bg1">
+              <a:lumMod val="75000"/>
+            </a:schemeClr>
+          </a:solidFill>
+        </a:ln>
+      </a:spPr>
+      <a:bodyPr/>
+      <a:lstStyle/>
+      <a:style>
+        <a:lnRef idx="1">
+          <a:schemeClr val="accent1"/>
+        </a:lnRef>
+        <a:fillRef idx="0">
+          <a:schemeClr val="accent1"/>
+        </a:fillRef>
+        <a:effectRef idx="0">
+          <a:schemeClr val="accent1"/>
+        </a:effectRef>
+        <a:fontRef idx="minor">
+          <a:schemeClr val="tx1"/>
+        </a:fontRef>
+      </a:style>
+    </a:lnDef>
+    <a:txDef>
+      <a:spPr>
+        <a:noFill/>
+      </a:spPr>
+      <a:bodyPr wrap="none" rtlCol="0">
+        <a:spAutoFit/>
+      </a:bodyPr>
+      <a:lstStyle>
+        <a:defPPr algn="l">
+          <a:defRPr dirty="0" err="1" smtClean="0">
+            <a:solidFill>
+              <a:schemeClr val="accent5"/>
+            </a:solidFill>
+          </a:defRPr>
+        </a:defPPr>
+      </a:lstStyle>
+    </a:txDef>
+  </a:objectDefaults>
+  <a:extraClrSchemeLst/>
+  <a:extLst>
+    <a:ext uri="{05A4C25C-085E-4340-85A3-A5531E510DB2}">
+      <thm15:themeFamily xmlns:thm15="http://schemas.microsoft.com/office/thememl/2012/main" name="Presidio-PPT-Template-2021-Extended-4" id="{3BA23201-E560-0F4E-BD6D-37308DC2288C}" vid="{AD364B24-90E8-FC4C-81D5-BA3F742A7A59}"/>
+    </a:ext>
+  </a:extLst>
+</a:theme>
+</file>
+
+<file path=ppt/theme/theme3.xml><?xml version="1.0" encoding="utf-8"?>
+<a:theme xmlns:a="http://schemas.openxmlformats.org/drawingml/2006/main" name="Office Theme">
+  <a:themeElements>
+    <a:clrScheme name="Office">
+      <a:dk1>
+        <a:sysClr val="windowText" lastClr="000000"/>
+      </a:dk1>
+      <a:lt1>
+        <a:sysClr val="window" lastClr="FFFFFF"/>
+      </a:lt1>
+      <a:dk2>
+        <a:srgbClr val="0E2841"/>
+      </a:dk2>
+      <a:lt2>
+        <a:srgbClr val="E8E8E8"/>
+      </a:lt2>
+      <a:accent1>
+        <a:srgbClr val="156082"/>
+      </a:accent1>
+      <a:accent2>
+        <a:srgbClr val="E97132"/>
+      </a:accent2>
+      <a:accent3>
+        <a:srgbClr val="196B24"/>
+      </a:accent3>
+      <a:accent4>
+        <a:srgbClr val="0F9ED5"/>
+      </a:accent4>
+      <a:accent5>
+        <a:srgbClr val="A02B93"/>
+      </a:accent5>
+      <a:accent6>
+        <a:srgbClr val="4EA72E"/>
+      </a:accent6>
+      <a:hlink>
+        <a:srgbClr val="467886"/>
+      </a:hlink>
+      <a:folHlink>
+        <a:srgbClr val="96607D"/>
+      </a:folHlink>
+    </a:clrScheme>
+    <a:fontScheme name="Office">
+      <a:majorFont>
+        <a:latin typeface="Aptos Display" panose="02110004020202020204"/>
+        <a:ea typeface=""/>
+        <a:cs typeface=""/>
+        <a:font script="Jpan" typeface="游ゴシック Light"/>
+        <a:font script="Hang" typeface="맑은 고딕"/>
+        <a:font script="Hans" typeface="等线 Light"/>
+        <a:font script="Hant" typeface="新細明體"/>
+        <a:font script="Arab" typeface="Times New Roman"/>
+        <a:font script="Hebr" typeface="Times New Roman"/>
+        <a:font script="Thai" typeface="Angsana New"/>
+        <a:font script="Ethi" typeface="Nyala"/>
+        <a:font script="Beng" typeface="Vrinda"/>
+        <a:font script="Gujr" typeface="Shruti"/>
+        <a:font script="Khmr" typeface="MoolBoran"/>
+        <a:font script="Knda" typeface="Tunga"/>
+        <a:font script="Guru" typeface="Raavi"/>
+        <a:font script="Cans" typeface="Euphemia"/>
+        <a:font script="Cher" typeface="Plantagenet Cherokee"/>
+        <a:font script="Yiii" typeface="Microsoft Yi Baiti"/>
+        <a:font script="Tibt" typeface="Microsoft Himalaya"/>
+        <a:font script="Thaa" typeface="MV Boli"/>
+        <a:font script="Deva" typeface="Mangal"/>
+        <a:font script="Telu" typeface="Gautami"/>
+        <a:font script="Taml" typeface="Latha"/>
+        <a:font script="Syrc" typeface="Estrangelo Edessa"/>
+        <a:font script="Orya" typeface="Kalinga"/>
+        <a:font script="Mlym" typeface="Kartika"/>
+        <a:font script="Laoo" typeface="DokChampa"/>
+        <a:font script="Sinh" typeface="Iskoola Pota"/>
+        <a:font script="Mong" typeface="Mongolian Baiti"/>
+        <a:font script="Viet" typeface="Times New Roman"/>
+        <a:font script="Uigh" typeface="Microsoft Uighur"/>
+        <a:font script="Geor" typeface="Sylfaen"/>
+        <a:font script="Armn" typeface="Arial"/>
+        <a:font script="Bugi" typeface="Leelawadee UI"/>
+        <a:font script="Bopo" typeface="Microsoft JhengHei"/>
+        <a:font script="Java" typeface="Javanese Text"/>
+        <a:font script="Lisu" typeface="Segoe UI"/>
+        <a:font script="Mymr" typeface="Myanmar Text"/>
+        <a:font script="Nkoo" typeface="Ebrima"/>
+        <a:font script="Olck" typeface="Nirmala UI"/>
+        <a:font script="Osma" typeface="Ebrima"/>
+        <a:font script="Phag" typeface="Phagspa"/>
+        <a:font script="Syrn" typeface="Estrangelo Edessa"/>
+        <a:font script="Syrj" typeface="Estrangelo Edessa"/>
+        <a:font script="Syre" typeface="Estrangelo Edessa"/>
+        <a:font script="Sora" typeface="Nirmala UI"/>
+        <a:font script="Tale" typeface="Microsoft Tai Le"/>
+        <a:font script="Talu" typeface="Microsoft New Tai Lue"/>
+        <a:font script="Tfng" typeface="Ebrima"/>
+      </a:majorFont>
+      <a:minorFont>
+        <a:latin typeface="Aptos" panose="02110004020202020204"/>
+        <a:ea typeface=""/>
+        <a:cs typeface=""/>
+        <a:font script="Jpan" typeface="游ゴシック"/>
+        <a:font script="Hang" typeface="맑은 고딕"/>
+        <a:font script="Hans" typeface="等线"/>
+        <a:font script="Hant" typeface="新細明體"/>
+        <a:font script="Arab" typeface="Arial"/>
+        <a:font script="Hebr" typeface="Arial"/>
+        <a:font script="Thai" typeface="Cordia New"/>
+        <a:font script="Ethi" typeface="Nyala"/>
+        <a:font script="Beng" typeface="Vrinda"/>
+        <a:font script="Gujr" typeface="Shruti"/>
+        <a:font script="Khmr" typeface="DaunPenh"/>
+        <a:font script="Knda" typeface="Tunga"/>
+        <a:font script="Guru" typeface="Raavi"/>
+        <a:font script="Cans" typeface="Euphemia"/>
+        <a:font script="Cher" typeface="Plantagenet Cherokee"/>
+        <a:font script="Yiii" typeface="Microsoft Yi Baiti"/>
+        <a:font script="Tibt" typeface="Microsoft Himalaya"/>
+        <a:font script="Thaa" typeface="MV Boli"/>
+        <a:font script="Deva" typeface="Mangal"/>
+        <a:font script="Telu" typeface="Gautami"/>
+        <a:font script="Taml" typeface="Latha"/>
+        <a:font script="Syrc" typeface="Estrangelo Edessa"/>
+        <a:font script="Orya" typeface="Kalinga"/>
+        <a:font script="Mlym" typeface="Kartika"/>
+        <a:font script="Laoo" typeface="DokChampa"/>
+        <a:font script="Sinh" typeface="Iskoola Pota"/>
+        <a:font script="Mong" typeface="Mongolian Baiti"/>
+        <a:font script="Viet" typeface="Arial"/>
+        <a:font script="Uigh" typeface="Microsoft Uighur"/>
+        <a:font script="Geor" typeface="Sylfaen"/>
+        <a:font script="Armn" typeface="Arial"/>
+        <a:font script="Bugi" typeface="Leelawadee UI"/>
+        <a:font script="Bopo" typeface="Microsoft JhengHei"/>
+        <a:font script="Java" typeface="Javanese Text"/>
+        <a:font script="Lisu" typeface="Segoe UI"/>
+        <a:font script="Mymr" typeface="Myanmar Text"/>
+        <a:font script="Nkoo" typeface="Ebrima"/>
+        <a:font script="Olck" typeface="Nirmala UI"/>
+        <a:font script="Osma" typeface="Ebrima"/>
+        <a:font script="Phag" typeface="Phagspa"/>
+        <a:font script="Syrn" typeface="Estrangelo Edessa"/>
+        <a:font script="Syrj" typeface="Estrangelo Edessa"/>
+        <a:font script="Syre" typeface="Estrangelo Edessa"/>
+        <a:font script="Sora" typeface="Nirmala UI"/>
+        <a:font script="Tale" typeface="Microsoft Tai Le"/>
+        <a:font script="Talu" typeface="Microsoft New Tai Lue"/>
+        <a:font script="Tfng" typeface="Ebrima"/>
+      </a:minorFont>
+    </a:fontScheme>
+    <a:fmtScheme name="Office">
+      <a:fillStyleLst>
+        <a:solidFill>
+          <a:schemeClr val="phClr"/>
+        </a:solidFill>
+        <a:gradFill rotWithShape="1">
+          <a:gsLst>
+            <a:gs pos="0">
+              <a:schemeClr val="phClr">
+                <a:lumMod val="110000"/>
+                <a:satMod val="105000"/>
+                <a:tint val="67000"/>
+              </a:schemeClr>
+            </a:gs>
+            <a:gs pos="50000">
+              <a:schemeClr val="phClr">
+                <a:lumMod val="105000"/>
+                <a:satMod val="103000"/>
+                <a:tint val="73000"/>
+              </a:schemeClr>
+            </a:gs>
+            <a:gs pos="100000">
+              <a:schemeClr val="phClr">
+                <a:lumMod val="105000"/>
+                <a:satMod val="109000"/>
+                <a:tint val="81000"/>
+              </a:schemeClr>
+            </a:gs>
+          </a:gsLst>
+          <a:lin ang="5400000" scaled="0"/>
+        </a:gradFill>
+        <a:gradFill rotWithShape="1">
+          <a:gsLst>
+            <a:gs pos="0">
+              <a:schemeClr val="phClr">
+                <a:satMod val="103000"/>
+                <a:lumMod val="102000"/>
+                <a:tint val="94000"/>
+              </a:schemeClr>
+            </a:gs>
+            <a:gs pos="50000">
+              <a:schemeClr val="phClr">
+                <a:satMod val="110000"/>
+                <a:lumMod val="100000"/>
+                <a:shade val="100000"/>
+              </a:schemeClr>
+            </a:gs>
+            <a:gs pos="100000">
+              <a:schemeClr val="phClr">
+                <a:lumMod val="99000"/>
+                <a:satMod val="120000"/>
+                <a:shade val="78000"/>
+              </a:schemeClr>
+            </a:gs>
+          </a:gsLst>
+          <a:lin ang="5400000" scaled="0"/>
+        </a:gradFill>
+      </a:fillStyleLst>
+      <a:lnStyleLst>
+        <a:ln w="12700" cap="flat" cmpd="sng" algn="ctr">
+          <a:solidFill>
+            <a:schemeClr val="phClr"/>
+          </a:solidFill>
+          <a:prstDash val="solid"/>
+          <a:miter lim="800000"/>
+        </a:ln>
+        <a:ln w="19050" cap="flat" cmpd="sng" algn="ctr">
+          <a:solidFill>
+            <a:schemeClr val="phClr"/>
+          </a:solidFill>
+          <a:prstDash val="solid"/>
+          <a:miter lim="800000"/>
+        </a:ln>
+        <a:ln w="25400" cap="flat" cmpd="sng" algn="ctr">
+          <a:solidFill>
+            <a:schemeClr val="phClr"/>
+          </a:solidFill>
+          <a:prstDash val="solid"/>
+          <a:miter lim="800000"/>
+        </a:ln>
+      </a:lnStyleLst>
+      <a:effectStyleLst>
+        <a:effectStyle>
+          <a:effectLst/>
+        </a:effectStyle>
+        <a:effectStyle>
+          <a:effectLst/>
+        </a:effectStyle>
+        <a:effectStyle>
+          <a:effectLst>
+            <a:outerShdw blurRad="57150" dist="19050" dir="5400000" algn="ctr" rotWithShape="0">
+              <a:srgbClr val="000000">
+                <a:alpha val="63000"/>
+              </a:srgbClr>
+            </a:outerShdw>
+          </a:effectLst>
+        </a:effectStyle>
+      </a:effectStyleLst>
+      <a:bgFillStyleLst>
+        <a:solidFill>
+          <a:schemeClr val="phClr"/>
+        </a:solidFill>
+        <a:solidFill>
+          <a:schemeClr val="phClr">
+            <a:tint val="95000"/>
+            <a:satMod val="170000"/>
+          </a:schemeClr>
+        </a:solidFill>
+        <a:gradFill rotWithShape="1">
+          <a:gsLst>
+            <a:gs pos="0">
+              <a:schemeClr val="phClr">
+                <a:tint val="93000"/>
+                <a:satMod val="150000"/>
+                <a:shade val="98000"/>
+                <a:lumMod val="102000"/>
+              </a:schemeClr>
+            </a:gs>
+            <a:gs pos="50000">
+              <a:schemeClr val="phClr">
+                <a:tint val="98000"/>
+                <a:satMod val="130000"/>
+                <a:shade val="90000"/>
+                <a:lumMod val="103000"/>
+              </a:schemeClr>
+            </a:gs>
+            <a:gs pos="100000">
+              <a:schemeClr val="phClr">
+                <a:shade val="63000"/>
+                <a:satMod val="120000"/>
+              </a:schemeClr>
+            </a:gs>
+          </a:gsLst>
+          <a:lin ang="5400000" scaled="0"/>
+        </a:gradFill>
+      </a:bgFillStyleLst>
+    </a:fmtScheme>
+  </a:themeElements>
+  <a:objectDefaults>
+    <a:lnDef>
+      <a:spPr/>
+      <a:bodyPr/>
+      <a:lstStyle/>
+      <a:style>
+        <a:lnRef idx="2">
+          <a:schemeClr val="accent1"/>
+        </a:lnRef>
+        <a:fillRef idx="0">
+          <a:schemeClr val="accent1"/>
+        </a:fillRef>
+        <a:effectRef idx="1">
+          <a:schemeClr val="accent1"/>
+        </a:effectRef>
+        <a:fontRef idx="minor">
+          <a:schemeClr val="tx1"/>
+        </a:fontRef>
+      </a:style>
+    </a:lnDef>
+  </a:objectDefaults>
+  <a:extraClrSchemeLst/>
+  <a:extLst>
+    <a:ext uri="{05A4C25C-085E-4340-85A3-A5531E510DB2}">
+      <thm15:themeFamily xmlns:thm15="http://schemas.microsoft.com/office/thememl/2012/main" name="Office Theme" id="{2E142A2C-CD16-42D6-873A-C26D2A0506FA}" vid="{1BDDFF52-6CD6-40A5-AB3C-68EB2F1E4D0A}"/>
+    </a:ext>
+  </a:extLst>
+</a:theme>
 </file>